--- a/slide/CA3060-3-CallingConvention.pptx
+++ b/slide/CA3060-3-CallingConvention.pptx
@@ -161,226 +161,53 @@
 </p:presentation>
 </file>
 
+<file path=ppt/revisionInfo.xml><?xml version="1.0" encoding="utf-8"?>
+<p1510:revInfo xmlns:a="http://schemas.openxmlformats.org/drawingml/2006/main" xmlns:r="http://schemas.openxmlformats.org/officeDocument/2006/relationships" xmlns:p1510="http://schemas.microsoft.com/office/powerpoint/2015/10/main">
+  <p1510:revLst>
+    <p1510:client id="{9915B11C-5D81-44A0-80F5-19D750EDEFEA}" v="2" dt="2026-02-22T14:05:32.049"/>
+  </p1510:revLst>
+</p1510:revInfo>
+</file>
+
 <file path=ppt/changesInfos/changesInfo1.xml><?xml version="1.0" encoding="utf-8"?>
 <pc:chgInfo xmlns:a="http://schemas.openxmlformats.org/drawingml/2006/main" xmlns:r="http://schemas.openxmlformats.org/officeDocument/2006/relationships" xmlns:ac="http://schemas.microsoft.com/office/drawing/2013/main/command" xmlns:pc="http://schemas.microsoft.com/office/powerpoint/2013/main/command">
   <pc:docChgLst>
-    <pc:chgData name="Prof. Wang Fangxin (SSE)" userId="ce1f3ee1-525b-4f0b-8f12-bc5b2dd7d371" providerId="ADAL" clId="{072444D5-B6E1-794C-B782-80CEB355B39B}"/>
-    <pc:docChg chg="undo custSel addSld modSld">
-      <pc:chgData name="Prof. Wang Fangxin (SSE)" userId="ce1f3ee1-525b-4f0b-8f12-bc5b2dd7d371" providerId="ADAL" clId="{072444D5-B6E1-794C-B782-80CEB355B39B}" dt="2023-01-04T10:36:32.720" v="702" actId="20577"/>
+    <pc:chgData name="Chaoyi Sun (SDS,124090550)" userId="7336b744-5857-42bc-9fde-1c1347a32774" providerId="ADAL" clId="{3A35FEB6-D186-4DFE-8550-C935A8639321}"/>
+    <pc:docChg chg="undo custSel modSld">
+      <pc:chgData name="Chaoyi Sun (SDS,124090550)" userId="7336b744-5857-42bc-9fde-1c1347a32774" providerId="ADAL" clId="{3A35FEB6-D186-4DFE-8550-C935A8639321}" dt="2026-02-22T14:05:32.049" v="5" actId="478"/>
       <pc:docMkLst>
         <pc:docMk/>
       </pc:docMkLst>
-      <pc:sldChg chg="modSp mod">
-        <pc:chgData name="Prof. Wang Fangxin (SSE)" userId="ce1f3ee1-525b-4f0b-8f12-bc5b2dd7d371" providerId="ADAL" clId="{072444D5-B6E1-794C-B782-80CEB355B39B}" dt="2023-01-04T10:36:26.792" v="695" actId="20577"/>
+      <pc:sldChg chg="delSp modSp mod">
+        <pc:chgData name="Chaoyi Sun (SDS,124090550)" userId="7336b744-5857-42bc-9fde-1c1347a32774" providerId="ADAL" clId="{3A35FEB6-D186-4DFE-8550-C935A8639321}" dt="2026-02-22T14:05:32.049" v="5" actId="478"/>
         <pc:sldMkLst>
           <pc:docMk/>
-          <pc:sldMk cId="0" sldId="296"/>
+          <pc:sldMk cId="0" sldId="401"/>
         </pc:sldMkLst>
-        <pc:spChg chg="mod">
-          <ac:chgData name="Prof. Wang Fangxin (SSE)" userId="ce1f3ee1-525b-4f0b-8f12-bc5b2dd7d371" providerId="ADAL" clId="{072444D5-B6E1-794C-B782-80CEB355B39B}" dt="2023-01-04T10:36:06.733" v="685" actId="20577"/>
+        <pc:spChg chg="del mod">
+          <ac:chgData name="Chaoyi Sun (SDS,124090550)" userId="7336b744-5857-42bc-9fde-1c1347a32774" providerId="ADAL" clId="{3A35FEB6-D186-4DFE-8550-C935A8639321}" dt="2026-02-22T14:05:32.049" v="5" actId="478"/>
           <ac:spMkLst>
             <pc:docMk/>
-            <pc:sldMk cId="0" sldId="296"/>
-            <ac:spMk id="3" creationId="{00000000-0000-0000-0000-000000000000}"/>
+            <pc:sldMk cId="0" sldId="401"/>
+            <ac:spMk id="3075" creationId="{373909FB-C636-447F-9272-5642CFE0E444}"/>
           </ac:spMkLst>
         </pc:spChg>
-        <pc:spChg chg="mod">
-          <ac:chgData name="Prof. Wang Fangxin (SSE)" userId="ce1f3ee1-525b-4f0b-8f12-bc5b2dd7d371" providerId="ADAL" clId="{072444D5-B6E1-794C-B782-80CEB355B39B}" dt="2023-01-04T10:36:26.792" v="695" actId="20577"/>
-          <ac:spMkLst>
+        <pc:cxnChg chg="mod">
+          <ac:chgData name="Chaoyi Sun (SDS,124090550)" userId="7336b744-5857-42bc-9fde-1c1347a32774" providerId="ADAL" clId="{3A35FEB6-D186-4DFE-8550-C935A8639321}" dt="2026-02-22T14:05:22.829" v="3" actId="1076"/>
+          <ac:cxnSpMkLst>
             <pc:docMk/>
-            <pc:sldMk cId="0" sldId="296"/>
-            <ac:spMk id="6" creationId="{00000000-0000-0000-0000-000000000000}"/>
-          </ac:spMkLst>
-        </pc:spChg>
-      </pc:sldChg>
-      <pc:sldChg chg="modSp mod">
-        <pc:chgData name="Prof. Wang Fangxin (SSE)" userId="ce1f3ee1-525b-4f0b-8f12-bc5b2dd7d371" providerId="ADAL" clId="{072444D5-B6E1-794C-B782-80CEB355B39B}" dt="2023-01-04T10:27:49.456" v="356" actId="20577"/>
-        <pc:sldMkLst>
-          <pc:docMk/>
-          <pc:sldMk cId="0" sldId="299"/>
-        </pc:sldMkLst>
-        <pc:spChg chg="mod">
-          <ac:chgData name="Prof. Wang Fangxin (SSE)" userId="ce1f3ee1-525b-4f0b-8f12-bc5b2dd7d371" providerId="ADAL" clId="{072444D5-B6E1-794C-B782-80CEB355B39B}" dt="2023-01-04T10:27:49.456" v="356" actId="20577"/>
-          <ac:spMkLst>
+            <pc:sldMk cId="0" sldId="401"/>
+            <ac:cxnSpMk id="4" creationId="{1A10491C-6F0E-4759-B05E-A66729B80E11}"/>
+          </ac:cxnSpMkLst>
+        </pc:cxnChg>
+        <pc:cxnChg chg="mod">
+          <ac:chgData name="Chaoyi Sun (SDS,124090550)" userId="7336b744-5857-42bc-9fde-1c1347a32774" providerId="ADAL" clId="{3A35FEB6-D186-4DFE-8550-C935A8639321}" dt="2026-02-22T14:05:22.330" v="2" actId="1076"/>
+          <ac:cxnSpMkLst>
             <pc:docMk/>
-            <pc:sldMk cId="0" sldId="299"/>
-            <ac:spMk id="3" creationId="{00000000-0000-0000-0000-000000000000}"/>
-          </ac:spMkLst>
-        </pc:spChg>
-      </pc:sldChg>
-      <pc:sldChg chg="modSp mod">
-        <pc:chgData name="Prof. Wang Fangxin (SSE)" userId="ce1f3ee1-525b-4f0b-8f12-bc5b2dd7d371" providerId="ADAL" clId="{072444D5-B6E1-794C-B782-80CEB355B39B}" dt="2023-01-04T10:24:58.830" v="335" actId="20577"/>
-        <pc:sldMkLst>
-          <pc:docMk/>
-          <pc:sldMk cId="0" sldId="391"/>
-        </pc:sldMkLst>
-        <pc:spChg chg="mod">
-          <ac:chgData name="Prof. Wang Fangxin (SSE)" userId="ce1f3ee1-525b-4f0b-8f12-bc5b2dd7d371" providerId="ADAL" clId="{072444D5-B6E1-794C-B782-80CEB355B39B}" dt="2023-01-04T10:24:58.830" v="335" actId="20577"/>
-          <ac:spMkLst>
-            <pc:docMk/>
-            <pc:sldMk cId="0" sldId="391"/>
-            <ac:spMk id="6" creationId="{00000000-0000-0000-0000-000000000000}"/>
-          </ac:spMkLst>
-        </pc:spChg>
-      </pc:sldChg>
-      <pc:sldChg chg="modSp add mod">
-        <pc:chgData name="Prof. Wang Fangxin (SSE)" userId="ce1f3ee1-525b-4f0b-8f12-bc5b2dd7d371" providerId="ADAL" clId="{072444D5-B6E1-794C-B782-80CEB355B39B}" dt="2023-01-04T10:36:32.720" v="702" actId="20577"/>
-        <pc:sldMkLst>
-          <pc:docMk/>
-          <pc:sldMk cId="2341894575" sldId="447"/>
-        </pc:sldMkLst>
-        <pc:spChg chg="mod">
-          <ac:chgData name="Prof. Wang Fangxin (SSE)" userId="ce1f3ee1-525b-4f0b-8f12-bc5b2dd7d371" providerId="ADAL" clId="{072444D5-B6E1-794C-B782-80CEB355B39B}" dt="2023-01-04T10:32:31.287" v="384" actId="20577"/>
-          <ac:spMkLst>
-            <pc:docMk/>
-            <pc:sldMk cId="2341894575" sldId="447"/>
-            <ac:spMk id="3" creationId="{00000000-0000-0000-0000-000000000000}"/>
-          </ac:spMkLst>
-        </pc:spChg>
-        <pc:spChg chg="mod">
-          <ac:chgData name="Prof. Wang Fangxin (SSE)" userId="ce1f3ee1-525b-4f0b-8f12-bc5b2dd7d371" providerId="ADAL" clId="{072444D5-B6E1-794C-B782-80CEB355B39B}" dt="2023-01-04T10:36:32.720" v="702" actId="20577"/>
-          <ac:spMkLst>
-            <pc:docMk/>
-            <pc:sldMk cId="2341894575" sldId="447"/>
-            <ac:spMk id="6" creationId="{00000000-0000-0000-0000-000000000000}"/>
-          </ac:spMkLst>
-        </pc:spChg>
-      </pc:sldChg>
-    </pc:docChg>
-  </pc:docChgLst>
-  <pc:docChgLst>
-    <pc:chgData name="Prof. Wang Fangxin (SSE)" userId="ce1f3ee1-525b-4f0b-8f12-bc5b2dd7d371" providerId="ADAL" clId="{56731C7C-97E0-41C3-86F4-ADF8CE8A2053}"/>
-    <pc:docChg chg="undo custSel delSld modSld sldOrd">
-      <pc:chgData name="Prof. Wang Fangxin (SSE)" userId="ce1f3ee1-525b-4f0b-8f12-bc5b2dd7d371" providerId="ADAL" clId="{56731C7C-97E0-41C3-86F4-ADF8CE8A2053}" dt="2022-01-10T06:59:30.151" v="590" actId="2696"/>
-      <pc:docMkLst>
-        <pc:docMk/>
-      </pc:docMkLst>
-      <pc:sldChg chg="modSp">
-        <pc:chgData name="Prof. Wang Fangxin (SSE)" userId="ce1f3ee1-525b-4f0b-8f12-bc5b2dd7d371" providerId="ADAL" clId="{56731C7C-97E0-41C3-86F4-ADF8CE8A2053}" dt="2022-01-10T06:28:47.372" v="1" actId="27636"/>
-        <pc:sldMkLst>
-          <pc:docMk/>
-          <pc:sldMk cId="0" sldId="262"/>
-        </pc:sldMkLst>
-        <pc:spChg chg="mod">
-          <ac:chgData name="Prof. Wang Fangxin (SSE)" userId="ce1f3ee1-525b-4f0b-8f12-bc5b2dd7d371" providerId="ADAL" clId="{56731C7C-97E0-41C3-86F4-ADF8CE8A2053}" dt="2022-01-10T06:28:47.372" v="1" actId="27636"/>
-          <ac:spMkLst>
-            <pc:docMk/>
-            <pc:sldMk cId="0" sldId="262"/>
-            <ac:spMk id="3" creationId="{00000000-0000-0000-0000-000000000000}"/>
-          </ac:spMkLst>
-        </pc:spChg>
-      </pc:sldChg>
-      <pc:sldChg chg="del">
-        <pc:chgData name="Prof. Wang Fangxin (SSE)" userId="ce1f3ee1-525b-4f0b-8f12-bc5b2dd7d371" providerId="ADAL" clId="{56731C7C-97E0-41C3-86F4-ADF8CE8A2053}" dt="2022-01-10T06:59:30.151" v="590" actId="2696"/>
-        <pc:sldMkLst>
-          <pc:docMk/>
-          <pc:sldMk cId="0" sldId="272"/>
-        </pc:sldMkLst>
-      </pc:sldChg>
-      <pc:sldChg chg="addSp modSp">
-        <pc:chgData name="Prof. Wang Fangxin (SSE)" userId="ce1f3ee1-525b-4f0b-8f12-bc5b2dd7d371" providerId="ADAL" clId="{56731C7C-97E0-41C3-86F4-ADF8CE8A2053}" dt="2022-01-10T06:30:29.070" v="33" actId="1076"/>
-        <pc:sldMkLst>
-          <pc:docMk/>
-          <pc:sldMk cId="0" sldId="295"/>
-        </pc:sldMkLst>
-        <pc:spChg chg="add mod">
-          <ac:chgData name="Prof. Wang Fangxin (SSE)" userId="ce1f3ee1-525b-4f0b-8f12-bc5b2dd7d371" providerId="ADAL" clId="{56731C7C-97E0-41C3-86F4-ADF8CE8A2053}" dt="2022-01-10T06:30:29.070" v="33" actId="1076"/>
-          <ac:spMkLst>
-            <pc:docMk/>
-            <pc:sldMk cId="0" sldId="295"/>
-            <ac:spMk id="4" creationId="{5E4FC43E-652B-47EE-A940-42294AB0E172}"/>
-          </ac:spMkLst>
-        </pc:spChg>
-      </pc:sldChg>
-      <pc:sldChg chg="modSp">
-        <pc:chgData name="Prof. Wang Fangxin (SSE)" userId="ce1f3ee1-525b-4f0b-8f12-bc5b2dd7d371" providerId="ADAL" clId="{56731C7C-97E0-41C3-86F4-ADF8CE8A2053}" dt="2022-01-10T06:51:11.053" v="586" actId="404"/>
-        <pc:sldMkLst>
-          <pc:docMk/>
-          <pc:sldMk cId="0" sldId="296"/>
-        </pc:sldMkLst>
-        <pc:spChg chg="mod">
-          <ac:chgData name="Prof. Wang Fangxin (SSE)" userId="ce1f3ee1-525b-4f0b-8f12-bc5b2dd7d371" providerId="ADAL" clId="{56731C7C-97E0-41C3-86F4-ADF8CE8A2053}" dt="2022-01-10T06:51:11.053" v="586" actId="404"/>
-          <ac:spMkLst>
-            <pc:docMk/>
-            <pc:sldMk cId="0" sldId="296"/>
-            <ac:spMk id="3" creationId="{00000000-0000-0000-0000-000000000000}"/>
-          </ac:spMkLst>
-        </pc:spChg>
-      </pc:sldChg>
-      <pc:sldChg chg="modSp">
-        <pc:chgData name="Prof. Wang Fangxin (SSE)" userId="ce1f3ee1-525b-4f0b-8f12-bc5b2dd7d371" providerId="ADAL" clId="{56731C7C-97E0-41C3-86F4-ADF8CE8A2053}" dt="2022-01-10T06:44:19.141" v="478" actId="207"/>
-        <pc:sldMkLst>
-          <pc:docMk/>
-          <pc:sldMk cId="0" sldId="299"/>
-        </pc:sldMkLst>
-        <pc:spChg chg="mod">
-          <ac:chgData name="Prof. Wang Fangxin (SSE)" userId="ce1f3ee1-525b-4f0b-8f12-bc5b2dd7d371" providerId="ADAL" clId="{56731C7C-97E0-41C3-86F4-ADF8CE8A2053}" dt="2022-01-10T06:44:19.141" v="478" actId="207"/>
-          <ac:spMkLst>
-            <pc:docMk/>
-            <pc:sldMk cId="0" sldId="299"/>
-            <ac:spMk id="3" creationId="{00000000-0000-0000-0000-000000000000}"/>
-          </ac:spMkLst>
-        </pc:spChg>
-      </pc:sldChg>
-      <pc:sldChg chg="modSp ord">
-        <pc:chgData name="Prof. Wang Fangxin (SSE)" userId="ce1f3ee1-525b-4f0b-8f12-bc5b2dd7d371" providerId="ADAL" clId="{56731C7C-97E0-41C3-86F4-ADF8CE8A2053}" dt="2022-01-10T06:48:53.068" v="570" actId="207"/>
-        <pc:sldMkLst>
-          <pc:docMk/>
-          <pc:sldMk cId="0" sldId="301"/>
-        </pc:sldMkLst>
-        <pc:spChg chg="mod">
-          <ac:chgData name="Prof. Wang Fangxin (SSE)" userId="ce1f3ee1-525b-4f0b-8f12-bc5b2dd7d371" providerId="ADAL" clId="{56731C7C-97E0-41C3-86F4-ADF8CE8A2053}" dt="2022-01-10T06:48:53.068" v="570" actId="207"/>
-          <ac:spMkLst>
-            <pc:docMk/>
-            <pc:sldMk cId="0" sldId="301"/>
-            <ac:spMk id="3" creationId="{00000000-0000-0000-0000-000000000000}"/>
-          </ac:spMkLst>
-        </pc:spChg>
-      </pc:sldChg>
-      <pc:sldChg chg="modSp">
-        <pc:chgData name="Prof. Wang Fangxin (SSE)" userId="ce1f3ee1-525b-4f0b-8f12-bc5b2dd7d371" providerId="ADAL" clId="{56731C7C-97E0-41C3-86F4-ADF8CE8A2053}" dt="2022-01-10T06:51:17.850" v="588" actId="404"/>
-        <pc:sldMkLst>
-          <pc:docMk/>
-          <pc:sldMk cId="0" sldId="391"/>
-        </pc:sldMkLst>
-        <pc:spChg chg="mod">
-          <ac:chgData name="Prof. Wang Fangxin (SSE)" userId="ce1f3ee1-525b-4f0b-8f12-bc5b2dd7d371" providerId="ADAL" clId="{56731C7C-97E0-41C3-86F4-ADF8CE8A2053}" dt="2022-01-10T06:51:17.850" v="588" actId="404"/>
-          <ac:spMkLst>
-            <pc:docMk/>
-            <pc:sldMk cId="0" sldId="391"/>
-            <ac:spMk id="6" creationId="{00000000-0000-0000-0000-000000000000}"/>
-          </ac:spMkLst>
-        </pc:spChg>
-      </pc:sldChg>
-      <pc:sldChg chg="modSp del">
-        <pc:chgData name="Prof. Wang Fangxin (SSE)" userId="ce1f3ee1-525b-4f0b-8f12-bc5b2dd7d371" providerId="ADAL" clId="{56731C7C-97E0-41C3-86F4-ADF8CE8A2053}" dt="2022-01-10T06:51:27.305" v="589" actId="2696"/>
-        <pc:sldMkLst>
-          <pc:docMk/>
-          <pc:sldMk cId="0" sldId="392"/>
-        </pc:sldMkLst>
-        <pc:spChg chg="mod">
-          <ac:chgData name="Prof. Wang Fangxin (SSE)" userId="ce1f3ee1-525b-4f0b-8f12-bc5b2dd7d371" providerId="ADAL" clId="{56731C7C-97E0-41C3-86F4-ADF8CE8A2053}" dt="2022-01-10T06:41:58.169" v="400" actId="20577"/>
-          <ac:spMkLst>
-            <pc:docMk/>
-            <pc:sldMk cId="0" sldId="392"/>
-            <ac:spMk id="6" creationId="{00000000-0000-0000-0000-000000000000}"/>
-          </ac:spMkLst>
-        </pc:spChg>
-      </pc:sldChg>
-      <pc:sldChg chg="modSp">
-        <pc:chgData name="Prof. Wang Fangxin (SSE)" userId="ce1f3ee1-525b-4f0b-8f12-bc5b2dd7d371" providerId="ADAL" clId="{56731C7C-97E0-41C3-86F4-ADF8CE8A2053}" dt="2022-01-10T06:45:25" v="501" actId="20577"/>
-        <pc:sldMkLst>
-          <pc:docMk/>
-          <pc:sldMk cId="0" sldId="445"/>
-        </pc:sldMkLst>
-        <pc:spChg chg="mod">
-          <ac:chgData name="Prof. Wang Fangxin (SSE)" userId="ce1f3ee1-525b-4f0b-8f12-bc5b2dd7d371" providerId="ADAL" clId="{56731C7C-97E0-41C3-86F4-ADF8CE8A2053}" dt="2022-01-10T06:45:25" v="501" actId="20577"/>
-          <ac:spMkLst>
-            <pc:docMk/>
-            <pc:sldMk cId="0" sldId="445"/>
-            <ac:spMk id="3" creationId="{00000000-0000-0000-0000-000000000000}"/>
-          </ac:spMkLst>
-        </pc:spChg>
+            <pc:sldMk cId="0" sldId="401"/>
+            <ac:cxnSpMk id="8" creationId="{357E6135-011E-414F-9470-59A461A609E3}"/>
+          </ac:cxnSpMkLst>
+        </pc:cxnChg>
       </pc:sldChg>
     </pc:docChg>
   </pc:docChgLst>
@@ -469,7 +296,7 @@
           <a:p>
             <a:fld id="{45BDCE37-E9BE-4280-8D68-34E43D66CEDB}" type="datetimeFigureOut">
               <a:rPr lang="zh-TW" altLang="en-US" smtClean="0"/>
-              <a:t>2026/1/24</a:t>
+              <a:t>2026/2/22</a:t>
             </a:fld>
             <a:endParaRPr lang="zh-TW" altLang="en-US"/>
           </a:p>
@@ -634,7 +461,7 @@
           <a:p>
             <a:fld id="{FBFBA883-381C-409E-9635-BB54B21745E4}" type="datetimeFigureOut">
               <a:rPr lang="zh-TW" altLang="en-US" smtClean="0"/>
-              <a:t>2026/1/24</a:t>
+              <a:t>2026/2/22</a:t>
             </a:fld>
             <a:endParaRPr lang="zh-TW" altLang="en-US"/>
           </a:p>
@@ -23275,13 +23102,194 @@
               <a:buNone/>
             </a:pPr>
             <a:r>
-              <a:rPr lang="en-US" altLang="zh-TW" sz="2100" b="1">
+              <a:rPr lang="en-US" altLang="zh-TW" sz="2100" b="1" dirty="0">
                 <a:solidFill>
                   <a:srgbClr val="2929FF"/>
                 </a:solidFill>
                 <a:ea typeface="新細明體" panose="02020500000000000000" pitchFamily="18" charset="-120"/>
               </a:rPr>
               <a:t>Function A ()</a:t>
+            </a:r>
+          </a:p>
+          <a:p>
+            <a:pPr>
+              <a:spcBef>
+                <a:spcPct val="0"/>
+              </a:spcBef>
+              <a:buClrTx/>
+              <a:buSzTx/>
+              <a:buFontTx/>
+              <a:buNone/>
+            </a:pPr>
+            <a:r>
+              <a:rPr lang="en-US" altLang="zh-TW" sz="2100" b="1" dirty="0">
+                <a:solidFill>
+                  <a:srgbClr val="2929FF"/>
+                </a:solidFill>
+                <a:ea typeface="新細明體" panose="02020500000000000000" pitchFamily="18" charset="-120"/>
+              </a:rPr>
+              <a:t>…</a:t>
+            </a:r>
+          </a:p>
+          <a:p>
+            <a:pPr>
+              <a:spcBef>
+                <a:spcPct val="0"/>
+              </a:spcBef>
+              <a:buClrTx/>
+              <a:buSzTx/>
+              <a:buFontTx/>
+              <a:buNone/>
+            </a:pPr>
+            <a:r>
+              <a:rPr lang="en-US" altLang="zh-TW" sz="2100" b="1" dirty="0" err="1">
+                <a:solidFill>
+                  <a:srgbClr val="2929FF"/>
+                </a:solidFill>
+                <a:ea typeface="新細明體" panose="02020500000000000000" pitchFamily="18" charset="-120"/>
+              </a:rPr>
+              <a:t>lw</a:t>
+            </a:r>
+            <a:r>
+              <a:rPr lang="en-US" altLang="zh-TW" sz="2100" b="1" dirty="0">
+                <a:solidFill>
+                  <a:srgbClr val="2929FF"/>
+                </a:solidFill>
+                <a:ea typeface="新細明體" panose="02020500000000000000" pitchFamily="18" charset="-120"/>
+              </a:rPr>
+              <a:t> $8 -4($</a:t>
+            </a:r>
+            <a:r>
+              <a:rPr lang="en-US" altLang="zh-TW" sz="2100" b="1" dirty="0" err="1">
+                <a:solidFill>
+                  <a:srgbClr val="2929FF"/>
+                </a:solidFill>
+                <a:ea typeface="新細明體" panose="02020500000000000000" pitchFamily="18" charset="-120"/>
+              </a:rPr>
+              <a:t>fp</a:t>
+            </a:r>
+            <a:r>
+              <a:rPr lang="en-US" altLang="zh-TW" sz="2100" b="1" dirty="0">
+                <a:solidFill>
+                  <a:srgbClr val="2929FF"/>
+                </a:solidFill>
+                <a:ea typeface="新細明體" panose="02020500000000000000" pitchFamily="18" charset="-120"/>
+              </a:rPr>
+              <a:t>)</a:t>
+            </a:r>
+          </a:p>
+          <a:p>
+            <a:pPr>
+              <a:spcBef>
+                <a:spcPct val="0"/>
+              </a:spcBef>
+              <a:buClrTx/>
+              <a:buSzTx/>
+              <a:buFontTx/>
+              <a:buNone/>
+            </a:pPr>
+            <a:r>
+              <a:rPr lang="en-US" altLang="zh-TW" sz="2100" b="1" dirty="0" err="1">
+                <a:solidFill>
+                  <a:srgbClr val="2929FF"/>
+                </a:solidFill>
+                <a:ea typeface="新細明體" panose="02020500000000000000" pitchFamily="18" charset="-120"/>
+              </a:rPr>
+              <a:t>lw</a:t>
+            </a:r>
+            <a:r>
+              <a:rPr lang="en-US" altLang="zh-TW" sz="2100" b="1" dirty="0">
+                <a:solidFill>
+                  <a:srgbClr val="2929FF"/>
+                </a:solidFill>
+                <a:ea typeface="新細明體" panose="02020500000000000000" pitchFamily="18" charset="-120"/>
+              </a:rPr>
+              <a:t> $9 -8($</a:t>
+            </a:r>
+            <a:r>
+              <a:rPr lang="en-US" altLang="zh-TW" sz="2100" b="1" dirty="0" err="1">
+                <a:solidFill>
+                  <a:srgbClr val="2929FF"/>
+                </a:solidFill>
+                <a:ea typeface="新細明體" panose="02020500000000000000" pitchFamily="18" charset="-120"/>
+              </a:rPr>
+              <a:t>fp</a:t>
+            </a:r>
+            <a:r>
+              <a:rPr lang="en-US" altLang="zh-TW" sz="2100" b="1" dirty="0">
+                <a:solidFill>
+                  <a:srgbClr val="2929FF"/>
+                </a:solidFill>
+                <a:ea typeface="新細明體" panose="02020500000000000000" pitchFamily="18" charset="-120"/>
+              </a:rPr>
+              <a:t>)</a:t>
+            </a:r>
+          </a:p>
+          <a:p>
+            <a:pPr>
+              <a:spcBef>
+                <a:spcPct val="0"/>
+              </a:spcBef>
+              <a:buClrTx/>
+              <a:buSzTx/>
+              <a:buFontTx/>
+              <a:buNone/>
+            </a:pPr>
+            <a:r>
+              <a:rPr lang="en-US" altLang="zh-TW" sz="2100" b="1" dirty="0">
+                <a:solidFill>
+                  <a:srgbClr val="2929FF"/>
+                </a:solidFill>
+                <a:ea typeface="新細明體" panose="02020500000000000000" pitchFamily="18" charset="-120"/>
+              </a:rPr>
+              <a:t>add $10, $8,$9</a:t>
+            </a:r>
+          </a:p>
+          <a:p>
+            <a:pPr>
+              <a:spcBef>
+                <a:spcPct val="0"/>
+              </a:spcBef>
+              <a:buClrTx/>
+              <a:buSzTx/>
+              <a:buFontTx/>
+              <a:buNone/>
+            </a:pPr>
+            <a:r>
+              <a:rPr lang="en-US" altLang="zh-TW" sz="2100" b="1" dirty="0" err="1">
+                <a:solidFill>
+                  <a:srgbClr val="2929FF"/>
+                </a:solidFill>
+                <a:ea typeface="新細明體" panose="02020500000000000000" pitchFamily="18" charset="-120"/>
+              </a:rPr>
+              <a:t>sw</a:t>
+            </a:r>
+            <a:r>
+              <a:rPr lang="en-US" altLang="zh-TW" sz="2100" b="1" dirty="0">
+                <a:solidFill>
+                  <a:srgbClr val="2929FF"/>
+                </a:solidFill>
+                <a:ea typeface="新細明體" panose="02020500000000000000" pitchFamily="18" charset="-120"/>
+              </a:rPr>
+              <a:t> $10, -12($</a:t>
+            </a:r>
+            <a:r>
+              <a:rPr lang="en-US" altLang="zh-TW" sz="2100" b="1" dirty="0" err="1">
+                <a:solidFill>
+                  <a:srgbClr val="2929FF"/>
+                </a:solidFill>
+                <a:ea typeface="新細明體" panose="02020500000000000000" pitchFamily="18" charset="-120"/>
+              </a:rPr>
+              <a:t>fp</a:t>
+            </a:r>
+            <a:r>
+              <a:rPr lang="en-US" altLang="zh-TW" sz="2100" b="1" dirty="0">
+                <a:solidFill>
+                  <a:srgbClr val="2929FF"/>
+                </a:solidFill>
+                <a:ea typeface="新細明體" panose="02020500000000000000" pitchFamily="18" charset="-120"/>
+              </a:rPr>
+              <a:t>)</a:t>
             </a:r>
           </a:p>
           <a:p>
@@ -23301,7 +23309,7 @@
                 </a:solidFill>
                 <a:ea typeface="新細明體" panose="02020500000000000000" pitchFamily="18" charset="-120"/>
               </a:rPr>
-              <a:t>…</a:t>
+              <a:t>$v0 =  B(1,2,3); /* function call */</a:t>
             </a:r>
           </a:p>
           <a:p>
@@ -23315,13 +23323,13 @@
               <a:buNone/>
             </a:pPr>
             <a:r>
-              <a:rPr lang="en-US" altLang="zh-TW" sz="2100" b="1">
+              <a:rPr lang="en-US" altLang="zh-TW" sz="2100" b="1" dirty="0">
                 <a:solidFill>
                   <a:srgbClr val="2929FF"/>
                 </a:solidFill>
                 <a:ea typeface="新細明體" panose="02020500000000000000" pitchFamily="18" charset="-120"/>
               </a:rPr>
-              <a:t>lw $8 -4($fp)</a:t>
+              <a:t>add $v0, $v0, $v0</a:t>
             </a:r>
           </a:p>
           <a:p>
@@ -23335,107 +23343,7 @@
               <a:buNone/>
             </a:pPr>
             <a:r>
-              <a:rPr lang="en-US" altLang="zh-TW" sz="2100" b="1">
-                <a:solidFill>
-                  <a:srgbClr val="2929FF"/>
-                </a:solidFill>
-                <a:ea typeface="新細明體" panose="02020500000000000000" pitchFamily="18" charset="-120"/>
-              </a:rPr>
-              <a:t>lw $9 -8($fp)</a:t>
-            </a:r>
-          </a:p>
-          <a:p>
-            <a:pPr>
-              <a:spcBef>
-                <a:spcPct val="0"/>
-              </a:spcBef>
-              <a:buClrTx/>
-              <a:buSzTx/>
-              <a:buFontTx/>
-              <a:buNone/>
-            </a:pPr>
-            <a:r>
-              <a:rPr lang="en-US" altLang="zh-TW" sz="2100" b="1">
-                <a:solidFill>
-                  <a:srgbClr val="2929FF"/>
-                </a:solidFill>
-                <a:ea typeface="新細明體" panose="02020500000000000000" pitchFamily="18" charset="-120"/>
-              </a:rPr>
-              <a:t>add $10, $8,$9</a:t>
-            </a:r>
-          </a:p>
-          <a:p>
-            <a:pPr>
-              <a:spcBef>
-                <a:spcPct val="0"/>
-              </a:spcBef>
-              <a:buClrTx/>
-              <a:buSzTx/>
-              <a:buFontTx/>
-              <a:buNone/>
-            </a:pPr>
-            <a:r>
-              <a:rPr lang="en-US" altLang="zh-TW" sz="2100" b="1">
-                <a:solidFill>
-                  <a:srgbClr val="2929FF"/>
-                </a:solidFill>
-                <a:ea typeface="新細明體" panose="02020500000000000000" pitchFamily="18" charset="-120"/>
-              </a:rPr>
-              <a:t>sw $10, -12($fp)</a:t>
-            </a:r>
-          </a:p>
-          <a:p>
-            <a:pPr>
-              <a:spcBef>
-                <a:spcPct val="0"/>
-              </a:spcBef>
-              <a:buClrTx/>
-              <a:buSzTx/>
-              <a:buFontTx/>
-              <a:buNone/>
-            </a:pPr>
-            <a:r>
-              <a:rPr lang="en-US" altLang="zh-TW" sz="2100" b="1">
-                <a:solidFill>
-                  <a:srgbClr val="2929FF"/>
-                </a:solidFill>
-                <a:ea typeface="新細明體" panose="02020500000000000000" pitchFamily="18" charset="-120"/>
-              </a:rPr>
-              <a:t>$v0 =  B(1,2,3); /* function call */</a:t>
-            </a:r>
-          </a:p>
-          <a:p>
-            <a:pPr>
-              <a:spcBef>
-                <a:spcPct val="0"/>
-              </a:spcBef>
-              <a:buClrTx/>
-              <a:buSzTx/>
-              <a:buFontTx/>
-              <a:buNone/>
-            </a:pPr>
-            <a:r>
-              <a:rPr lang="en-US" altLang="zh-TW" sz="2100" b="1">
-                <a:solidFill>
-                  <a:srgbClr val="2929FF"/>
-                </a:solidFill>
-                <a:ea typeface="新細明體" panose="02020500000000000000" pitchFamily="18" charset="-120"/>
-              </a:rPr>
-              <a:t>add $v0, $v0, $v0</a:t>
-            </a:r>
-          </a:p>
-          <a:p>
-            <a:pPr>
-              <a:spcBef>
-                <a:spcPct val="0"/>
-              </a:spcBef>
-              <a:buClrTx/>
-              <a:buSzTx/>
-              <a:buFontTx/>
-              <a:buNone/>
-            </a:pPr>
-            <a:r>
-              <a:rPr lang="en-US" altLang="zh-TW" sz="2100" b="1">
+              <a:rPr lang="en-US" altLang="zh-TW" sz="2100" b="1" dirty="0">
                 <a:solidFill>
                   <a:srgbClr val="2929FF"/>
                 </a:solidFill>
@@ -23443,7 +23351,7 @@
               </a:rPr>
               <a:t>return</a:t>
             </a:r>
-            <a:endParaRPr lang="zh-TW" altLang="en-US" sz="2100" b="1">
+            <a:endParaRPr lang="zh-TW" altLang="en-US" sz="2100" b="1" dirty="0">
               <a:solidFill>
                 <a:srgbClr val="2929FF"/>
               </a:solidFill>
@@ -40243,208 +40151,6 @@
           <a:chExt cx="0" cy="0"/>
         </a:xfrm>
       </p:grpSpPr>
-      <p:sp>
-        <p:nvSpPr>
-          <p:cNvPr id="3075" name="Footer Placeholder 4">
-            <a:extLst>
-              <a:ext uri="{FF2B5EF4-FFF2-40B4-BE49-F238E27FC236}">
-                <a16:creationId xmlns:a16="http://schemas.microsoft.com/office/drawing/2014/main" id="{373909FB-C636-447F-9272-5642CFE0E444}"/>
-              </a:ext>
-            </a:extLst>
-          </p:cNvPr>
-          <p:cNvSpPr>
-            <a:spLocks noGrp="1"/>
-          </p:cNvSpPr>
-          <p:nvPr>
-            <p:ph type="ftr" sz="quarter" idx="4294967295"/>
-          </p:nvPr>
-        </p:nvSpPr>
-        <p:spPr bwMode="auto">
-          <a:xfrm>
-            <a:off x="1676400" y="6477000"/>
-            <a:ext cx="6172200" cy="304800"/>
-          </a:xfrm>
-          <a:prstGeom prst="rect">
-            <a:avLst/>
-          </a:prstGeom>
-          <a:noFill/>
-          <a:ln w="9525">
-            <a:noFill/>
-            <a:miter lim="800000"/>
-            <a:headEnd/>
-            <a:tailEnd/>
-          </a:ln>
-          <a:effectLst/>
-          <a:extLst>
-            <a:ext uri="{909E8E84-426E-40DD-AFC4-6F175D3DCCD1}">
-              <a14:hiddenFill xmlns:a14="http://schemas.microsoft.com/office/drawing/2010/main">
-                <a:solidFill>
-                  <a:srgbClr val="FFFFFF"/>
-                </a:solidFill>
-              </a14:hiddenFill>
-            </a:ext>
-            <a:ext uri="{91240B29-F687-4F45-9708-019B960494DF}">
-              <a14:hiddenLine xmlns:a14="http://schemas.microsoft.com/office/drawing/2010/main" w="9525">
-                <a:solidFill>
-                  <a:srgbClr val="000000"/>
-                </a:solidFill>
-                <a:miter lim="800000"/>
-                <a:headEnd/>
-                <a:tailEnd/>
-              </a14:hiddenLine>
-            </a:ext>
-          </a:extLst>
-        </p:spPr>
-        <p:txBody>
-          <a:bodyPr vert="horz" wrap="square" lIns="91440" tIns="45720" rIns="91440" bIns="45720" numCol="1" anchor="b" anchorCtr="0" compatLnSpc="1">
-            <a:prstTxWarp prst="textNoShape">
-              <a:avLst/>
-            </a:prstTxWarp>
-          </a:bodyPr>
-          <a:lstStyle>
-            <a:defPPr>
-              <a:defRPr lang="en-US"/>
-            </a:defPPr>
-            <a:lvl1pPr algn="ctr" rtl="0" eaLnBrk="1" fontAlgn="base" hangingPunct="1">
-              <a:spcBef>
-                <a:spcPct val="0"/>
-              </a:spcBef>
-              <a:spcAft>
-                <a:spcPct val="0"/>
-              </a:spcAft>
-              <a:defRPr sz="1400" kern="1200">
-                <a:solidFill>
-                  <a:schemeClr val="tx1"/>
-                </a:solidFill>
-                <a:effectLst>
-                  <a:outerShdw blurRad="38100" dist="38100" dir="2700000" algn="tl">
-                    <a:srgbClr val="000000"/>
-                  </a:outerShdw>
-                </a:effectLst>
-                <a:latin typeface="Arial" charset="0"/>
-                <a:ea typeface="新細明體" pitchFamily="18" charset="-120"/>
-                <a:cs typeface="+mn-cs"/>
-              </a:defRPr>
-            </a:lvl1pPr>
-            <a:lvl2pPr marL="457200" algn="l" rtl="0" eaLnBrk="0" fontAlgn="base" hangingPunct="0">
-              <a:spcBef>
-                <a:spcPct val="0"/>
-              </a:spcBef>
-              <a:spcAft>
-                <a:spcPct val="0"/>
-              </a:spcAft>
-              <a:defRPr kern="1200">
-                <a:solidFill>
-                  <a:schemeClr val="tx1"/>
-                </a:solidFill>
-                <a:latin typeface="Arial" panose="020B0604020202020204" pitchFamily="34" charset="0"/>
-                <a:ea typeface="+mn-ea"/>
-                <a:cs typeface="+mn-cs"/>
-              </a:defRPr>
-            </a:lvl2pPr>
-            <a:lvl3pPr marL="914400" algn="l" rtl="0" eaLnBrk="0" fontAlgn="base" hangingPunct="0">
-              <a:spcBef>
-                <a:spcPct val="0"/>
-              </a:spcBef>
-              <a:spcAft>
-                <a:spcPct val="0"/>
-              </a:spcAft>
-              <a:defRPr kern="1200">
-                <a:solidFill>
-                  <a:schemeClr val="tx1"/>
-                </a:solidFill>
-                <a:latin typeface="Arial" panose="020B0604020202020204" pitchFamily="34" charset="0"/>
-                <a:ea typeface="+mn-ea"/>
-                <a:cs typeface="+mn-cs"/>
-              </a:defRPr>
-            </a:lvl3pPr>
-            <a:lvl4pPr marL="1371600" algn="l" rtl="0" eaLnBrk="0" fontAlgn="base" hangingPunct="0">
-              <a:spcBef>
-                <a:spcPct val="0"/>
-              </a:spcBef>
-              <a:spcAft>
-                <a:spcPct val="0"/>
-              </a:spcAft>
-              <a:defRPr kern="1200">
-                <a:solidFill>
-                  <a:schemeClr val="tx1"/>
-                </a:solidFill>
-                <a:latin typeface="Arial" panose="020B0604020202020204" pitchFamily="34" charset="0"/>
-                <a:ea typeface="+mn-ea"/>
-                <a:cs typeface="+mn-cs"/>
-              </a:defRPr>
-            </a:lvl4pPr>
-            <a:lvl5pPr marL="1828800" algn="l" rtl="0" eaLnBrk="0" fontAlgn="base" hangingPunct="0">
-              <a:spcBef>
-                <a:spcPct val="0"/>
-              </a:spcBef>
-              <a:spcAft>
-                <a:spcPct val="0"/>
-              </a:spcAft>
-              <a:defRPr kern="1200">
-                <a:solidFill>
-                  <a:schemeClr val="tx1"/>
-                </a:solidFill>
-                <a:latin typeface="Arial" panose="020B0604020202020204" pitchFamily="34" charset="0"/>
-                <a:ea typeface="+mn-ea"/>
-                <a:cs typeface="+mn-cs"/>
-              </a:defRPr>
-            </a:lvl5pPr>
-            <a:lvl6pPr marL="2286000" algn="l" defTabSz="914400" rtl="0" eaLnBrk="1" latinLnBrk="0" hangingPunct="1">
-              <a:defRPr kern="1200">
-                <a:solidFill>
-                  <a:schemeClr val="tx1"/>
-                </a:solidFill>
-                <a:latin typeface="Arial" panose="020B0604020202020204" pitchFamily="34" charset="0"/>
-                <a:ea typeface="+mn-ea"/>
-                <a:cs typeface="+mn-cs"/>
-              </a:defRPr>
-            </a:lvl6pPr>
-            <a:lvl7pPr marL="2743200" algn="l" defTabSz="914400" rtl="0" eaLnBrk="1" latinLnBrk="0" hangingPunct="1">
-              <a:defRPr kern="1200">
-                <a:solidFill>
-                  <a:schemeClr val="tx1"/>
-                </a:solidFill>
-                <a:latin typeface="Arial" panose="020B0604020202020204" pitchFamily="34" charset="0"/>
-                <a:ea typeface="+mn-ea"/>
-                <a:cs typeface="+mn-cs"/>
-              </a:defRPr>
-            </a:lvl7pPr>
-            <a:lvl8pPr marL="3200400" algn="l" defTabSz="914400" rtl="0" eaLnBrk="1" latinLnBrk="0" hangingPunct="1">
-              <a:defRPr kern="1200">
-                <a:solidFill>
-                  <a:schemeClr val="tx1"/>
-                </a:solidFill>
-                <a:latin typeface="Arial" panose="020B0604020202020204" pitchFamily="34" charset="0"/>
-                <a:ea typeface="+mn-ea"/>
-                <a:cs typeface="+mn-cs"/>
-              </a:defRPr>
-            </a:lvl8pPr>
-            <a:lvl9pPr marL="3657600" algn="l" defTabSz="914400" rtl="0" eaLnBrk="1" latinLnBrk="0" hangingPunct="1">
-              <a:defRPr kern="1200">
-                <a:solidFill>
-                  <a:schemeClr val="tx1"/>
-                </a:solidFill>
-                <a:latin typeface="Arial" panose="020B0604020202020204" pitchFamily="34" charset="0"/>
-                <a:ea typeface="+mn-ea"/>
-                <a:cs typeface="+mn-cs"/>
-              </a:defRPr>
-            </a:lvl9pPr>
-          </a:lstStyle>
-          <a:p>
-            <a:pPr eaLnBrk="1" hangingPunct="1">
-              <a:defRPr/>
-            </a:pPr>
-            <a:r>
-              <a:rPr lang="en-US" altLang="zh-TW"/>
-              <a:t>Department of Computer Science and Engineering</a:t>
-            </a:r>
-            <a:endParaRPr lang="en-US" altLang="zh-TW">
-              <a:ea typeface="新細明體" charset="-120"/>
-            </a:endParaRPr>
-          </a:p>
-        </p:txBody>
-      </p:sp>
       <p:sp>
         <p:nvSpPr>
           <p:cNvPr id="3076" name="Slide Number Placeholder 5">

--- a/slide/CA3060-3-CallingConvention.pptx
+++ b/slide/CA3060-3-CallingConvention.pptx
@@ -5,10 +5,10 @@
     <p:sldMasterId id="2147483648" r:id="rId1"/>
   </p:sldMasterIdLst>
   <p:notesMasterIdLst>
-    <p:notesMasterId r:id="rId27"/>
+    <p:notesMasterId r:id="rId28"/>
   </p:notesMasterIdLst>
   <p:handoutMasterIdLst>
-    <p:handoutMasterId r:id="rId28"/>
+    <p:handoutMasterId r:id="rId29"/>
   </p:handoutMasterIdLst>
   <p:sldIdLst>
     <p:sldId id="295" r:id="rId2"/>
@@ -22,20 +22,21 @@
     <p:sldId id="412" r:id="rId10"/>
     <p:sldId id="408" r:id="rId11"/>
     <p:sldId id="409" r:id="rId12"/>
-    <p:sldId id="410" r:id="rId13"/>
-    <p:sldId id="411" r:id="rId14"/>
-    <p:sldId id="379" r:id="rId15"/>
-    <p:sldId id="380" r:id="rId16"/>
-    <p:sldId id="381" r:id="rId17"/>
-    <p:sldId id="382" r:id="rId18"/>
-    <p:sldId id="383" r:id="rId19"/>
-    <p:sldId id="384" r:id="rId20"/>
-    <p:sldId id="394" r:id="rId21"/>
-    <p:sldId id="386" r:id="rId22"/>
-    <p:sldId id="388" r:id="rId23"/>
-    <p:sldId id="399" r:id="rId24"/>
-    <p:sldId id="400" r:id="rId25"/>
-    <p:sldId id="413" r:id="rId26"/>
+    <p:sldId id="414" r:id="rId13"/>
+    <p:sldId id="410" r:id="rId14"/>
+    <p:sldId id="411" r:id="rId15"/>
+    <p:sldId id="379" r:id="rId16"/>
+    <p:sldId id="380" r:id="rId17"/>
+    <p:sldId id="381" r:id="rId18"/>
+    <p:sldId id="382" r:id="rId19"/>
+    <p:sldId id="383" r:id="rId20"/>
+    <p:sldId id="384" r:id="rId21"/>
+    <p:sldId id="394" r:id="rId22"/>
+    <p:sldId id="386" r:id="rId23"/>
+    <p:sldId id="388" r:id="rId24"/>
+    <p:sldId id="399" r:id="rId25"/>
+    <p:sldId id="400" r:id="rId26"/>
+    <p:sldId id="413" r:id="rId27"/>
   </p:sldIdLst>
   <p:sldSz cx="9144000" cy="5143500" type="screen16x9"/>
   <p:notesSz cx="6858000" cy="9144000"/>
@@ -161,53 +162,226 @@
 </p:presentation>
 </file>
 
-<file path=ppt/revisionInfo.xml><?xml version="1.0" encoding="utf-8"?>
-<p1510:revInfo xmlns:a="http://schemas.openxmlformats.org/drawingml/2006/main" xmlns:r="http://schemas.openxmlformats.org/officeDocument/2006/relationships" xmlns:p1510="http://schemas.microsoft.com/office/powerpoint/2015/10/main">
-  <p1510:revLst>
-    <p1510:client id="{9915B11C-5D81-44A0-80F5-19D750EDEFEA}" v="2" dt="2026-02-22T14:05:32.049"/>
-  </p1510:revLst>
-</p1510:revInfo>
-</file>
-
 <file path=ppt/changesInfos/changesInfo1.xml><?xml version="1.0" encoding="utf-8"?>
 <pc:chgInfo xmlns:a="http://schemas.openxmlformats.org/drawingml/2006/main" xmlns:r="http://schemas.openxmlformats.org/officeDocument/2006/relationships" xmlns:ac="http://schemas.microsoft.com/office/drawing/2013/main/command" xmlns:pc="http://schemas.microsoft.com/office/powerpoint/2013/main/command">
   <pc:docChgLst>
-    <pc:chgData name="Chaoyi Sun (SDS,124090550)" userId="7336b744-5857-42bc-9fde-1c1347a32774" providerId="ADAL" clId="{3A35FEB6-D186-4DFE-8550-C935A8639321}"/>
-    <pc:docChg chg="undo custSel modSld">
-      <pc:chgData name="Chaoyi Sun (SDS,124090550)" userId="7336b744-5857-42bc-9fde-1c1347a32774" providerId="ADAL" clId="{3A35FEB6-D186-4DFE-8550-C935A8639321}" dt="2026-02-22T14:05:32.049" v="5" actId="478"/>
+    <pc:chgData name="Prof. Wang Fangxin (SSE)" userId="ce1f3ee1-525b-4f0b-8f12-bc5b2dd7d371" providerId="ADAL" clId="{072444D5-B6E1-794C-B782-80CEB355B39B}"/>
+    <pc:docChg chg="undo custSel addSld modSld">
+      <pc:chgData name="Prof. Wang Fangxin (SSE)" userId="ce1f3ee1-525b-4f0b-8f12-bc5b2dd7d371" providerId="ADAL" clId="{072444D5-B6E1-794C-B782-80CEB355B39B}" dt="2023-01-04T10:36:32.720" v="702" actId="20577"/>
       <pc:docMkLst>
         <pc:docMk/>
       </pc:docMkLst>
-      <pc:sldChg chg="delSp modSp mod">
-        <pc:chgData name="Chaoyi Sun (SDS,124090550)" userId="7336b744-5857-42bc-9fde-1c1347a32774" providerId="ADAL" clId="{3A35FEB6-D186-4DFE-8550-C935A8639321}" dt="2026-02-22T14:05:32.049" v="5" actId="478"/>
+      <pc:sldChg chg="modSp mod">
+        <pc:chgData name="Prof. Wang Fangxin (SSE)" userId="ce1f3ee1-525b-4f0b-8f12-bc5b2dd7d371" providerId="ADAL" clId="{072444D5-B6E1-794C-B782-80CEB355B39B}" dt="2023-01-04T10:36:26.792" v="695" actId="20577"/>
         <pc:sldMkLst>
           <pc:docMk/>
-          <pc:sldMk cId="0" sldId="401"/>
+          <pc:sldMk cId="0" sldId="296"/>
         </pc:sldMkLst>
-        <pc:spChg chg="del mod">
-          <ac:chgData name="Chaoyi Sun (SDS,124090550)" userId="7336b744-5857-42bc-9fde-1c1347a32774" providerId="ADAL" clId="{3A35FEB6-D186-4DFE-8550-C935A8639321}" dt="2026-02-22T14:05:32.049" v="5" actId="478"/>
+        <pc:spChg chg="mod">
+          <ac:chgData name="Prof. Wang Fangxin (SSE)" userId="ce1f3ee1-525b-4f0b-8f12-bc5b2dd7d371" providerId="ADAL" clId="{072444D5-B6E1-794C-B782-80CEB355B39B}" dt="2023-01-04T10:36:06.733" v="685" actId="20577"/>
           <ac:spMkLst>
             <pc:docMk/>
-            <pc:sldMk cId="0" sldId="401"/>
-            <ac:spMk id="3075" creationId="{373909FB-C636-447F-9272-5642CFE0E444}"/>
+            <pc:sldMk cId="0" sldId="296"/>
+            <ac:spMk id="3" creationId="{00000000-0000-0000-0000-000000000000}"/>
           </ac:spMkLst>
         </pc:spChg>
-        <pc:cxnChg chg="mod">
-          <ac:chgData name="Chaoyi Sun (SDS,124090550)" userId="7336b744-5857-42bc-9fde-1c1347a32774" providerId="ADAL" clId="{3A35FEB6-D186-4DFE-8550-C935A8639321}" dt="2026-02-22T14:05:22.829" v="3" actId="1076"/>
-          <ac:cxnSpMkLst>
+        <pc:spChg chg="mod">
+          <ac:chgData name="Prof. Wang Fangxin (SSE)" userId="ce1f3ee1-525b-4f0b-8f12-bc5b2dd7d371" providerId="ADAL" clId="{072444D5-B6E1-794C-B782-80CEB355B39B}" dt="2023-01-04T10:36:26.792" v="695" actId="20577"/>
+          <ac:spMkLst>
             <pc:docMk/>
-            <pc:sldMk cId="0" sldId="401"/>
-            <ac:cxnSpMk id="4" creationId="{1A10491C-6F0E-4759-B05E-A66729B80E11}"/>
-          </ac:cxnSpMkLst>
-        </pc:cxnChg>
-        <pc:cxnChg chg="mod">
-          <ac:chgData name="Chaoyi Sun (SDS,124090550)" userId="7336b744-5857-42bc-9fde-1c1347a32774" providerId="ADAL" clId="{3A35FEB6-D186-4DFE-8550-C935A8639321}" dt="2026-02-22T14:05:22.330" v="2" actId="1076"/>
-          <ac:cxnSpMkLst>
+            <pc:sldMk cId="0" sldId="296"/>
+            <ac:spMk id="6" creationId="{00000000-0000-0000-0000-000000000000}"/>
+          </ac:spMkLst>
+        </pc:spChg>
+      </pc:sldChg>
+      <pc:sldChg chg="modSp mod">
+        <pc:chgData name="Prof. Wang Fangxin (SSE)" userId="ce1f3ee1-525b-4f0b-8f12-bc5b2dd7d371" providerId="ADAL" clId="{072444D5-B6E1-794C-B782-80CEB355B39B}" dt="2023-01-04T10:27:49.456" v="356" actId="20577"/>
+        <pc:sldMkLst>
+          <pc:docMk/>
+          <pc:sldMk cId="0" sldId="299"/>
+        </pc:sldMkLst>
+        <pc:spChg chg="mod">
+          <ac:chgData name="Prof. Wang Fangxin (SSE)" userId="ce1f3ee1-525b-4f0b-8f12-bc5b2dd7d371" providerId="ADAL" clId="{072444D5-B6E1-794C-B782-80CEB355B39B}" dt="2023-01-04T10:27:49.456" v="356" actId="20577"/>
+          <ac:spMkLst>
             <pc:docMk/>
-            <pc:sldMk cId="0" sldId="401"/>
-            <ac:cxnSpMk id="8" creationId="{357E6135-011E-414F-9470-59A461A609E3}"/>
-          </ac:cxnSpMkLst>
-        </pc:cxnChg>
+            <pc:sldMk cId="0" sldId="299"/>
+            <ac:spMk id="3" creationId="{00000000-0000-0000-0000-000000000000}"/>
+          </ac:spMkLst>
+        </pc:spChg>
+      </pc:sldChg>
+      <pc:sldChg chg="modSp mod">
+        <pc:chgData name="Prof. Wang Fangxin (SSE)" userId="ce1f3ee1-525b-4f0b-8f12-bc5b2dd7d371" providerId="ADAL" clId="{072444D5-B6E1-794C-B782-80CEB355B39B}" dt="2023-01-04T10:24:58.830" v="335" actId="20577"/>
+        <pc:sldMkLst>
+          <pc:docMk/>
+          <pc:sldMk cId="0" sldId="391"/>
+        </pc:sldMkLst>
+        <pc:spChg chg="mod">
+          <ac:chgData name="Prof. Wang Fangxin (SSE)" userId="ce1f3ee1-525b-4f0b-8f12-bc5b2dd7d371" providerId="ADAL" clId="{072444D5-B6E1-794C-B782-80CEB355B39B}" dt="2023-01-04T10:24:58.830" v="335" actId="20577"/>
+          <ac:spMkLst>
+            <pc:docMk/>
+            <pc:sldMk cId="0" sldId="391"/>
+            <ac:spMk id="6" creationId="{00000000-0000-0000-0000-000000000000}"/>
+          </ac:spMkLst>
+        </pc:spChg>
+      </pc:sldChg>
+      <pc:sldChg chg="modSp add mod">
+        <pc:chgData name="Prof. Wang Fangxin (SSE)" userId="ce1f3ee1-525b-4f0b-8f12-bc5b2dd7d371" providerId="ADAL" clId="{072444D5-B6E1-794C-B782-80CEB355B39B}" dt="2023-01-04T10:36:32.720" v="702" actId="20577"/>
+        <pc:sldMkLst>
+          <pc:docMk/>
+          <pc:sldMk cId="2341894575" sldId="447"/>
+        </pc:sldMkLst>
+        <pc:spChg chg="mod">
+          <ac:chgData name="Prof. Wang Fangxin (SSE)" userId="ce1f3ee1-525b-4f0b-8f12-bc5b2dd7d371" providerId="ADAL" clId="{072444D5-B6E1-794C-B782-80CEB355B39B}" dt="2023-01-04T10:32:31.287" v="384" actId="20577"/>
+          <ac:spMkLst>
+            <pc:docMk/>
+            <pc:sldMk cId="2341894575" sldId="447"/>
+            <ac:spMk id="3" creationId="{00000000-0000-0000-0000-000000000000}"/>
+          </ac:spMkLst>
+        </pc:spChg>
+        <pc:spChg chg="mod">
+          <ac:chgData name="Prof. Wang Fangxin (SSE)" userId="ce1f3ee1-525b-4f0b-8f12-bc5b2dd7d371" providerId="ADAL" clId="{072444D5-B6E1-794C-B782-80CEB355B39B}" dt="2023-01-04T10:36:32.720" v="702" actId="20577"/>
+          <ac:spMkLst>
+            <pc:docMk/>
+            <pc:sldMk cId="2341894575" sldId="447"/>
+            <ac:spMk id="6" creationId="{00000000-0000-0000-0000-000000000000}"/>
+          </ac:spMkLst>
+        </pc:spChg>
+      </pc:sldChg>
+    </pc:docChg>
+  </pc:docChgLst>
+  <pc:docChgLst>
+    <pc:chgData name="Prof. Wang Fangxin (SSE)" userId="ce1f3ee1-525b-4f0b-8f12-bc5b2dd7d371" providerId="ADAL" clId="{56731C7C-97E0-41C3-86F4-ADF8CE8A2053}"/>
+    <pc:docChg chg="undo custSel delSld modSld sldOrd">
+      <pc:chgData name="Prof. Wang Fangxin (SSE)" userId="ce1f3ee1-525b-4f0b-8f12-bc5b2dd7d371" providerId="ADAL" clId="{56731C7C-97E0-41C3-86F4-ADF8CE8A2053}" dt="2022-01-10T06:59:30.151" v="590" actId="2696"/>
+      <pc:docMkLst>
+        <pc:docMk/>
+      </pc:docMkLst>
+      <pc:sldChg chg="modSp">
+        <pc:chgData name="Prof. Wang Fangxin (SSE)" userId="ce1f3ee1-525b-4f0b-8f12-bc5b2dd7d371" providerId="ADAL" clId="{56731C7C-97E0-41C3-86F4-ADF8CE8A2053}" dt="2022-01-10T06:28:47.372" v="1" actId="27636"/>
+        <pc:sldMkLst>
+          <pc:docMk/>
+          <pc:sldMk cId="0" sldId="262"/>
+        </pc:sldMkLst>
+        <pc:spChg chg="mod">
+          <ac:chgData name="Prof. Wang Fangxin (SSE)" userId="ce1f3ee1-525b-4f0b-8f12-bc5b2dd7d371" providerId="ADAL" clId="{56731C7C-97E0-41C3-86F4-ADF8CE8A2053}" dt="2022-01-10T06:28:47.372" v="1" actId="27636"/>
+          <ac:spMkLst>
+            <pc:docMk/>
+            <pc:sldMk cId="0" sldId="262"/>
+            <ac:spMk id="3" creationId="{00000000-0000-0000-0000-000000000000}"/>
+          </ac:spMkLst>
+        </pc:spChg>
+      </pc:sldChg>
+      <pc:sldChg chg="del">
+        <pc:chgData name="Prof. Wang Fangxin (SSE)" userId="ce1f3ee1-525b-4f0b-8f12-bc5b2dd7d371" providerId="ADAL" clId="{56731C7C-97E0-41C3-86F4-ADF8CE8A2053}" dt="2022-01-10T06:59:30.151" v="590" actId="2696"/>
+        <pc:sldMkLst>
+          <pc:docMk/>
+          <pc:sldMk cId="0" sldId="272"/>
+        </pc:sldMkLst>
+      </pc:sldChg>
+      <pc:sldChg chg="addSp modSp">
+        <pc:chgData name="Prof. Wang Fangxin (SSE)" userId="ce1f3ee1-525b-4f0b-8f12-bc5b2dd7d371" providerId="ADAL" clId="{56731C7C-97E0-41C3-86F4-ADF8CE8A2053}" dt="2022-01-10T06:30:29.070" v="33" actId="1076"/>
+        <pc:sldMkLst>
+          <pc:docMk/>
+          <pc:sldMk cId="0" sldId="295"/>
+        </pc:sldMkLst>
+        <pc:spChg chg="add mod">
+          <ac:chgData name="Prof. Wang Fangxin (SSE)" userId="ce1f3ee1-525b-4f0b-8f12-bc5b2dd7d371" providerId="ADAL" clId="{56731C7C-97E0-41C3-86F4-ADF8CE8A2053}" dt="2022-01-10T06:30:29.070" v="33" actId="1076"/>
+          <ac:spMkLst>
+            <pc:docMk/>
+            <pc:sldMk cId="0" sldId="295"/>
+            <ac:spMk id="4" creationId="{5E4FC43E-652B-47EE-A940-42294AB0E172}"/>
+          </ac:spMkLst>
+        </pc:spChg>
+      </pc:sldChg>
+      <pc:sldChg chg="modSp">
+        <pc:chgData name="Prof. Wang Fangxin (SSE)" userId="ce1f3ee1-525b-4f0b-8f12-bc5b2dd7d371" providerId="ADAL" clId="{56731C7C-97E0-41C3-86F4-ADF8CE8A2053}" dt="2022-01-10T06:51:11.053" v="586" actId="404"/>
+        <pc:sldMkLst>
+          <pc:docMk/>
+          <pc:sldMk cId="0" sldId="296"/>
+        </pc:sldMkLst>
+        <pc:spChg chg="mod">
+          <ac:chgData name="Prof. Wang Fangxin (SSE)" userId="ce1f3ee1-525b-4f0b-8f12-bc5b2dd7d371" providerId="ADAL" clId="{56731C7C-97E0-41C3-86F4-ADF8CE8A2053}" dt="2022-01-10T06:51:11.053" v="586" actId="404"/>
+          <ac:spMkLst>
+            <pc:docMk/>
+            <pc:sldMk cId="0" sldId="296"/>
+            <ac:spMk id="3" creationId="{00000000-0000-0000-0000-000000000000}"/>
+          </ac:spMkLst>
+        </pc:spChg>
+      </pc:sldChg>
+      <pc:sldChg chg="modSp">
+        <pc:chgData name="Prof. Wang Fangxin (SSE)" userId="ce1f3ee1-525b-4f0b-8f12-bc5b2dd7d371" providerId="ADAL" clId="{56731C7C-97E0-41C3-86F4-ADF8CE8A2053}" dt="2022-01-10T06:44:19.141" v="478" actId="207"/>
+        <pc:sldMkLst>
+          <pc:docMk/>
+          <pc:sldMk cId="0" sldId="299"/>
+        </pc:sldMkLst>
+        <pc:spChg chg="mod">
+          <ac:chgData name="Prof. Wang Fangxin (SSE)" userId="ce1f3ee1-525b-4f0b-8f12-bc5b2dd7d371" providerId="ADAL" clId="{56731C7C-97E0-41C3-86F4-ADF8CE8A2053}" dt="2022-01-10T06:44:19.141" v="478" actId="207"/>
+          <ac:spMkLst>
+            <pc:docMk/>
+            <pc:sldMk cId="0" sldId="299"/>
+            <ac:spMk id="3" creationId="{00000000-0000-0000-0000-000000000000}"/>
+          </ac:spMkLst>
+        </pc:spChg>
+      </pc:sldChg>
+      <pc:sldChg chg="modSp ord">
+        <pc:chgData name="Prof. Wang Fangxin (SSE)" userId="ce1f3ee1-525b-4f0b-8f12-bc5b2dd7d371" providerId="ADAL" clId="{56731C7C-97E0-41C3-86F4-ADF8CE8A2053}" dt="2022-01-10T06:48:53.068" v="570" actId="207"/>
+        <pc:sldMkLst>
+          <pc:docMk/>
+          <pc:sldMk cId="0" sldId="301"/>
+        </pc:sldMkLst>
+        <pc:spChg chg="mod">
+          <ac:chgData name="Prof. Wang Fangxin (SSE)" userId="ce1f3ee1-525b-4f0b-8f12-bc5b2dd7d371" providerId="ADAL" clId="{56731C7C-97E0-41C3-86F4-ADF8CE8A2053}" dt="2022-01-10T06:48:53.068" v="570" actId="207"/>
+          <ac:spMkLst>
+            <pc:docMk/>
+            <pc:sldMk cId="0" sldId="301"/>
+            <ac:spMk id="3" creationId="{00000000-0000-0000-0000-000000000000}"/>
+          </ac:spMkLst>
+        </pc:spChg>
+      </pc:sldChg>
+      <pc:sldChg chg="modSp">
+        <pc:chgData name="Prof. Wang Fangxin (SSE)" userId="ce1f3ee1-525b-4f0b-8f12-bc5b2dd7d371" providerId="ADAL" clId="{56731C7C-97E0-41C3-86F4-ADF8CE8A2053}" dt="2022-01-10T06:51:17.850" v="588" actId="404"/>
+        <pc:sldMkLst>
+          <pc:docMk/>
+          <pc:sldMk cId="0" sldId="391"/>
+        </pc:sldMkLst>
+        <pc:spChg chg="mod">
+          <ac:chgData name="Prof. Wang Fangxin (SSE)" userId="ce1f3ee1-525b-4f0b-8f12-bc5b2dd7d371" providerId="ADAL" clId="{56731C7C-97E0-41C3-86F4-ADF8CE8A2053}" dt="2022-01-10T06:51:17.850" v="588" actId="404"/>
+          <ac:spMkLst>
+            <pc:docMk/>
+            <pc:sldMk cId="0" sldId="391"/>
+            <ac:spMk id="6" creationId="{00000000-0000-0000-0000-000000000000}"/>
+          </ac:spMkLst>
+        </pc:spChg>
+      </pc:sldChg>
+      <pc:sldChg chg="modSp del">
+        <pc:chgData name="Prof. Wang Fangxin (SSE)" userId="ce1f3ee1-525b-4f0b-8f12-bc5b2dd7d371" providerId="ADAL" clId="{56731C7C-97E0-41C3-86F4-ADF8CE8A2053}" dt="2022-01-10T06:51:27.305" v="589" actId="2696"/>
+        <pc:sldMkLst>
+          <pc:docMk/>
+          <pc:sldMk cId="0" sldId="392"/>
+        </pc:sldMkLst>
+        <pc:spChg chg="mod">
+          <ac:chgData name="Prof. Wang Fangxin (SSE)" userId="ce1f3ee1-525b-4f0b-8f12-bc5b2dd7d371" providerId="ADAL" clId="{56731C7C-97E0-41C3-86F4-ADF8CE8A2053}" dt="2022-01-10T06:41:58.169" v="400" actId="20577"/>
+          <ac:spMkLst>
+            <pc:docMk/>
+            <pc:sldMk cId="0" sldId="392"/>
+            <ac:spMk id="6" creationId="{00000000-0000-0000-0000-000000000000}"/>
+          </ac:spMkLst>
+        </pc:spChg>
+      </pc:sldChg>
+      <pc:sldChg chg="modSp">
+        <pc:chgData name="Prof. Wang Fangxin (SSE)" userId="ce1f3ee1-525b-4f0b-8f12-bc5b2dd7d371" providerId="ADAL" clId="{56731C7C-97E0-41C3-86F4-ADF8CE8A2053}" dt="2022-01-10T06:45:25" v="501" actId="20577"/>
+        <pc:sldMkLst>
+          <pc:docMk/>
+          <pc:sldMk cId="0" sldId="445"/>
+        </pc:sldMkLst>
+        <pc:spChg chg="mod">
+          <ac:chgData name="Prof. Wang Fangxin (SSE)" userId="ce1f3ee1-525b-4f0b-8f12-bc5b2dd7d371" providerId="ADAL" clId="{56731C7C-97E0-41C3-86F4-ADF8CE8A2053}" dt="2022-01-10T06:45:25" v="501" actId="20577"/>
+          <ac:spMkLst>
+            <pc:docMk/>
+            <pc:sldMk cId="0" sldId="445"/>
+            <ac:spMk id="3" creationId="{00000000-0000-0000-0000-000000000000}"/>
+          </ac:spMkLst>
+        </pc:spChg>
       </pc:sldChg>
     </pc:docChg>
   </pc:docChgLst>
@@ -296,7 +470,7 @@
           <a:p>
             <a:fld id="{45BDCE37-E9BE-4280-8D68-34E43D66CEDB}" type="datetimeFigureOut">
               <a:rPr lang="zh-TW" altLang="en-US" smtClean="0"/>
-              <a:t>2026/2/22</a:t>
+              <a:t>2026/2/28</a:t>
             </a:fld>
             <a:endParaRPr lang="zh-TW" altLang="en-US"/>
           </a:p>
@@ -461,7 +635,7 @@
           <a:p>
             <a:fld id="{FBFBA883-381C-409E-9635-BB54B21745E4}" type="datetimeFigureOut">
               <a:rPr lang="zh-TW" altLang="en-US" smtClean="0"/>
-              <a:t>2026/2/22</a:t>
+              <a:t>2026/2/28</a:t>
             </a:fld>
             <a:endParaRPr lang="zh-TW" altLang="en-US"/>
           </a:p>
@@ -6630,913 +6804,406 @@
                 <a:effectLst/>
                 <a:ea typeface="新細明體" pitchFamily="18" charset="-120"/>
               </a:rPr>
-              <a:t>Ideal World</a:t>
+              <a:t>What registers must be saved?</a:t>
             </a:r>
           </a:p>
         </p:txBody>
       </p:sp>
       <p:sp>
         <p:nvSpPr>
-          <p:cNvPr id="2" name="Rectangle 1">
+          <p:cNvPr id="12" name="Rectangle 2">
             <a:extLst>
               <a:ext uri="{FF2B5EF4-FFF2-40B4-BE49-F238E27FC236}">
-                <a16:creationId xmlns:a16="http://schemas.microsoft.com/office/drawing/2014/main" id="{DA544BBA-45E5-4C25-8B3F-949860BEA82F}"/>
+                <a16:creationId xmlns:a16="http://schemas.microsoft.com/office/drawing/2014/main" id="{08C7172A-21A1-48CA-AED3-8AFE24508B62}"/>
               </a:ext>
             </a:extLst>
           </p:cNvPr>
-          <p:cNvSpPr/>
+          <p:cNvSpPr txBox="1">
+            <a:spLocks noChangeArrowheads="1"/>
+          </p:cNvSpPr>
           <p:nvPr/>
         </p:nvSpPr>
         <p:spPr bwMode="auto">
           <a:xfrm>
-            <a:off x="313873" y="1306286"/>
-            <a:ext cx="2155371" cy="2757715"/>
+            <a:off x="399030" y="850106"/>
+            <a:ext cx="8461828" cy="3769519"/>
           </a:xfrm>
           <a:prstGeom prst="rect">
             <a:avLst/>
           </a:prstGeom>
           <a:noFill/>
-          <a:ln w="15875" cap="flat" cmpd="sng" algn="ctr">
-            <a:solidFill>
-              <a:srgbClr val="FF0000"/>
-            </a:solidFill>
-            <a:prstDash val="solid"/>
-            <a:round/>
-            <a:headEnd type="none" w="med" len="med"/>
-            <a:tailEnd type="none" w="med" len="med"/>
+          <a:ln w="9525">
+            <a:noFill/>
+            <a:miter lim="800000"/>
+            <a:headEnd/>
+            <a:tailEnd/>
           </a:ln>
+          <a:effectLst/>
         </p:spPr>
         <p:txBody>
-          <a:bodyPr vert="horz" wrap="none" lIns="91440" tIns="45720" rIns="91440" bIns="45720" numCol="1" rtlCol="0" anchor="ctr" anchorCtr="0" compatLnSpc="1"/>
-          <a:lstStyle/>
-          <a:p>
-            <a:pPr marL="0" marR="0" indent="0" algn="ctr" defTabSz="914400" rtl="0" eaLnBrk="1" fontAlgn="base" latinLnBrk="0" hangingPunct="1">
-              <a:lnSpc>
-                <a:spcPct val="100000"/>
-              </a:lnSpc>
-              <a:spcBef>
-                <a:spcPct val="0"/>
-              </a:spcBef>
-              <a:spcAft>
-                <a:spcPct val="0"/>
-              </a:spcAft>
-              <a:buClrTx/>
-              <a:buSzTx/>
-              <a:buFontTx/>
-              <a:buNone/>
+          <a:bodyPr anchor="ctr"/>
+          <a:lstStyle>
+            <a:lvl1pPr algn="ctr" rtl="0" eaLnBrk="0" fontAlgn="base" hangingPunct="0">
+              <a:spcBef>
+                <a:spcPct val="0"/>
+              </a:spcBef>
+              <a:spcAft>
+                <a:spcPct val="0"/>
+              </a:spcAft>
+              <a:defRPr sz="4400">
+                <a:solidFill>
+                  <a:schemeClr val="tx2"/>
+                </a:solidFill>
+                <a:effectLst>
+                  <a:outerShdw blurRad="38100" dist="38100" dir="2700000" algn="tl">
+                    <a:srgbClr val="000000"/>
+                  </a:outerShdw>
+                </a:effectLst>
+                <a:latin typeface="+mj-lt"/>
+                <a:ea typeface="+mj-ea"/>
+                <a:cs typeface="+mj-cs"/>
+              </a:defRPr>
+            </a:lvl1pPr>
+            <a:lvl2pPr algn="ctr" rtl="0" eaLnBrk="0" fontAlgn="base" hangingPunct="0">
+              <a:spcBef>
+                <a:spcPct val="0"/>
+              </a:spcBef>
+              <a:spcAft>
+                <a:spcPct val="0"/>
+              </a:spcAft>
+              <a:defRPr sz="4400">
+                <a:solidFill>
+                  <a:schemeClr val="tx2"/>
+                </a:solidFill>
+                <a:effectLst>
+                  <a:outerShdw blurRad="38100" dist="38100" dir="2700000" algn="tl">
+                    <a:srgbClr val="000000"/>
+                  </a:outerShdw>
+                </a:effectLst>
+                <a:latin typeface="Arial" charset="0"/>
+              </a:defRPr>
+            </a:lvl2pPr>
+            <a:lvl3pPr algn="ctr" rtl="0" eaLnBrk="0" fontAlgn="base" hangingPunct="0">
+              <a:spcBef>
+                <a:spcPct val="0"/>
+              </a:spcBef>
+              <a:spcAft>
+                <a:spcPct val="0"/>
+              </a:spcAft>
+              <a:defRPr sz="4400">
+                <a:solidFill>
+                  <a:schemeClr val="tx2"/>
+                </a:solidFill>
+                <a:effectLst>
+                  <a:outerShdw blurRad="38100" dist="38100" dir="2700000" algn="tl">
+                    <a:srgbClr val="000000"/>
+                  </a:outerShdw>
+                </a:effectLst>
+                <a:latin typeface="Arial" charset="0"/>
+              </a:defRPr>
+            </a:lvl3pPr>
+            <a:lvl4pPr algn="ctr" rtl="0" eaLnBrk="0" fontAlgn="base" hangingPunct="0">
+              <a:spcBef>
+                <a:spcPct val="0"/>
+              </a:spcBef>
+              <a:spcAft>
+                <a:spcPct val="0"/>
+              </a:spcAft>
+              <a:defRPr sz="4400">
+                <a:solidFill>
+                  <a:schemeClr val="tx2"/>
+                </a:solidFill>
+                <a:effectLst>
+                  <a:outerShdw blurRad="38100" dist="38100" dir="2700000" algn="tl">
+                    <a:srgbClr val="000000"/>
+                  </a:outerShdw>
+                </a:effectLst>
+                <a:latin typeface="Arial" charset="0"/>
+              </a:defRPr>
+            </a:lvl4pPr>
+            <a:lvl5pPr algn="ctr" rtl="0" eaLnBrk="0" fontAlgn="base" hangingPunct="0">
+              <a:spcBef>
+                <a:spcPct val="0"/>
+              </a:spcBef>
+              <a:spcAft>
+                <a:spcPct val="0"/>
+              </a:spcAft>
+              <a:defRPr sz="4400">
+                <a:solidFill>
+                  <a:schemeClr val="tx2"/>
+                </a:solidFill>
+                <a:effectLst>
+                  <a:outerShdw blurRad="38100" dist="38100" dir="2700000" algn="tl">
+                    <a:srgbClr val="000000"/>
+                  </a:outerShdw>
+                </a:effectLst>
+                <a:latin typeface="Arial" charset="0"/>
+              </a:defRPr>
+            </a:lvl5pPr>
+            <a:lvl6pPr marL="457200" algn="ctr" rtl="0" fontAlgn="base">
+              <a:spcBef>
+                <a:spcPct val="0"/>
+              </a:spcBef>
+              <a:spcAft>
+                <a:spcPct val="0"/>
+              </a:spcAft>
+              <a:defRPr sz="4400">
+                <a:solidFill>
+                  <a:schemeClr val="tx2"/>
+                </a:solidFill>
+                <a:effectLst>
+                  <a:outerShdw blurRad="38100" dist="38100" dir="2700000" algn="tl">
+                    <a:srgbClr val="000000"/>
+                  </a:outerShdw>
+                </a:effectLst>
+                <a:latin typeface="Arial" charset="0"/>
+              </a:defRPr>
+            </a:lvl6pPr>
+            <a:lvl7pPr marL="914400" algn="ctr" rtl="0" fontAlgn="base">
+              <a:spcBef>
+                <a:spcPct val="0"/>
+              </a:spcBef>
+              <a:spcAft>
+                <a:spcPct val="0"/>
+              </a:spcAft>
+              <a:defRPr sz="4400">
+                <a:solidFill>
+                  <a:schemeClr val="tx2"/>
+                </a:solidFill>
+                <a:effectLst>
+                  <a:outerShdw blurRad="38100" dist="38100" dir="2700000" algn="tl">
+                    <a:srgbClr val="000000"/>
+                  </a:outerShdw>
+                </a:effectLst>
+                <a:latin typeface="Arial" charset="0"/>
+              </a:defRPr>
+            </a:lvl7pPr>
+            <a:lvl8pPr marL="1371600" algn="ctr" rtl="0" fontAlgn="base">
+              <a:spcBef>
+                <a:spcPct val="0"/>
+              </a:spcBef>
+              <a:spcAft>
+                <a:spcPct val="0"/>
+              </a:spcAft>
+              <a:defRPr sz="4400">
+                <a:solidFill>
+                  <a:schemeClr val="tx2"/>
+                </a:solidFill>
+                <a:effectLst>
+                  <a:outerShdw blurRad="38100" dist="38100" dir="2700000" algn="tl">
+                    <a:srgbClr val="000000"/>
+                  </a:outerShdw>
+                </a:effectLst>
+                <a:latin typeface="Arial" charset="0"/>
+              </a:defRPr>
+            </a:lvl8pPr>
+            <a:lvl9pPr marL="1828800" algn="ctr" rtl="0" fontAlgn="base">
+              <a:spcBef>
+                <a:spcPct val="0"/>
+              </a:spcBef>
+              <a:spcAft>
+                <a:spcPct val="0"/>
+              </a:spcAft>
+              <a:defRPr sz="4400">
+                <a:solidFill>
+                  <a:schemeClr val="tx2"/>
+                </a:solidFill>
+                <a:effectLst>
+                  <a:outerShdw blurRad="38100" dist="38100" dir="2700000" algn="tl">
+                    <a:srgbClr val="000000"/>
+                  </a:outerShdw>
+                </a:effectLst>
+                <a:latin typeface="Arial" charset="0"/>
+              </a:defRPr>
+            </a:lvl9pPr>
+          </a:lstStyle>
+          <a:p>
+            <a:pPr algn="l" eaLnBrk="1" hangingPunct="1">
+              <a:defRPr/>
             </a:pPr>
-            <a:endParaRPr kumimoji="1" lang="en-US" sz="1800" b="1" i="0" u="none" strike="noStrike" cap="none" normalizeH="0" baseline="0">
-              <a:ln>
-                <a:noFill/>
-              </a:ln>
-              <a:solidFill>
-                <a:schemeClr val="tx1"/>
-              </a:solidFill>
-              <a:effectLst/>
-              <a:latin typeface="Arial" panose="020B0604020202090204" pitchFamily="34" charset="0"/>
-              <a:ea typeface="新細明體" panose="02020500000000000000" pitchFamily="18" charset="-120"/>
-            </a:endParaRPr>
-          </a:p>
-        </p:txBody>
-      </p:sp>
-      <p:sp>
-        <p:nvSpPr>
-          <p:cNvPr id="7" name="Rectangle 6">
-            <a:extLst>
-              <a:ext uri="{FF2B5EF4-FFF2-40B4-BE49-F238E27FC236}">
-                <a16:creationId xmlns:a16="http://schemas.microsoft.com/office/drawing/2014/main" id="{44469BB1-9F2D-4610-A1CB-A635FC3E8FA6}"/>
-              </a:ext>
-            </a:extLst>
-          </p:cNvPr>
-          <p:cNvSpPr/>
-          <p:nvPr/>
-        </p:nvSpPr>
-        <p:spPr bwMode="auto">
-          <a:xfrm>
-            <a:off x="3880758" y="1306286"/>
-            <a:ext cx="2155371" cy="2757715"/>
-          </a:xfrm>
-          <a:prstGeom prst="rect">
-            <a:avLst/>
-          </a:prstGeom>
-          <a:noFill/>
-          <a:ln w="15875" cap="flat" cmpd="sng" algn="ctr">
-            <a:solidFill>
-              <a:srgbClr val="FF0000"/>
-            </a:solidFill>
-            <a:prstDash val="solid"/>
-            <a:round/>
-            <a:headEnd type="none" w="med" len="med"/>
-            <a:tailEnd type="none" w="med" len="med"/>
-          </a:ln>
-        </p:spPr>
-        <p:txBody>
-          <a:bodyPr vert="horz" wrap="none" lIns="91440" tIns="45720" rIns="91440" bIns="45720" numCol="1" rtlCol="0" anchor="ctr" anchorCtr="0" compatLnSpc="1"/>
-          <a:lstStyle/>
-          <a:p>
-            <a:pPr marL="0" marR="0" indent="0" algn="ctr" defTabSz="914400" rtl="0" eaLnBrk="1" fontAlgn="base" latinLnBrk="0" hangingPunct="1">
-              <a:lnSpc>
-                <a:spcPct val="100000"/>
-              </a:lnSpc>
-              <a:spcBef>
-                <a:spcPct val="0"/>
-              </a:spcBef>
-              <a:spcAft>
-                <a:spcPct val="0"/>
-              </a:spcAft>
-              <a:buClrTx/>
-              <a:buSzTx/>
-              <a:buFontTx/>
-              <a:buNone/>
-            </a:pPr>
-            <a:endParaRPr kumimoji="1" lang="en-US" sz="1800" b="1" i="0" u="none" strike="noStrike" cap="none" normalizeH="0" baseline="0">
-              <a:ln>
-                <a:noFill/>
-              </a:ln>
-              <a:solidFill>
-                <a:schemeClr val="tx1"/>
-              </a:solidFill>
-              <a:effectLst/>
-              <a:latin typeface="Arial" panose="020B0604020202090204" pitchFamily="34" charset="0"/>
-              <a:ea typeface="新細明體" panose="02020500000000000000" pitchFamily="18" charset="-120"/>
-            </a:endParaRPr>
-          </a:p>
-        </p:txBody>
-      </p:sp>
-      <p:sp>
-        <p:nvSpPr>
-          <p:cNvPr id="3" name="TextBox 2">
-            <a:extLst>
-              <a:ext uri="{FF2B5EF4-FFF2-40B4-BE49-F238E27FC236}">
-                <a16:creationId xmlns:a16="http://schemas.microsoft.com/office/drawing/2014/main" id="{5D325113-1089-4563-9E48-404B3A22E61A}"/>
-              </a:ext>
-            </a:extLst>
-          </p:cNvPr>
-          <p:cNvSpPr txBox="1"/>
-          <p:nvPr/>
-        </p:nvSpPr>
-        <p:spPr>
-          <a:xfrm>
-            <a:off x="997860" y="1006929"/>
-            <a:ext cx="787395" cy="369332"/>
-          </a:xfrm>
-          <a:prstGeom prst="rect">
-            <a:avLst/>
-          </a:prstGeom>
-          <a:noFill/>
-        </p:spPr>
-        <p:txBody>
-          <a:bodyPr wrap="none" rtlCol="0" anchor="ctr" anchorCtr="1">
-            <a:spAutoFit/>
-          </a:bodyPr>
-          <a:lstStyle/>
-          <a:p>
             <a:r>
-              <a:rPr lang="en-US" dirty="0">
-                <a:ea typeface="標楷體" pitchFamily="65" charset="-120"/>
-                <a:cs typeface="Calibri" panose="020F07020304040A0204" pitchFamily="34" charset="0"/>
+              <a:rPr lang="en-US" altLang="zh-TW" sz="2000" dirty="0">
+                <a:effectLst/>
+                <a:ea typeface="新細明體" pitchFamily="18" charset="-120"/>
               </a:rPr>
-              <a:t>Caller</a:t>
-            </a:r>
-          </a:p>
-        </p:txBody>
-      </p:sp>
-      <p:sp>
-        <p:nvSpPr>
-          <p:cNvPr id="9" name="TextBox 8">
-            <a:extLst>
-              <a:ext uri="{FF2B5EF4-FFF2-40B4-BE49-F238E27FC236}">
-                <a16:creationId xmlns:a16="http://schemas.microsoft.com/office/drawing/2014/main" id="{C4389AF8-7627-4BA7-BCB7-83998F1DCEEE}"/>
-              </a:ext>
-            </a:extLst>
-          </p:cNvPr>
-          <p:cNvSpPr txBox="1"/>
-          <p:nvPr/>
-        </p:nvSpPr>
-        <p:spPr>
-          <a:xfrm>
-            <a:off x="4457709" y="998129"/>
-            <a:ext cx="838691" cy="369332"/>
-          </a:xfrm>
-          <a:prstGeom prst="rect">
-            <a:avLst/>
-          </a:prstGeom>
-          <a:noFill/>
-        </p:spPr>
-        <p:txBody>
-          <a:bodyPr wrap="none" rtlCol="0" anchor="ctr" anchorCtr="1">
-            <a:spAutoFit/>
-          </a:bodyPr>
-          <a:lstStyle/>
-          <a:p>
-            <a:r>
-              <a:rPr lang="en-US" dirty="0">
-                <a:ea typeface="標楷體" pitchFamily="65" charset="-120"/>
-                <a:cs typeface="Calibri" panose="020F07020304040A0204" pitchFamily="34" charset="0"/>
-              </a:rPr>
-              <a:t>Callee</a:t>
-            </a:r>
-          </a:p>
-        </p:txBody>
-      </p:sp>
-      <p:sp>
-        <p:nvSpPr>
-          <p:cNvPr id="4" name="Arrow: Right 3">
-            <a:extLst>
-              <a:ext uri="{FF2B5EF4-FFF2-40B4-BE49-F238E27FC236}">
-                <a16:creationId xmlns:a16="http://schemas.microsoft.com/office/drawing/2014/main" id="{2B743D9E-634C-4D2F-A013-808C0F862396}"/>
-              </a:ext>
-            </a:extLst>
-          </p:cNvPr>
-          <p:cNvSpPr/>
-          <p:nvPr/>
-        </p:nvSpPr>
-        <p:spPr bwMode="auto">
-          <a:xfrm>
-            <a:off x="2685797" y="2406258"/>
-            <a:ext cx="978408" cy="484632"/>
-          </a:xfrm>
-          <a:prstGeom prst="rightArrow">
-            <a:avLst/>
-          </a:prstGeom>
-          <a:noFill/>
-          <a:ln w="15875" cap="flat" cmpd="sng" algn="ctr">
-            <a:solidFill>
-              <a:srgbClr val="FF0000"/>
-            </a:solidFill>
-            <a:prstDash val="solid"/>
-            <a:round/>
-            <a:headEnd type="none" w="med" len="med"/>
-            <a:tailEnd type="none" w="med" len="med"/>
-          </a:ln>
-        </p:spPr>
-        <p:txBody>
-          <a:bodyPr vert="horz" wrap="none" lIns="91440" tIns="45720" rIns="91440" bIns="45720" numCol="1" rtlCol="0" anchor="ctr" anchorCtr="0" compatLnSpc="1"/>
-          <a:lstStyle/>
-          <a:p>
-            <a:pPr marL="0" marR="0" indent="0" algn="ctr" defTabSz="914400" rtl="0" eaLnBrk="1" fontAlgn="base" latinLnBrk="0" hangingPunct="1">
-              <a:lnSpc>
-                <a:spcPct val="100000"/>
-              </a:lnSpc>
-              <a:spcBef>
-                <a:spcPct val="0"/>
-              </a:spcBef>
-              <a:spcAft>
-                <a:spcPct val="0"/>
-              </a:spcAft>
-              <a:buClrTx/>
-              <a:buSzTx/>
-              <a:buFontTx/>
-              <a:buNone/>
-            </a:pPr>
-            <a:endParaRPr kumimoji="1" lang="en-US" sz="1800" b="1" i="0" u="none" strike="noStrike" cap="none" normalizeH="0" baseline="0">
-              <a:ln>
-                <a:noFill/>
-              </a:ln>
-              <a:solidFill>
-                <a:schemeClr val="tx1"/>
-              </a:solidFill>
-              <a:effectLst/>
-              <a:latin typeface="Arial" panose="020B0604020202090204" pitchFamily="34" charset="0"/>
-              <a:ea typeface="新細明體" panose="02020500000000000000" pitchFamily="18" charset="-120"/>
-            </a:endParaRPr>
-          </a:p>
-        </p:txBody>
-      </p:sp>
-      <p:sp>
-        <p:nvSpPr>
-          <p:cNvPr id="6" name="TextBox 5">
-            <a:extLst>
-              <a:ext uri="{FF2B5EF4-FFF2-40B4-BE49-F238E27FC236}">
-                <a16:creationId xmlns:a16="http://schemas.microsoft.com/office/drawing/2014/main" id="{5996B1FE-F102-4142-8C14-371015F32760}"/>
-              </a:ext>
-            </a:extLst>
-          </p:cNvPr>
-          <p:cNvSpPr txBox="1"/>
-          <p:nvPr/>
-        </p:nvSpPr>
-        <p:spPr>
-          <a:xfrm>
-            <a:off x="405065" y="1432868"/>
-            <a:ext cx="2146742" cy="1200329"/>
-          </a:xfrm>
-          <a:prstGeom prst="rect">
-            <a:avLst/>
-          </a:prstGeom>
-          <a:noFill/>
-        </p:spPr>
-        <p:txBody>
-          <a:bodyPr wrap="none" rtlCol="0" anchor="ctr" anchorCtr="1">
-            <a:spAutoFit/>
-          </a:bodyPr>
-          <a:lstStyle/>
-          <a:p>
-            <a:r>
-              <a:rPr lang="en-US" dirty="0">
-                <a:ea typeface="標楷體" pitchFamily="65" charset="-120"/>
-                <a:cs typeface="Calibri" panose="020F07020304040A0204" pitchFamily="34" charset="0"/>
-              </a:rPr>
-              <a:t>Caller tries to</a:t>
-            </a:r>
-          </a:p>
-          <a:p>
-            <a:r>
-              <a:rPr lang="en-US" dirty="0">
-                <a:ea typeface="標楷體" pitchFamily="65" charset="-120"/>
-                <a:cs typeface="Calibri" panose="020F07020304040A0204" pitchFamily="34" charset="0"/>
-              </a:rPr>
-              <a:t>use all </a:t>
+              <a:t>int </a:t>
             </a:r>
             <a:r>
-              <a:rPr lang="en-US" dirty="0">
-                <a:solidFill>
-                  <a:srgbClr val="FF0000"/>
-                </a:solidFill>
-                <a:ea typeface="標楷體" pitchFamily="65" charset="-120"/>
-                <a:cs typeface="Calibri" panose="020F07020304040A0204" pitchFamily="34" charset="0"/>
+              <a:rPr lang="en-US" altLang="zh-TW" sz="2000" dirty="0" err="1">
+                <a:effectLst/>
+                <a:ea typeface="新細明體" pitchFamily="18" charset="-120"/>
               </a:rPr>
-              <a:t>callee</a:t>
+              <a:t>funct_A</a:t>
             </a:r>
             <a:r>
-              <a:rPr lang="en-US" dirty="0">
-                <a:ea typeface="標楷體" pitchFamily="65" charset="-120"/>
-                <a:cs typeface="Calibri" panose="020F07020304040A0204" pitchFamily="34" charset="0"/>
+              <a:rPr lang="en-US" altLang="zh-TW" sz="2000" dirty="0">
+                <a:effectLst/>
+                <a:ea typeface="新細明體" pitchFamily="18" charset="-120"/>
               </a:rPr>
-              <a:t>-save </a:t>
+              <a:t>(int a, int b;) {</a:t>
             </a:r>
           </a:p>
           <a:p>
+            <a:pPr algn="l" eaLnBrk="1" hangingPunct="1">
+              <a:defRPr/>
+            </a:pPr>
             <a:r>
-              <a:rPr lang="en-US" dirty="0">
-                <a:ea typeface="標楷體" pitchFamily="65" charset="-120"/>
-                <a:cs typeface="Calibri" panose="020F07020304040A0204" pitchFamily="34" charset="0"/>
+              <a:rPr lang="en-US" altLang="zh-TW" sz="2000" dirty="0">
+                <a:effectLst/>
+                <a:ea typeface="新細明體" pitchFamily="18" charset="-120"/>
               </a:rPr>
-              <a:t>Registers</a:t>
-            </a:r>
-          </a:p>
-          <a:p>
-            <a:r>
-              <a:rPr lang="en-US" dirty="0">
-                <a:ea typeface="標楷體" pitchFamily="65" charset="-120"/>
-                <a:cs typeface="Calibri" panose="020F07020304040A0204" pitchFamily="34" charset="0"/>
-              </a:rPr>
-              <a:t>(x8-x9,x18-x27)</a:t>
-            </a:r>
-          </a:p>
-        </p:txBody>
-      </p:sp>
-      <p:sp>
-        <p:nvSpPr>
-          <p:cNvPr id="13" name="TextBox 12">
-            <a:extLst>
-              <a:ext uri="{FF2B5EF4-FFF2-40B4-BE49-F238E27FC236}">
-                <a16:creationId xmlns:a16="http://schemas.microsoft.com/office/drawing/2014/main" id="{4417DAD6-057A-4033-955D-4C1611951EAB}"/>
-              </a:ext>
-            </a:extLst>
-          </p:cNvPr>
-          <p:cNvSpPr txBox="1"/>
-          <p:nvPr/>
-        </p:nvSpPr>
-        <p:spPr>
-          <a:xfrm>
-            <a:off x="3829330" y="2808922"/>
-            <a:ext cx="2146742" cy="646331"/>
-          </a:xfrm>
-          <a:prstGeom prst="rect">
-            <a:avLst/>
-          </a:prstGeom>
-          <a:noFill/>
-        </p:spPr>
-        <p:txBody>
-          <a:bodyPr wrap="none" rtlCol="0" anchor="ctr" anchorCtr="1">
-            <a:spAutoFit/>
-          </a:bodyPr>
-          <a:lstStyle/>
-          <a:p>
-            <a:r>
-              <a:rPr lang="en-US" dirty="0">
-                <a:ea typeface="標楷體" pitchFamily="65" charset="-120"/>
-                <a:cs typeface="Calibri" panose="020F07020304040A0204" pitchFamily="34" charset="0"/>
-              </a:rPr>
-              <a:t>So callee does not </a:t>
-            </a:r>
-          </a:p>
-          <a:p>
-            <a:r>
-              <a:rPr lang="en-US" dirty="0">
-                <a:ea typeface="標楷體" pitchFamily="65" charset="-120"/>
-                <a:cs typeface="Calibri" panose="020F07020304040A0204" pitchFamily="34" charset="0"/>
-              </a:rPr>
-              <a:t>need to save any</a:t>
-            </a:r>
-          </a:p>
-        </p:txBody>
-      </p:sp>
-      <p:sp>
-        <p:nvSpPr>
-          <p:cNvPr id="14" name="TextBox 13">
-            <a:extLst>
-              <a:ext uri="{FF2B5EF4-FFF2-40B4-BE49-F238E27FC236}">
-                <a16:creationId xmlns:a16="http://schemas.microsoft.com/office/drawing/2014/main" id="{CC330C33-85C3-4DC0-BC78-2361EFD45435}"/>
-              </a:ext>
-            </a:extLst>
-          </p:cNvPr>
-          <p:cNvSpPr txBox="1"/>
-          <p:nvPr/>
-        </p:nvSpPr>
-        <p:spPr>
-          <a:xfrm>
-            <a:off x="3940684" y="1413487"/>
-            <a:ext cx="2095445" cy="1477328"/>
-          </a:xfrm>
-          <a:prstGeom prst="rect">
-            <a:avLst/>
-          </a:prstGeom>
-          <a:noFill/>
-        </p:spPr>
-        <p:txBody>
-          <a:bodyPr wrap="none" rtlCol="0" anchor="ctr" anchorCtr="1">
-            <a:spAutoFit/>
-          </a:bodyPr>
-          <a:lstStyle/>
-          <a:p>
-            <a:r>
-              <a:rPr lang="en-US" dirty="0">
-                <a:ea typeface="標楷體" pitchFamily="65" charset="-120"/>
-                <a:cs typeface="Calibri" panose="020F07020304040A0204" pitchFamily="34" charset="0"/>
-              </a:rPr>
-              <a:t>Callee tries to</a:t>
-            </a:r>
-          </a:p>
-          <a:p>
-            <a:r>
-              <a:rPr lang="en-US" dirty="0">
-                <a:ea typeface="標楷體" pitchFamily="65" charset="-120"/>
-                <a:cs typeface="Calibri" panose="020F07020304040A0204" pitchFamily="34" charset="0"/>
-              </a:rPr>
-              <a:t>use all </a:t>
+              <a:t>	int </a:t>
             </a:r>
             <a:r>
-              <a:rPr lang="en-US" dirty="0">
-                <a:solidFill>
-                  <a:srgbClr val="FF0000"/>
-                </a:solidFill>
-                <a:ea typeface="標楷體" pitchFamily="65" charset="-120"/>
-                <a:cs typeface="Calibri" panose="020F07020304040A0204" pitchFamily="34" charset="0"/>
+              <a:rPr lang="en-US" altLang="zh-TW" sz="2000" dirty="0" err="1">
+                <a:effectLst/>
+                <a:ea typeface="新細明體" pitchFamily="18" charset="-120"/>
               </a:rPr>
-              <a:t>caller</a:t>
+              <a:t>x,y</a:t>
             </a:r>
             <a:r>
-              <a:rPr lang="en-US" dirty="0">
-                <a:ea typeface="標楷體" pitchFamily="65" charset="-120"/>
-                <a:cs typeface="Calibri" panose="020F07020304040A0204" pitchFamily="34" charset="0"/>
+              <a:rPr lang="en-US" altLang="zh-TW" sz="2000" dirty="0">
+                <a:effectLst/>
+                <a:ea typeface="新細明體" pitchFamily="18" charset="-120"/>
               </a:rPr>
-              <a:t>-save </a:t>
+              <a:t>;</a:t>
             </a:r>
           </a:p>
           <a:p>
-            <a:r>
-              <a:rPr lang="en-US" dirty="0">
-                <a:ea typeface="標楷體" pitchFamily="65" charset="-120"/>
-                <a:cs typeface="Calibri" panose="020F07020304040A0204" pitchFamily="34" charset="0"/>
-              </a:rPr>
-              <a:t>Registers</a:t>
-            </a:r>
-          </a:p>
-          <a:p>
-            <a:r>
-              <a:rPr lang="en-US" dirty="0">
-                <a:ea typeface="標楷體" pitchFamily="65" charset="-120"/>
-                <a:cs typeface="Calibri" panose="020F07020304040A0204" pitchFamily="34" charset="0"/>
-              </a:rPr>
-              <a:t>(x5-x7,x28-x31)</a:t>
-            </a:r>
-          </a:p>
-          <a:p>
-            <a:r>
-              <a:rPr lang="en-US" dirty="0">
-                <a:ea typeface="標楷體" pitchFamily="65" charset="-120"/>
-                <a:cs typeface="Calibri" panose="020F07020304040A0204" pitchFamily="34" charset="0"/>
-              </a:rPr>
-              <a:t>x10-x17)</a:t>
-            </a:r>
-          </a:p>
-        </p:txBody>
-      </p:sp>
-      <p:sp>
-        <p:nvSpPr>
-          <p:cNvPr id="15" name="TextBox 14">
-            <a:extLst>
-              <a:ext uri="{FF2B5EF4-FFF2-40B4-BE49-F238E27FC236}">
-                <a16:creationId xmlns:a16="http://schemas.microsoft.com/office/drawing/2014/main" id="{3556CAA4-16B1-4B0A-9644-029C8448F2F8}"/>
-              </a:ext>
-            </a:extLst>
-          </p:cNvPr>
-          <p:cNvSpPr txBox="1"/>
-          <p:nvPr/>
-        </p:nvSpPr>
-        <p:spPr>
-          <a:xfrm>
-            <a:off x="313873" y="2898783"/>
-            <a:ext cx="2095445" cy="646331"/>
-          </a:xfrm>
-          <a:prstGeom prst="rect">
-            <a:avLst/>
-          </a:prstGeom>
-          <a:noFill/>
-        </p:spPr>
-        <p:txBody>
-          <a:bodyPr wrap="none" rtlCol="0" anchor="ctr" anchorCtr="1">
-            <a:spAutoFit/>
-          </a:bodyPr>
-          <a:lstStyle/>
-          <a:p>
-            <a:r>
-              <a:rPr lang="en-US" dirty="0">
-                <a:ea typeface="標楷體" pitchFamily="65" charset="-120"/>
-                <a:cs typeface="Calibri" panose="020F07020304040A0204" pitchFamily="34" charset="0"/>
-              </a:rPr>
-              <a:t>So caller does not </a:t>
-            </a:r>
-          </a:p>
-          <a:p>
-            <a:r>
-              <a:rPr lang="en-US" dirty="0">
-                <a:ea typeface="標楷體" pitchFamily="65" charset="-120"/>
-                <a:cs typeface="Calibri" panose="020F07020304040A0204" pitchFamily="34" charset="0"/>
-              </a:rPr>
-              <a:t>need to save any</a:t>
-            </a:r>
-          </a:p>
-        </p:txBody>
-      </p:sp>
-      <p:sp>
-        <p:nvSpPr>
-          <p:cNvPr id="8" name="Rectangle 7">
-            <a:extLst>
-              <a:ext uri="{FF2B5EF4-FFF2-40B4-BE49-F238E27FC236}">
-                <a16:creationId xmlns:a16="http://schemas.microsoft.com/office/drawing/2014/main" id="{D0798374-FC54-4AB7-95D9-4344EB4ACD39}"/>
-              </a:ext>
-            </a:extLst>
-          </p:cNvPr>
-          <p:cNvSpPr/>
-          <p:nvPr/>
-        </p:nvSpPr>
-        <p:spPr bwMode="auto">
-          <a:xfrm>
-            <a:off x="6966857" y="1124857"/>
-            <a:ext cx="1057737" cy="3147053"/>
-          </a:xfrm>
-          <a:prstGeom prst="rect">
-            <a:avLst/>
-          </a:prstGeom>
-          <a:solidFill>
-            <a:schemeClr val="tx2">
-              <a:lumMod val="60000"/>
-              <a:lumOff val="40000"/>
-            </a:schemeClr>
-          </a:solidFill>
-          <a:ln w="15875" cap="flat" cmpd="sng" algn="ctr">
-            <a:solidFill>
-              <a:srgbClr val="FF0000"/>
-            </a:solidFill>
-            <a:prstDash val="solid"/>
-            <a:round/>
-            <a:headEnd type="none" w="med" len="med"/>
-            <a:tailEnd type="none" w="med" len="med"/>
-          </a:ln>
-        </p:spPr>
-        <p:txBody>
-          <a:bodyPr vert="horz" wrap="none" lIns="91440" tIns="45720" rIns="91440" bIns="45720" numCol="1" rtlCol="0" anchor="ctr" anchorCtr="0" compatLnSpc="1"/>
-          <a:lstStyle/>
-          <a:p>
-            <a:pPr marL="0" marR="0" indent="0" algn="ctr" defTabSz="914400" rtl="0" eaLnBrk="1" fontAlgn="base" latinLnBrk="0" hangingPunct="1">
-              <a:lnSpc>
-                <a:spcPct val="100000"/>
-              </a:lnSpc>
-              <a:spcBef>
-                <a:spcPct val="0"/>
-              </a:spcBef>
-              <a:spcAft>
-                <a:spcPct val="0"/>
-              </a:spcAft>
-              <a:buClrTx/>
-              <a:buSzTx/>
-              <a:buFontTx/>
-              <a:buNone/>
-            </a:pPr>
-            <a:endParaRPr kumimoji="1" lang="en-US" sz="1800" b="1" i="0" u="none" strike="noStrike" cap="none" normalizeH="0" baseline="0" dirty="0">
-              <a:ln>
-                <a:noFill/>
-              </a:ln>
-              <a:solidFill>
-                <a:schemeClr val="tx1"/>
-              </a:solidFill>
-              <a:effectLst/>
-              <a:latin typeface="Arial" panose="020B0604020202090204" pitchFamily="34" charset="0"/>
-              <a:ea typeface="新細明體" panose="02020500000000000000" pitchFamily="18" charset="-120"/>
-            </a:endParaRPr>
-          </a:p>
-          <a:p>
-            <a:pPr marL="0" marR="0" indent="0" algn="ctr" defTabSz="914400" rtl="0" eaLnBrk="1" fontAlgn="base" latinLnBrk="0" hangingPunct="1">
-              <a:lnSpc>
-                <a:spcPct val="100000"/>
-              </a:lnSpc>
-              <a:spcBef>
-                <a:spcPct val="0"/>
-              </a:spcBef>
-              <a:spcAft>
-                <a:spcPct val="0"/>
-              </a:spcAft>
-              <a:buClrTx/>
-              <a:buSzTx/>
-              <a:buFontTx/>
-              <a:buNone/>
-            </a:pPr>
-            <a:endParaRPr kumimoji="1" lang="en-US" b="1" dirty="0">
-              <a:latin typeface="Arial" panose="020B0604020202090204" pitchFamily="34" charset="0"/>
-              <a:ea typeface="新細明體" panose="02020500000000000000" pitchFamily="18" charset="-120"/>
-            </a:endParaRPr>
-          </a:p>
-          <a:p>
-            <a:pPr marL="0" marR="0" indent="0" algn="ctr" defTabSz="914400" rtl="0" eaLnBrk="1" fontAlgn="base" latinLnBrk="0" hangingPunct="1">
-              <a:lnSpc>
-                <a:spcPct val="100000"/>
-              </a:lnSpc>
-              <a:spcBef>
-                <a:spcPct val="0"/>
-              </a:spcBef>
-              <a:spcAft>
-                <a:spcPct val="0"/>
-              </a:spcAft>
-              <a:buClrTx/>
-              <a:buSzTx/>
-              <a:buFontTx/>
-              <a:buNone/>
-            </a:pPr>
-            <a:endParaRPr kumimoji="1" lang="en-US" sz="1800" b="1" i="0" u="none" strike="noStrike" cap="none" normalizeH="0" baseline="0" dirty="0">
-              <a:ln>
-                <a:noFill/>
-              </a:ln>
-              <a:solidFill>
-                <a:schemeClr val="tx1"/>
-              </a:solidFill>
-              <a:effectLst/>
-              <a:latin typeface="Arial" panose="020B0604020202090204" pitchFamily="34" charset="0"/>
-              <a:ea typeface="新細明體" panose="02020500000000000000" pitchFamily="18" charset="-120"/>
-            </a:endParaRPr>
-          </a:p>
-          <a:p>
-            <a:pPr marL="0" marR="0" indent="0" algn="ctr" defTabSz="914400" rtl="0" eaLnBrk="1" fontAlgn="base" latinLnBrk="0" hangingPunct="1">
-              <a:lnSpc>
-                <a:spcPct val="100000"/>
-              </a:lnSpc>
-              <a:spcBef>
-                <a:spcPct val="0"/>
-              </a:spcBef>
-              <a:spcAft>
-                <a:spcPct val="0"/>
-              </a:spcAft>
-              <a:buClrTx/>
-              <a:buSzTx/>
-              <a:buFontTx/>
-              <a:buNone/>
-            </a:pPr>
-            <a:endParaRPr kumimoji="1" lang="en-US" b="1" dirty="0">
-              <a:latin typeface="Arial" panose="020B0604020202090204" pitchFamily="34" charset="0"/>
-              <a:ea typeface="新細明體" panose="02020500000000000000" pitchFamily="18" charset="-120"/>
-            </a:endParaRPr>
-          </a:p>
-          <a:p>
-            <a:pPr marL="0" marR="0" indent="0" algn="ctr" defTabSz="914400" rtl="0" eaLnBrk="1" fontAlgn="base" latinLnBrk="0" hangingPunct="1">
-              <a:lnSpc>
-                <a:spcPct val="100000"/>
-              </a:lnSpc>
-              <a:spcBef>
-                <a:spcPct val="0"/>
-              </a:spcBef>
-              <a:spcAft>
-                <a:spcPct val="0"/>
-              </a:spcAft>
-              <a:buClrTx/>
-              <a:buSzTx/>
-              <a:buFontTx/>
-              <a:buNone/>
-            </a:pPr>
-            <a:endParaRPr kumimoji="1" lang="en-US" sz="1800" b="1" i="0" u="none" strike="noStrike" cap="none" normalizeH="0" baseline="0" dirty="0">
-              <a:ln>
-                <a:noFill/>
-              </a:ln>
-              <a:solidFill>
-                <a:schemeClr val="tx1"/>
-              </a:solidFill>
-              <a:effectLst/>
-              <a:latin typeface="Arial" panose="020B0604020202090204" pitchFamily="34" charset="0"/>
-              <a:ea typeface="新細明體" panose="02020500000000000000" pitchFamily="18" charset="-120"/>
-            </a:endParaRPr>
-          </a:p>
-          <a:p>
-            <a:pPr marL="0" marR="0" indent="0" algn="ctr" defTabSz="914400" rtl="0" eaLnBrk="1" fontAlgn="base" latinLnBrk="0" hangingPunct="1">
-              <a:lnSpc>
-                <a:spcPct val="100000"/>
-              </a:lnSpc>
-              <a:spcBef>
-                <a:spcPct val="0"/>
-              </a:spcBef>
-              <a:spcAft>
-                <a:spcPct val="0"/>
-              </a:spcAft>
-              <a:buClrTx/>
-              <a:buSzTx/>
-              <a:buFontTx/>
-              <a:buNone/>
-            </a:pPr>
-            <a:endParaRPr kumimoji="1" lang="en-US" b="1" dirty="0">
-              <a:latin typeface="Arial" panose="020B0604020202090204" pitchFamily="34" charset="0"/>
-              <a:ea typeface="新細明體" panose="02020500000000000000" pitchFamily="18" charset="-120"/>
-            </a:endParaRPr>
-          </a:p>
-          <a:p>
-            <a:pPr marL="0" marR="0" indent="0" algn="ctr" defTabSz="914400" rtl="0" eaLnBrk="1" fontAlgn="base" latinLnBrk="0" hangingPunct="1">
-              <a:lnSpc>
-                <a:spcPct val="100000"/>
-              </a:lnSpc>
-              <a:spcBef>
-                <a:spcPct val="0"/>
-              </a:spcBef>
-              <a:spcAft>
-                <a:spcPct val="0"/>
-              </a:spcAft>
-              <a:buClrTx/>
-              <a:buSzTx/>
-              <a:buFontTx/>
-              <a:buNone/>
-            </a:pPr>
-            <a:endParaRPr kumimoji="1" lang="en-US" sz="1800" b="1" i="0" u="none" strike="noStrike" cap="none" normalizeH="0" baseline="0" dirty="0">
-              <a:ln>
-                <a:noFill/>
-              </a:ln>
-              <a:solidFill>
-                <a:schemeClr val="tx1"/>
-              </a:solidFill>
-              <a:effectLst/>
-              <a:latin typeface="Arial" panose="020B0604020202090204" pitchFamily="34" charset="0"/>
-              <a:ea typeface="新細明體" panose="02020500000000000000" pitchFamily="18" charset="-120"/>
-            </a:endParaRPr>
-          </a:p>
-          <a:p>
-            <a:pPr marL="0" marR="0" indent="0" algn="ctr" defTabSz="914400" rtl="0" eaLnBrk="1" fontAlgn="base" latinLnBrk="0" hangingPunct="1">
-              <a:lnSpc>
-                <a:spcPct val="100000"/>
-              </a:lnSpc>
-              <a:spcBef>
-                <a:spcPct val="0"/>
-              </a:spcBef>
-              <a:spcAft>
-                <a:spcPct val="0"/>
-              </a:spcAft>
-              <a:buClrTx/>
-              <a:buSzTx/>
-              <a:buFontTx/>
-              <a:buNone/>
+            <a:pPr algn="l" eaLnBrk="1" hangingPunct="1">
+              <a:defRPr/>
             </a:pPr>
             <a:r>
-              <a:rPr kumimoji="1" lang="en-US" b="1" dirty="0">
-                <a:latin typeface="Arial" panose="020B0604020202090204" pitchFamily="34" charset="0"/>
-                <a:ea typeface="新細明體" panose="02020500000000000000" pitchFamily="18" charset="-120"/>
+              <a:rPr lang="en-US" altLang="zh-TW" sz="2000" dirty="0">
+                <a:effectLst/>
+                <a:ea typeface="新細明體" pitchFamily="18" charset="-120"/>
               </a:rPr>
-              <a:t>Callee</a:t>
+              <a:t>	x = </a:t>
             </a:r>
-          </a:p>
-          <a:p>
-            <a:pPr marL="0" marR="0" indent="0" algn="ctr" defTabSz="914400" rtl="0" eaLnBrk="1" fontAlgn="base" latinLnBrk="0" hangingPunct="1">
-              <a:lnSpc>
-                <a:spcPct val="100000"/>
-              </a:lnSpc>
-              <a:spcBef>
-                <a:spcPct val="0"/>
-              </a:spcBef>
-              <a:spcAft>
-                <a:spcPct val="0"/>
-              </a:spcAft>
-              <a:buClrTx/>
-              <a:buSzTx/>
-              <a:buFontTx/>
-              <a:buNone/>
+            <a:r>
+              <a:rPr lang="en-US" altLang="zh-TW" sz="2000" dirty="0" err="1">
+                <a:effectLst/>
+                <a:ea typeface="新細明體" pitchFamily="18" charset="-120"/>
+              </a:rPr>
+              <a:t>funct_B</a:t>
+            </a:r>
+            <a:r>
+              <a:rPr lang="en-US" altLang="zh-TW" sz="2000" dirty="0">
+                <a:effectLst/>
+                <a:ea typeface="新細明體" pitchFamily="18" charset="-120"/>
+              </a:rPr>
+              <a:t>();</a:t>
+            </a:r>
+          </a:p>
+          <a:p>
+            <a:pPr algn="l" eaLnBrk="1" hangingPunct="1">
+              <a:defRPr/>
             </a:pPr>
             <a:r>
-              <a:rPr kumimoji="1" lang="en-US" sz="1800" b="1" i="0" u="none" strike="noStrike" cap="none" normalizeH="0" baseline="0" dirty="0">
-                <a:ln>
-                  <a:noFill/>
-                </a:ln>
-                <a:solidFill>
-                  <a:schemeClr val="tx1"/>
-                </a:solidFill>
+              <a:rPr lang="en-US" altLang="zh-TW" sz="2000" dirty="0">
                 <a:effectLst/>
-                <a:latin typeface="Arial" panose="020B0604020202090204" pitchFamily="34" charset="0"/>
-                <a:ea typeface="新細明體" panose="02020500000000000000" pitchFamily="18" charset="-120"/>
+                <a:ea typeface="新細明體" pitchFamily="18" charset="-120"/>
               </a:rPr>
-              <a:t>save</a:t>
+              <a:t>	y = </a:t>
             </a:r>
-          </a:p>
-        </p:txBody>
-      </p:sp>
-      <p:sp>
-        <p:nvSpPr>
-          <p:cNvPr id="16" name="Rectangle 15">
-            <a:extLst>
-              <a:ext uri="{FF2B5EF4-FFF2-40B4-BE49-F238E27FC236}">
-                <a16:creationId xmlns:a16="http://schemas.microsoft.com/office/drawing/2014/main" id="{6CBF37F3-0D85-480E-8D31-DE3F1760A750}"/>
-              </a:ext>
-            </a:extLst>
-          </p:cNvPr>
-          <p:cNvSpPr/>
-          <p:nvPr/>
-        </p:nvSpPr>
-        <p:spPr bwMode="auto">
-          <a:xfrm>
-            <a:off x="6966857" y="1124857"/>
-            <a:ext cx="1057737" cy="1618343"/>
-          </a:xfrm>
-          <a:prstGeom prst="rect">
-            <a:avLst/>
-          </a:prstGeom>
-          <a:solidFill>
-            <a:schemeClr val="accent2"/>
-          </a:solidFill>
-          <a:ln w="15875" cap="flat" cmpd="sng" algn="ctr">
-            <a:solidFill>
-              <a:srgbClr val="FF0000"/>
-            </a:solidFill>
-            <a:prstDash val="solid"/>
-            <a:round/>
-            <a:headEnd type="none" w="med" len="med"/>
-            <a:tailEnd type="none" w="med" len="med"/>
-          </a:ln>
-        </p:spPr>
-        <p:txBody>
-          <a:bodyPr vert="horz" wrap="none" lIns="91440" tIns="45720" rIns="91440" bIns="45720" numCol="1" rtlCol="0" anchor="ctr" anchorCtr="0" compatLnSpc="1"/>
-          <a:lstStyle/>
-          <a:p>
-            <a:pPr marL="0" marR="0" indent="0" algn="ctr" defTabSz="914400" rtl="0" eaLnBrk="1" fontAlgn="base" latinLnBrk="0" hangingPunct="1">
-              <a:lnSpc>
-                <a:spcPct val="100000"/>
-              </a:lnSpc>
-              <a:spcBef>
-                <a:spcPct val="0"/>
-              </a:spcBef>
-              <a:spcAft>
-                <a:spcPct val="0"/>
-              </a:spcAft>
-              <a:buClrTx/>
-              <a:buSzTx/>
-              <a:buFontTx/>
-              <a:buNone/>
+            <a:r>
+              <a:rPr lang="en-US" altLang="zh-TW" sz="2000" dirty="0" err="1">
+                <a:effectLst/>
+                <a:ea typeface="新細明體" pitchFamily="18" charset="-120"/>
+              </a:rPr>
+              <a:t>funct_C</a:t>
+            </a:r>
+            <a:r>
+              <a:rPr lang="en-US" altLang="zh-TW" sz="2000" dirty="0">
+                <a:effectLst/>
+                <a:ea typeface="新細明體" pitchFamily="18" charset="-120"/>
+              </a:rPr>
+              <a:t>();</a:t>
+            </a:r>
+          </a:p>
+          <a:p>
+            <a:pPr algn="l" eaLnBrk="1" hangingPunct="1">
+              <a:defRPr/>
             </a:pPr>
             <a:r>
-              <a:rPr kumimoji="1" lang="en-US" sz="1800" b="1" i="0" u="none" strike="noStrike" cap="none" normalizeH="0" baseline="0" dirty="0">
-                <a:ln>
-                  <a:noFill/>
-                </a:ln>
-                <a:solidFill>
-                  <a:schemeClr val="tx1"/>
-                </a:solidFill>
+              <a:rPr lang="en-US" altLang="zh-TW" sz="2000" dirty="0">
                 <a:effectLst/>
-                <a:latin typeface="Arial" panose="020B0604020202090204" pitchFamily="34" charset="0"/>
-                <a:ea typeface="新細明體" panose="02020500000000000000" pitchFamily="18" charset="-120"/>
+                <a:ea typeface="新細明體" pitchFamily="18" charset="-120"/>
               </a:rPr>
-              <a:t>Caller </a:t>
+              <a:t>	a = x + y;</a:t>
             </a:r>
           </a:p>
           <a:p>
-            <a:pPr marL="0" marR="0" indent="0" algn="ctr" defTabSz="914400" rtl="0" eaLnBrk="1" fontAlgn="base" latinLnBrk="0" hangingPunct="1">
-              <a:lnSpc>
-                <a:spcPct val="100000"/>
-              </a:lnSpc>
-              <a:spcBef>
-                <a:spcPct val="0"/>
-              </a:spcBef>
-              <a:spcAft>
-                <a:spcPct val="0"/>
-              </a:spcAft>
-              <a:buClrTx/>
-              <a:buSzTx/>
-              <a:buFontTx/>
-              <a:buNone/>
+            <a:pPr algn="l" eaLnBrk="1" hangingPunct="1">
+              <a:defRPr/>
             </a:pPr>
             <a:r>
-              <a:rPr kumimoji="1" lang="en-US" sz="1800" b="1" i="0" u="none" strike="noStrike" cap="none" normalizeH="0" baseline="0" dirty="0">
-                <a:ln>
-                  <a:noFill/>
-                </a:ln>
-                <a:solidFill>
-                  <a:schemeClr val="tx1"/>
-                </a:solidFill>
+              <a:rPr lang="en-US" altLang="zh-TW" sz="2000" dirty="0">
                 <a:effectLst/>
-                <a:latin typeface="Arial" panose="020B0604020202090204" pitchFamily="34" charset="0"/>
-                <a:ea typeface="新細明體" panose="02020500000000000000" pitchFamily="18" charset="-120"/>
+                <a:ea typeface="新細明體" pitchFamily="18" charset="-120"/>
               </a:rPr>
-              <a:t>save</a:t>
+              <a:t>	….}</a:t>
+            </a:r>
+          </a:p>
+          <a:p>
+            <a:pPr algn="l" eaLnBrk="1" hangingPunct="1">
+              <a:defRPr/>
+            </a:pPr>
+            <a:r>
+              <a:rPr lang="en-US" altLang="zh-TW" sz="1800" dirty="0">
+                <a:effectLst/>
+                <a:ea typeface="新細明體" pitchFamily="18" charset="-120"/>
+              </a:rPr>
+              <a:t>The local variable </a:t>
+            </a:r>
+            <a:r>
+              <a:rPr lang="en-US" altLang="zh-TW" sz="1800" b="1" i="1" dirty="0">
+                <a:effectLst/>
+                <a:ea typeface="新細明體" pitchFamily="18" charset="-120"/>
+              </a:rPr>
+              <a:t>x</a:t>
+            </a:r>
+            <a:r>
+              <a:rPr lang="en-US" altLang="zh-TW" sz="1800" dirty="0">
+                <a:effectLst/>
+                <a:ea typeface="新細明體" pitchFamily="18" charset="-120"/>
+              </a:rPr>
+              <a:t> may be allocated to a register. If it is assigned to a register in the range of t0-t6, it must be saved and restored during a call to the function </a:t>
+            </a:r>
+            <a:r>
+              <a:rPr lang="en-US" altLang="zh-TW" sz="1800" dirty="0" err="1">
+                <a:effectLst/>
+                <a:ea typeface="新細明體" pitchFamily="18" charset="-120"/>
+              </a:rPr>
+              <a:t>funct_C</a:t>
+            </a:r>
+            <a:r>
+              <a:rPr lang="en-US" altLang="zh-TW" sz="1800" dirty="0">
+                <a:effectLst/>
+                <a:ea typeface="新細明體" pitchFamily="18" charset="-120"/>
+              </a:rPr>
+              <a:t>(), since these are classified as "caller-save" registers. Conversely, if the register is within the range of s0-s11, it is considered a "callee-saved" register. In this case, there is no need to save or restore it across the call to </a:t>
+            </a:r>
+            <a:r>
+              <a:rPr lang="en-US" altLang="zh-TW" sz="1800" dirty="0" err="1">
+                <a:effectLst/>
+                <a:ea typeface="新細明體" pitchFamily="18" charset="-120"/>
+              </a:rPr>
+              <a:t>funct_C</a:t>
+            </a:r>
+            <a:r>
+              <a:rPr lang="en-US" altLang="zh-TW" sz="1800" dirty="0">
+                <a:effectLst/>
+                <a:ea typeface="新細明體" pitchFamily="18" charset="-120"/>
+              </a:rPr>
+              <a:t>() because the function will take care of saving and restoring it.</a:t>
+            </a:r>
+            <a:r>
+              <a:rPr lang="en-US" altLang="zh-TW" sz="2000" dirty="0">
+                <a:effectLst/>
+                <a:ea typeface="新細明體" pitchFamily="18" charset="-120"/>
+              </a:rPr>
+              <a:t>	</a:t>
             </a:r>
           </a:p>
         </p:txBody>
@@ -7544,7 +7211,7 @@
     </p:spTree>
     <p:extLst>
       <p:ext uri="{BB962C8B-B14F-4D97-AF65-F5344CB8AC3E}">
-        <p14:creationId xmlns:p14="http://schemas.microsoft.com/office/powerpoint/2010/main" val="1968842813"/>
+        <p14:creationId xmlns:p14="http://schemas.microsoft.com/office/powerpoint/2010/main" val="1876463905"/>
       </p:ext>
     </p:extLst>
   </p:cSld>
@@ -8234,6 +7901,1610 @@
                 <a:effectLst/>
                 <a:ea typeface="新細明體" pitchFamily="18" charset="-120"/>
               </a:rPr>
+              <a:t>Ideal World</a:t>
+            </a:r>
+          </a:p>
+        </p:txBody>
+      </p:sp>
+      <p:sp>
+        <p:nvSpPr>
+          <p:cNvPr id="2" name="Rectangle 1">
+            <a:extLst>
+              <a:ext uri="{FF2B5EF4-FFF2-40B4-BE49-F238E27FC236}">
+                <a16:creationId xmlns:a16="http://schemas.microsoft.com/office/drawing/2014/main" id="{DA544BBA-45E5-4C25-8B3F-949860BEA82F}"/>
+              </a:ext>
+            </a:extLst>
+          </p:cNvPr>
+          <p:cNvSpPr/>
+          <p:nvPr/>
+        </p:nvSpPr>
+        <p:spPr bwMode="auto">
+          <a:xfrm>
+            <a:off x="313873" y="1306286"/>
+            <a:ext cx="2155371" cy="2757715"/>
+          </a:xfrm>
+          <a:prstGeom prst="rect">
+            <a:avLst/>
+          </a:prstGeom>
+          <a:noFill/>
+          <a:ln w="15875" cap="flat" cmpd="sng" algn="ctr">
+            <a:solidFill>
+              <a:srgbClr val="FF0000"/>
+            </a:solidFill>
+            <a:prstDash val="solid"/>
+            <a:round/>
+            <a:headEnd type="none" w="med" len="med"/>
+            <a:tailEnd type="none" w="med" len="med"/>
+          </a:ln>
+        </p:spPr>
+        <p:txBody>
+          <a:bodyPr vert="horz" wrap="none" lIns="91440" tIns="45720" rIns="91440" bIns="45720" numCol="1" rtlCol="0" anchor="ctr" anchorCtr="0" compatLnSpc="1"/>
+          <a:lstStyle/>
+          <a:p>
+            <a:pPr marL="0" marR="0" indent="0" algn="ctr" defTabSz="914400" rtl="0" eaLnBrk="1" fontAlgn="base" latinLnBrk="0" hangingPunct="1">
+              <a:lnSpc>
+                <a:spcPct val="100000"/>
+              </a:lnSpc>
+              <a:spcBef>
+                <a:spcPct val="0"/>
+              </a:spcBef>
+              <a:spcAft>
+                <a:spcPct val="0"/>
+              </a:spcAft>
+              <a:buClrTx/>
+              <a:buSzTx/>
+              <a:buFontTx/>
+              <a:buNone/>
+            </a:pPr>
+            <a:endParaRPr kumimoji="1" lang="en-US" sz="1800" b="1" i="0" u="none" strike="noStrike" cap="none" normalizeH="0" baseline="0">
+              <a:ln>
+                <a:noFill/>
+              </a:ln>
+              <a:solidFill>
+                <a:schemeClr val="tx1"/>
+              </a:solidFill>
+              <a:effectLst/>
+              <a:latin typeface="Arial" panose="020B0604020202090204" pitchFamily="34" charset="0"/>
+              <a:ea typeface="新細明體" panose="02020500000000000000" pitchFamily="18" charset="-120"/>
+            </a:endParaRPr>
+          </a:p>
+        </p:txBody>
+      </p:sp>
+      <p:sp>
+        <p:nvSpPr>
+          <p:cNvPr id="7" name="Rectangle 6">
+            <a:extLst>
+              <a:ext uri="{FF2B5EF4-FFF2-40B4-BE49-F238E27FC236}">
+                <a16:creationId xmlns:a16="http://schemas.microsoft.com/office/drawing/2014/main" id="{44469BB1-9F2D-4610-A1CB-A635FC3E8FA6}"/>
+              </a:ext>
+            </a:extLst>
+          </p:cNvPr>
+          <p:cNvSpPr/>
+          <p:nvPr/>
+        </p:nvSpPr>
+        <p:spPr bwMode="auto">
+          <a:xfrm>
+            <a:off x="3880758" y="1306286"/>
+            <a:ext cx="2155371" cy="2757715"/>
+          </a:xfrm>
+          <a:prstGeom prst="rect">
+            <a:avLst/>
+          </a:prstGeom>
+          <a:noFill/>
+          <a:ln w="15875" cap="flat" cmpd="sng" algn="ctr">
+            <a:solidFill>
+              <a:srgbClr val="FF0000"/>
+            </a:solidFill>
+            <a:prstDash val="solid"/>
+            <a:round/>
+            <a:headEnd type="none" w="med" len="med"/>
+            <a:tailEnd type="none" w="med" len="med"/>
+          </a:ln>
+        </p:spPr>
+        <p:txBody>
+          <a:bodyPr vert="horz" wrap="none" lIns="91440" tIns="45720" rIns="91440" bIns="45720" numCol="1" rtlCol="0" anchor="ctr" anchorCtr="0" compatLnSpc="1"/>
+          <a:lstStyle/>
+          <a:p>
+            <a:pPr marL="0" marR="0" indent="0" algn="ctr" defTabSz="914400" rtl="0" eaLnBrk="1" fontAlgn="base" latinLnBrk="0" hangingPunct="1">
+              <a:lnSpc>
+                <a:spcPct val="100000"/>
+              </a:lnSpc>
+              <a:spcBef>
+                <a:spcPct val="0"/>
+              </a:spcBef>
+              <a:spcAft>
+                <a:spcPct val="0"/>
+              </a:spcAft>
+              <a:buClrTx/>
+              <a:buSzTx/>
+              <a:buFontTx/>
+              <a:buNone/>
+            </a:pPr>
+            <a:endParaRPr kumimoji="1" lang="en-US" sz="1800" b="1" i="0" u="none" strike="noStrike" cap="none" normalizeH="0" baseline="0">
+              <a:ln>
+                <a:noFill/>
+              </a:ln>
+              <a:solidFill>
+                <a:schemeClr val="tx1"/>
+              </a:solidFill>
+              <a:effectLst/>
+              <a:latin typeface="Arial" panose="020B0604020202090204" pitchFamily="34" charset="0"/>
+              <a:ea typeface="新細明體" panose="02020500000000000000" pitchFamily="18" charset="-120"/>
+            </a:endParaRPr>
+          </a:p>
+        </p:txBody>
+      </p:sp>
+      <p:sp>
+        <p:nvSpPr>
+          <p:cNvPr id="3" name="TextBox 2">
+            <a:extLst>
+              <a:ext uri="{FF2B5EF4-FFF2-40B4-BE49-F238E27FC236}">
+                <a16:creationId xmlns:a16="http://schemas.microsoft.com/office/drawing/2014/main" id="{5D325113-1089-4563-9E48-404B3A22E61A}"/>
+              </a:ext>
+            </a:extLst>
+          </p:cNvPr>
+          <p:cNvSpPr txBox="1"/>
+          <p:nvPr/>
+        </p:nvSpPr>
+        <p:spPr>
+          <a:xfrm>
+            <a:off x="997860" y="1006929"/>
+            <a:ext cx="787395" cy="369332"/>
+          </a:xfrm>
+          <a:prstGeom prst="rect">
+            <a:avLst/>
+          </a:prstGeom>
+          <a:noFill/>
+        </p:spPr>
+        <p:txBody>
+          <a:bodyPr wrap="none" rtlCol="0" anchor="ctr" anchorCtr="1">
+            <a:spAutoFit/>
+          </a:bodyPr>
+          <a:lstStyle/>
+          <a:p>
+            <a:r>
+              <a:rPr lang="en-US" dirty="0">
+                <a:ea typeface="標楷體" pitchFamily="65" charset="-120"/>
+                <a:cs typeface="Calibri" panose="020F07020304040A0204" pitchFamily="34" charset="0"/>
+              </a:rPr>
+              <a:t>Caller</a:t>
+            </a:r>
+          </a:p>
+        </p:txBody>
+      </p:sp>
+      <p:sp>
+        <p:nvSpPr>
+          <p:cNvPr id="9" name="TextBox 8">
+            <a:extLst>
+              <a:ext uri="{FF2B5EF4-FFF2-40B4-BE49-F238E27FC236}">
+                <a16:creationId xmlns:a16="http://schemas.microsoft.com/office/drawing/2014/main" id="{C4389AF8-7627-4BA7-BCB7-83998F1DCEEE}"/>
+              </a:ext>
+            </a:extLst>
+          </p:cNvPr>
+          <p:cNvSpPr txBox="1"/>
+          <p:nvPr/>
+        </p:nvSpPr>
+        <p:spPr>
+          <a:xfrm>
+            <a:off x="4457709" y="998129"/>
+            <a:ext cx="838691" cy="369332"/>
+          </a:xfrm>
+          <a:prstGeom prst="rect">
+            <a:avLst/>
+          </a:prstGeom>
+          <a:noFill/>
+        </p:spPr>
+        <p:txBody>
+          <a:bodyPr wrap="none" rtlCol="0" anchor="ctr" anchorCtr="1">
+            <a:spAutoFit/>
+          </a:bodyPr>
+          <a:lstStyle/>
+          <a:p>
+            <a:r>
+              <a:rPr lang="en-US" dirty="0">
+                <a:ea typeface="標楷體" pitchFamily="65" charset="-120"/>
+                <a:cs typeface="Calibri" panose="020F07020304040A0204" pitchFamily="34" charset="0"/>
+              </a:rPr>
+              <a:t>Callee</a:t>
+            </a:r>
+          </a:p>
+        </p:txBody>
+      </p:sp>
+      <p:sp>
+        <p:nvSpPr>
+          <p:cNvPr id="4" name="Arrow: Right 3">
+            <a:extLst>
+              <a:ext uri="{FF2B5EF4-FFF2-40B4-BE49-F238E27FC236}">
+                <a16:creationId xmlns:a16="http://schemas.microsoft.com/office/drawing/2014/main" id="{2B743D9E-634C-4D2F-A013-808C0F862396}"/>
+              </a:ext>
+            </a:extLst>
+          </p:cNvPr>
+          <p:cNvSpPr/>
+          <p:nvPr/>
+        </p:nvSpPr>
+        <p:spPr bwMode="auto">
+          <a:xfrm>
+            <a:off x="2685797" y="2406258"/>
+            <a:ext cx="978408" cy="484632"/>
+          </a:xfrm>
+          <a:prstGeom prst="rightArrow">
+            <a:avLst/>
+          </a:prstGeom>
+          <a:noFill/>
+          <a:ln w="15875" cap="flat" cmpd="sng" algn="ctr">
+            <a:solidFill>
+              <a:srgbClr val="FF0000"/>
+            </a:solidFill>
+            <a:prstDash val="solid"/>
+            <a:round/>
+            <a:headEnd type="none" w="med" len="med"/>
+            <a:tailEnd type="none" w="med" len="med"/>
+          </a:ln>
+        </p:spPr>
+        <p:txBody>
+          <a:bodyPr vert="horz" wrap="none" lIns="91440" tIns="45720" rIns="91440" bIns="45720" numCol="1" rtlCol="0" anchor="ctr" anchorCtr="0" compatLnSpc="1"/>
+          <a:lstStyle/>
+          <a:p>
+            <a:pPr marL="0" marR="0" indent="0" algn="ctr" defTabSz="914400" rtl="0" eaLnBrk="1" fontAlgn="base" latinLnBrk="0" hangingPunct="1">
+              <a:lnSpc>
+                <a:spcPct val="100000"/>
+              </a:lnSpc>
+              <a:spcBef>
+                <a:spcPct val="0"/>
+              </a:spcBef>
+              <a:spcAft>
+                <a:spcPct val="0"/>
+              </a:spcAft>
+              <a:buClrTx/>
+              <a:buSzTx/>
+              <a:buFontTx/>
+              <a:buNone/>
+            </a:pPr>
+            <a:endParaRPr kumimoji="1" lang="en-US" sz="1800" b="1" i="0" u="none" strike="noStrike" cap="none" normalizeH="0" baseline="0">
+              <a:ln>
+                <a:noFill/>
+              </a:ln>
+              <a:solidFill>
+                <a:schemeClr val="tx1"/>
+              </a:solidFill>
+              <a:effectLst/>
+              <a:latin typeface="Arial" panose="020B0604020202090204" pitchFamily="34" charset="0"/>
+              <a:ea typeface="新細明體" panose="02020500000000000000" pitchFamily="18" charset="-120"/>
+            </a:endParaRPr>
+          </a:p>
+        </p:txBody>
+      </p:sp>
+      <p:sp>
+        <p:nvSpPr>
+          <p:cNvPr id="6" name="TextBox 5">
+            <a:extLst>
+              <a:ext uri="{FF2B5EF4-FFF2-40B4-BE49-F238E27FC236}">
+                <a16:creationId xmlns:a16="http://schemas.microsoft.com/office/drawing/2014/main" id="{5996B1FE-F102-4142-8C14-371015F32760}"/>
+              </a:ext>
+            </a:extLst>
+          </p:cNvPr>
+          <p:cNvSpPr txBox="1"/>
+          <p:nvPr/>
+        </p:nvSpPr>
+        <p:spPr>
+          <a:xfrm>
+            <a:off x="405065" y="1432868"/>
+            <a:ext cx="2146742" cy="1200329"/>
+          </a:xfrm>
+          <a:prstGeom prst="rect">
+            <a:avLst/>
+          </a:prstGeom>
+          <a:noFill/>
+        </p:spPr>
+        <p:txBody>
+          <a:bodyPr wrap="none" rtlCol="0" anchor="ctr" anchorCtr="1">
+            <a:spAutoFit/>
+          </a:bodyPr>
+          <a:lstStyle/>
+          <a:p>
+            <a:r>
+              <a:rPr lang="en-US" dirty="0">
+                <a:ea typeface="標楷體" pitchFamily="65" charset="-120"/>
+                <a:cs typeface="Calibri" panose="020F07020304040A0204" pitchFamily="34" charset="0"/>
+              </a:rPr>
+              <a:t>Caller tries to</a:t>
+            </a:r>
+          </a:p>
+          <a:p>
+            <a:r>
+              <a:rPr lang="en-US" dirty="0">
+                <a:ea typeface="標楷體" pitchFamily="65" charset="-120"/>
+                <a:cs typeface="Calibri" panose="020F07020304040A0204" pitchFamily="34" charset="0"/>
+              </a:rPr>
+              <a:t>use all </a:t>
+            </a:r>
+            <a:r>
+              <a:rPr lang="en-US" dirty="0">
+                <a:solidFill>
+                  <a:srgbClr val="FF0000"/>
+                </a:solidFill>
+                <a:ea typeface="標楷體" pitchFamily="65" charset="-120"/>
+                <a:cs typeface="Calibri" panose="020F07020304040A0204" pitchFamily="34" charset="0"/>
+              </a:rPr>
+              <a:t>callee</a:t>
+            </a:r>
+            <a:r>
+              <a:rPr lang="en-US" dirty="0">
+                <a:ea typeface="標楷體" pitchFamily="65" charset="-120"/>
+                <a:cs typeface="Calibri" panose="020F07020304040A0204" pitchFamily="34" charset="0"/>
+              </a:rPr>
+              <a:t>-save </a:t>
+            </a:r>
+          </a:p>
+          <a:p>
+            <a:r>
+              <a:rPr lang="en-US" dirty="0">
+                <a:ea typeface="標楷體" pitchFamily="65" charset="-120"/>
+                <a:cs typeface="Calibri" panose="020F07020304040A0204" pitchFamily="34" charset="0"/>
+              </a:rPr>
+              <a:t>Registers</a:t>
+            </a:r>
+          </a:p>
+          <a:p>
+            <a:r>
+              <a:rPr lang="en-US" dirty="0">
+                <a:ea typeface="標楷體" pitchFamily="65" charset="-120"/>
+                <a:cs typeface="Calibri" panose="020F07020304040A0204" pitchFamily="34" charset="0"/>
+              </a:rPr>
+              <a:t>(x8-x9,x18-x27)</a:t>
+            </a:r>
+          </a:p>
+        </p:txBody>
+      </p:sp>
+      <p:sp>
+        <p:nvSpPr>
+          <p:cNvPr id="13" name="TextBox 12">
+            <a:extLst>
+              <a:ext uri="{FF2B5EF4-FFF2-40B4-BE49-F238E27FC236}">
+                <a16:creationId xmlns:a16="http://schemas.microsoft.com/office/drawing/2014/main" id="{4417DAD6-057A-4033-955D-4C1611951EAB}"/>
+              </a:ext>
+            </a:extLst>
+          </p:cNvPr>
+          <p:cNvSpPr txBox="1"/>
+          <p:nvPr/>
+        </p:nvSpPr>
+        <p:spPr>
+          <a:xfrm>
+            <a:off x="3829330" y="2808922"/>
+            <a:ext cx="2146742" cy="646331"/>
+          </a:xfrm>
+          <a:prstGeom prst="rect">
+            <a:avLst/>
+          </a:prstGeom>
+          <a:noFill/>
+        </p:spPr>
+        <p:txBody>
+          <a:bodyPr wrap="none" rtlCol="0" anchor="ctr" anchorCtr="1">
+            <a:spAutoFit/>
+          </a:bodyPr>
+          <a:lstStyle/>
+          <a:p>
+            <a:r>
+              <a:rPr lang="en-US" dirty="0">
+                <a:ea typeface="標楷體" pitchFamily="65" charset="-120"/>
+                <a:cs typeface="Calibri" panose="020F07020304040A0204" pitchFamily="34" charset="0"/>
+              </a:rPr>
+              <a:t>So callee does not </a:t>
+            </a:r>
+          </a:p>
+          <a:p>
+            <a:r>
+              <a:rPr lang="en-US" dirty="0">
+                <a:ea typeface="標楷體" pitchFamily="65" charset="-120"/>
+                <a:cs typeface="Calibri" panose="020F07020304040A0204" pitchFamily="34" charset="0"/>
+              </a:rPr>
+              <a:t>need to save any</a:t>
+            </a:r>
+          </a:p>
+        </p:txBody>
+      </p:sp>
+      <p:sp>
+        <p:nvSpPr>
+          <p:cNvPr id="14" name="TextBox 13">
+            <a:extLst>
+              <a:ext uri="{FF2B5EF4-FFF2-40B4-BE49-F238E27FC236}">
+                <a16:creationId xmlns:a16="http://schemas.microsoft.com/office/drawing/2014/main" id="{CC330C33-85C3-4DC0-BC78-2361EFD45435}"/>
+              </a:ext>
+            </a:extLst>
+          </p:cNvPr>
+          <p:cNvSpPr txBox="1"/>
+          <p:nvPr/>
+        </p:nvSpPr>
+        <p:spPr>
+          <a:xfrm>
+            <a:off x="3940684" y="1413487"/>
+            <a:ext cx="2095445" cy="1477328"/>
+          </a:xfrm>
+          <a:prstGeom prst="rect">
+            <a:avLst/>
+          </a:prstGeom>
+          <a:noFill/>
+        </p:spPr>
+        <p:txBody>
+          <a:bodyPr wrap="none" rtlCol="0" anchor="ctr" anchorCtr="1">
+            <a:spAutoFit/>
+          </a:bodyPr>
+          <a:lstStyle/>
+          <a:p>
+            <a:r>
+              <a:rPr lang="en-US" dirty="0">
+                <a:ea typeface="標楷體" pitchFamily="65" charset="-120"/>
+                <a:cs typeface="Calibri" panose="020F07020304040A0204" pitchFamily="34" charset="0"/>
+              </a:rPr>
+              <a:t>Callee tries to</a:t>
+            </a:r>
+          </a:p>
+          <a:p>
+            <a:r>
+              <a:rPr lang="en-US" dirty="0">
+                <a:ea typeface="標楷體" pitchFamily="65" charset="-120"/>
+                <a:cs typeface="Calibri" panose="020F07020304040A0204" pitchFamily="34" charset="0"/>
+              </a:rPr>
+              <a:t>use all </a:t>
+            </a:r>
+            <a:r>
+              <a:rPr lang="en-US" dirty="0">
+                <a:solidFill>
+                  <a:srgbClr val="FF0000"/>
+                </a:solidFill>
+                <a:ea typeface="標楷體" pitchFamily="65" charset="-120"/>
+                <a:cs typeface="Calibri" panose="020F07020304040A0204" pitchFamily="34" charset="0"/>
+              </a:rPr>
+              <a:t>caller</a:t>
+            </a:r>
+            <a:r>
+              <a:rPr lang="en-US" dirty="0">
+                <a:ea typeface="標楷體" pitchFamily="65" charset="-120"/>
+                <a:cs typeface="Calibri" panose="020F07020304040A0204" pitchFamily="34" charset="0"/>
+              </a:rPr>
+              <a:t>-save </a:t>
+            </a:r>
+          </a:p>
+          <a:p>
+            <a:r>
+              <a:rPr lang="en-US" dirty="0">
+                <a:ea typeface="標楷體" pitchFamily="65" charset="-120"/>
+                <a:cs typeface="Calibri" panose="020F07020304040A0204" pitchFamily="34" charset="0"/>
+              </a:rPr>
+              <a:t>Registers</a:t>
+            </a:r>
+          </a:p>
+          <a:p>
+            <a:r>
+              <a:rPr lang="en-US" dirty="0">
+                <a:ea typeface="標楷體" pitchFamily="65" charset="-120"/>
+                <a:cs typeface="Calibri" panose="020F07020304040A0204" pitchFamily="34" charset="0"/>
+              </a:rPr>
+              <a:t>(x5-x7,x28-x31)</a:t>
+            </a:r>
+          </a:p>
+          <a:p>
+            <a:r>
+              <a:rPr lang="en-US" dirty="0">
+                <a:ea typeface="標楷體" pitchFamily="65" charset="-120"/>
+                <a:cs typeface="Calibri" panose="020F07020304040A0204" pitchFamily="34" charset="0"/>
+              </a:rPr>
+              <a:t>x10-x17)</a:t>
+            </a:r>
+          </a:p>
+        </p:txBody>
+      </p:sp>
+      <p:sp>
+        <p:nvSpPr>
+          <p:cNvPr id="15" name="TextBox 14">
+            <a:extLst>
+              <a:ext uri="{FF2B5EF4-FFF2-40B4-BE49-F238E27FC236}">
+                <a16:creationId xmlns:a16="http://schemas.microsoft.com/office/drawing/2014/main" id="{3556CAA4-16B1-4B0A-9644-029C8448F2F8}"/>
+              </a:ext>
+            </a:extLst>
+          </p:cNvPr>
+          <p:cNvSpPr txBox="1"/>
+          <p:nvPr/>
+        </p:nvSpPr>
+        <p:spPr>
+          <a:xfrm>
+            <a:off x="313873" y="2898783"/>
+            <a:ext cx="2095445" cy="646331"/>
+          </a:xfrm>
+          <a:prstGeom prst="rect">
+            <a:avLst/>
+          </a:prstGeom>
+          <a:noFill/>
+        </p:spPr>
+        <p:txBody>
+          <a:bodyPr wrap="none" rtlCol="0" anchor="ctr" anchorCtr="1">
+            <a:spAutoFit/>
+          </a:bodyPr>
+          <a:lstStyle/>
+          <a:p>
+            <a:r>
+              <a:rPr lang="en-US" dirty="0">
+                <a:ea typeface="標楷體" pitchFamily="65" charset="-120"/>
+                <a:cs typeface="Calibri" panose="020F07020304040A0204" pitchFamily="34" charset="0"/>
+              </a:rPr>
+              <a:t>So caller does not </a:t>
+            </a:r>
+          </a:p>
+          <a:p>
+            <a:r>
+              <a:rPr lang="en-US" dirty="0">
+                <a:ea typeface="標楷體" pitchFamily="65" charset="-120"/>
+                <a:cs typeface="Calibri" panose="020F07020304040A0204" pitchFamily="34" charset="0"/>
+              </a:rPr>
+              <a:t>need to save any</a:t>
+            </a:r>
+          </a:p>
+        </p:txBody>
+      </p:sp>
+      <p:sp>
+        <p:nvSpPr>
+          <p:cNvPr id="8" name="Rectangle 7">
+            <a:extLst>
+              <a:ext uri="{FF2B5EF4-FFF2-40B4-BE49-F238E27FC236}">
+                <a16:creationId xmlns:a16="http://schemas.microsoft.com/office/drawing/2014/main" id="{D0798374-FC54-4AB7-95D9-4344EB4ACD39}"/>
+              </a:ext>
+            </a:extLst>
+          </p:cNvPr>
+          <p:cNvSpPr/>
+          <p:nvPr/>
+        </p:nvSpPr>
+        <p:spPr bwMode="auto">
+          <a:xfrm>
+            <a:off x="6966857" y="1124857"/>
+            <a:ext cx="1057737" cy="3147053"/>
+          </a:xfrm>
+          <a:prstGeom prst="rect">
+            <a:avLst/>
+          </a:prstGeom>
+          <a:solidFill>
+            <a:schemeClr val="tx2">
+              <a:lumMod val="60000"/>
+              <a:lumOff val="40000"/>
+            </a:schemeClr>
+          </a:solidFill>
+          <a:ln w="15875" cap="flat" cmpd="sng" algn="ctr">
+            <a:solidFill>
+              <a:srgbClr val="FF0000"/>
+            </a:solidFill>
+            <a:prstDash val="solid"/>
+            <a:round/>
+            <a:headEnd type="none" w="med" len="med"/>
+            <a:tailEnd type="none" w="med" len="med"/>
+          </a:ln>
+        </p:spPr>
+        <p:txBody>
+          <a:bodyPr vert="horz" wrap="none" lIns="91440" tIns="45720" rIns="91440" bIns="45720" numCol="1" rtlCol="0" anchor="ctr" anchorCtr="0" compatLnSpc="1"/>
+          <a:lstStyle/>
+          <a:p>
+            <a:pPr marL="0" marR="0" indent="0" algn="ctr" defTabSz="914400" rtl="0" eaLnBrk="1" fontAlgn="base" latinLnBrk="0" hangingPunct="1">
+              <a:lnSpc>
+                <a:spcPct val="100000"/>
+              </a:lnSpc>
+              <a:spcBef>
+                <a:spcPct val="0"/>
+              </a:spcBef>
+              <a:spcAft>
+                <a:spcPct val="0"/>
+              </a:spcAft>
+              <a:buClrTx/>
+              <a:buSzTx/>
+              <a:buFontTx/>
+              <a:buNone/>
+            </a:pPr>
+            <a:endParaRPr kumimoji="1" lang="en-US" sz="1800" b="1" i="0" u="none" strike="noStrike" cap="none" normalizeH="0" baseline="0" dirty="0">
+              <a:ln>
+                <a:noFill/>
+              </a:ln>
+              <a:solidFill>
+                <a:schemeClr val="tx1"/>
+              </a:solidFill>
+              <a:effectLst/>
+              <a:latin typeface="Arial" panose="020B0604020202090204" pitchFamily="34" charset="0"/>
+              <a:ea typeface="新細明體" panose="02020500000000000000" pitchFamily="18" charset="-120"/>
+            </a:endParaRPr>
+          </a:p>
+          <a:p>
+            <a:pPr marL="0" marR="0" indent="0" algn="ctr" defTabSz="914400" rtl="0" eaLnBrk="1" fontAlgn="base" latinLnBrk="0" hangingPunct="1">
+              <a:lnSpc>
+                <a:spcPct val="100000"/>
+              </a:lnSpc>
+              <a:spcBef>
+                <a:spcPct val="0"/>
+              </a:spcBef>
+              <a:spcAft>
+                <a:spcPct val="0"/>
+              </a:spcAft>
+              <a:buClrTx/>
+              <a:buSzTx/>
+              <a:buFontTx/>
+              <a:buNone/>
+            </a:pPr>
+            <a:endParaRPr kumimoji="1" lang="en-US" b="1" dirty="0">
+              <a:latin typeface="Arial" panose="020B0604020202090204" pitchFamily="34" charset="0"/>
+              <a:ea typeface="新細明體" panose="02020500000000000000" pitchFamily="18" charset="-120"/>
+            </a:endParaRPr>
+          </a:p>
+          <a:p>
+            <a:pPr marL="0" marR="0" indent="0" algn="ctr" defTabSz="914400" rtl="0" eaLnBrk="1" fontAlgn="base" latinLnBrk="0" hangingPunct="1">
+              <a:lnSpc>
+                <a:spcPct val="100000"/>
+              </a:lnSpc>
+              <a:spcBef>
+                <a:spcPct val="0"/>
+              </a:spcBef>
+              <a:spcAft>
+                <a:spcPct val="0"/>
+              </a:spcAft>
+              <a:buClrTx/>
+              <a:buSzTx/>
+              <a:buFontTx/>
+              <a:buNone/>
+            </a:pPr>
+            <a:endParaRPr kumimoji="1" lang="en-US" sz="1800" b="1" i="0" u="none" strike="noStrike" cap="none" normalizeH="0" baseline="0" dirty="0">
+              <a:ln>
+                <a:noFill/>
+              </a:ln>
+              <a:solidFill>
+                <a:schemeClr val="tx1"/>
+              </a:solidFill>
+              <a:effectLst/>
+              <a:latin typeface="Arial" panose="020B0604020202090204" pitchFamily="34" charset="0"/>
+              <a:ea typeface="新細明體" panose="02020500000000000000" pitchFamily="18" charset="-120"/>
+            </a:endParaRPr>
+          </a:p>
+          <a:p>
+            <a:pPr marL="0" marR="0" indent="0" algn="ctr" defTabSz="914400" rtl="0" eaLnBrk="1" fontAlgn="base" latinLnBrk="0" hangingPunct="1">
+              <a:lnSpc>
+                <a:spcPct val="100000"/>
+              </a:lnSpc>
+              <a:spcBef>
+                <a:spcPct val="0"/>
+              </a:spcBef>
+              <a:spcAft>
+                <a:spcPct val="0"/>
+              </a:spcAft>
+              <a:buClrTx/>
+              <a:buSzTx/>
+              <a:buFontTx/>
+              <a:buNone/>
+            </a:pPr>
+            <a:endParaRPr kumimoji="1" lang="en-US" b="1" dirty="0">
+              <a:latin typeface="Arial" panose="020B0604020202090204" pitchFamily="34" charset="0"/>
+              <a:ea typeface="新細明體" panose="02020500000000000000" pitchFamily="18" charset="-120"/>
+            </a:endParaRPr>
+          </a:p>
+          <a:p>
+            <a:pPr marL="0" marR="0" indent="0" algn="ctr" defTabSz="914400" rtl="0" eaLnBrk="1" fontAlgn="base" latinLnBrk="0" hangingPunct="1">
+              <a:lnSpc>
+                <a:spcPct val="100000"/>
+              </a:lnSpc>
+              <a:spcBef>
+                <a:spcPct val="0"/>
+              </a:spcBef>
+              <a:spcAft>
+                <a:spcPct val="0"/>
+              </a:spcAft>
+              <a:buClrTx/>
+              <a:buSzTx/>
+              <a:buFontTx/>
+              <a:buNone/>
+            </a:pPr>
+            <a:endParaRPr kumimoji="1" lang="en-US" sz="1800" b="1" i="0" u="none" strike="noStrike" cap="none" normalizeH="0" baseline="0" dirty="0">
+              <a:ln>
+                <a:noFill/>
+              </a:ln>
+              <a:solidFill>
+                <a:schemeClr val="tx1"/>
+              </a:solidFill>
+              <a:effectLst/>
+              <a:latin typeface="Arial" panose="020B0604020202090204" pitchFamily="34" charset="0"/>
+              <a:ea typeface="新細明體" panose="02020500000000000000" pitchFamily="18" charset="-120"/>
+            </a:endParaRPr>
+          </a:p>
+          <a:p>
+            <a:pPr marL="0" marR="0" indent="0" algn="ctr" defTabSz="914400" rtl="0" eaLnBrk="1" fontAlgn="base" latinLnBrk="0" hangingPunct="1">
+              <a:lnSpc>
+                <a:spcPct val="100000"/>
+              </a:lnSpc>
+              <a:spcBef>
+                <a:spcPct val="0"/>
+              </a:spcBef>
+              <a:spcAft>
+                <a:spcPct val="0"/>
+              </a:spcAft>
+              <a:buClrTx/>
+              <a:buSzTx/>
+              <a:buFontTx/>
+              <a:buNone/>
+            </a:pPr>
+            <a:endParaRPr kumimoji="1" lang="en-US" b="1" dirty="0">
+              <a:latin typeface="Arial" panose="020B0604020202090204" pitchFamily="34" charset="0"/>
+              <a:ea typeface="新細明體" panose="02020500000000000000" pitchFamily="18" charset="-120"/>
+            </a:endParaRPr>
+          </a:p>
+          <a:p>
+            <a:pPr marL="0" marR="0" indent="0" algn="ctr" defTabSz="914400" rtl="0" eaLnBrk="1" fontAlgn="base" latinLnBrk="0" hangingPunct="1">
+              <a:lnSpc>
+                <a:spcPct val="100000"/>
+              </a:lnSpc>
+              <a:spcBef>
+                <a:spcPct val="0"/>
+              </a:spcBef>
+              <a:spcAft>
+                <a:spcPct val="0"/>
+              </a:spcAft>
+              <a:buClrTx/>
+              <a:buSzTx/>
+              <a:buFontTx/>
+              <a:buNone/>
+            </a:pPr>
+            <a:endParaRPr kumimoji="1" lang="en-US" sz="1800" b="1" i="0" u="none" strike="noStrike" cap="none" normalizeH="0" baseline="0" dirty="0">
+              <a:ln>
+                <a:noFill/>
+              </a:ln>
+              <a:solidFill>
+                <a:schemeClr val="tx1"/>
+              </a:solidFill>
+              <a:effectLst/>
+              <a:latin typeface="Arial" panose="020B0604020202090204" pitchFamily="34" charset="0"/>
+              <a:ea typeface="新細明體" panose="02020500000000000000" pitchFamily="18" charset="-120"/>
+            </a:endParaRPr>
+          </a:p>
+          <a:p>
+            <a:pPr marL="0" marR="0" indent="0" algn="ctr" defTabSz="914400" rtl="0" eaLnBrk="1" fontAlgn="base" latinLnBrk="0" hangingPunct="1">
+              <a:lnSpc>
+                <a:spcPct val="100000"/>
+              </a:lnSpc>
+              <a:spcBef>
+                <a:spcPct val="0"/>
+              </a:spcBef>
+              <a:spcAft>
+                <a:spcPct val="0"/>
+              </a:spcAft>
+              <a:buClrTx/>
+              <a:buSzTx/>
+              <a:buFontTx/>
+              <a:buNone/>
+            </a:pPr>
+            <a:r>
+              <a:rPr kumimoji="1" lang="en-US" b="1" dirty="0">
+                <a:latin typeface="Arial" panose="020B0604020202090204" pitchFamily="34" charset="0"/>
+                <a:ea typeface="新細明體" panose="02020500000000000000" pitchFamily="18" charset="-120"/>
+              </a:rPr>
+              <a:t>Callee</a:t>
+            </a:r>
+          </a:p>
+          <a:p>
+            <a:pPr marL="0" marR="0" indent="0" algn="ctr" defTabSz="914400" rtl="0" eaLnBrk="1" fontAlgn="base" latinLnBrk="0" hangingPunct="1">
+              <a:lnSpc>
+                <a:spcPct val="100000"/>
+              </a:lnSpc>
+              <a:spcBef>
+                <a:spcPct val="0"/>
+              </a:spcBef>
+              <a:spcAft>
+                <a:spcPct val="0"/>
+              </a:spcAft>
+              <a:buClrTx/>
+              <a:buSzTx/>
+              <a:buFontTx/>
+              <a:buNone/>
+            </a:pPr>
+            <a:r>
+              <a:rPr kumimoji="1" lang="en-US" sz="1800" b="1" i="0" u="none" strike="noStrike" cap="none" normalizeH="0" baseline="0" dirty="0">
+                <a:ln>
+                  <a:noFill/>
+                </a:ln>
+                <a:solidFill>
+                  <a:schemeClr val="tx1"/>
+                </a:solidFill>
+                <a:effectLst/>
+                <a:latin typeface="Arial" panose="020B0604020202090204" pitchFamily="34" charset="0"/>
+                <a:ea typeface="新細明體" panose="02020500000000000000" pitchFamily="18" charset="-120"/>
+              </a:rPr>
+              <a:t>save</a:t>
+            </a:r>
+          </a:p>
+        </p:txBody>
+      </p:sp>
+      <p:sp>
+        <p:nvSpPr>
+          <p:cNvPr id="16" name="Rectangle 15">
+            <a:extLst>
+              <a:ext uri="{FF2B5EF4-FFF2-40B4-BE49-F238E27FC236}">
+                <a16:creationId xmlns:a16="http://schemas.microsoft.com/office/drawing/2014/main" id="{6CBF37F3-0D85-480E-8D31-DE3F1760A750}"/>
+              </a:ext>
+            </a:extLst>
+          </p:cNvPr>
+          <p:cNvSpPr/>
+          <p:nvPr/>
+        </p:nvSpPr>
+        <p:spPr bwMode="auto">
+          <a:xfrm>
+            <a:off x="6966857" y="1124857"/>
+            <a:ext cx="1057737" cy="1618343"/>
+          </a:xfrm>
+          <a:prstGeom prst="rect">
+            <a:avLst/>
+          </a:prstGeom>
+          <a:solidFill>
+            <a:schemeClr val="accent2"/>
+          </a:solidFill>
+          <a:ln w="15875" cap="flat" cmpd="sng" algn="ctr">
+            <a:solidFill>
+              <a:srgbClr val="FF0000"/>
+            </a:solidFill>
+            <a:prstDash val="solid"/>
+            <a:round/>
+            <a:headEnd type="none" w="med" len="med"/>
+            <a:tailEnd type="none" w="med" len="med"/>
+          </a:ln>
+        </p:spPr>
+        <p:txBody>
+          <a:bodyPr vert="horz" wrap="none" lIns="91440" tIns="45720" rIns="91440" bIns="45720" numCol="1" rtlCol="0" anchor="ctr" anchorCtr="0" compatLnSpc="1"/>
+          <a:lstStyle/>
+          <a:p>
+            <a:pPr marL="0" marR="0" indent="0" algn="ctr" defTabSz="914400" rtl="0" eaLnBrk="1" fontAlgn="base" latinLnBrk="0" hangingPunct="1">
+              <a:lnSpc>
+                <a:spcPct val="100000"/>
+              </a:lnSpc>
+              <a:spcBef>
+                <a:spcPct val="0"/>
+              </a:spcBef>
+              <a:spcAft>
+                <a:spcPct val="0"/>
+              </a:spcAft>
+              <a:buClrTx/>
+              <a:buSzTx/>
+              <a:buFontTx/>
+              <a:buNone/>
+            </a:pPr>
+            <a:r>
+              <a:rPr kumimoji="1" lang="en-US" sz="1800" b="1" i="0" u="none" strike="noStrike" cap="none" normalizeH="0" baseline="0" dirty="0">
+                <a:ln>
+                  <a:noFill/>
+                </a:ln>
+                <a:solidFill>
+                  <a:schemeClr val="tx1"/>
+                </a:solidFill>
+                <a:effectLst/>
+                <a:latin typeface="Arial" panose="020B0604020202090204" pitchFamily="34" charset="0"/>
+                <a:ea typeface="新細明體" panose="02020500000000000000" pitchFamily="18" charset="-120"/>
+              </a:rPr>
+              <a:t>Caller </a:t>
+            </a:r>
+          </a:p>
+          <a:p>
+            <a:pPr marL="0" marR="0" indent="0" algn="ctr" defTabSz="914400" rtl="0" eaLnBrk="1" fontAlgn="base" latinLnBrk="0" hangingPunct="1">
+              <a:lnSpc>
+                <a:spcPct val="100000"/>
+              </a:lnSpc>
+              <a:spcBef>
+                <a:spcPct val="0"/>
+              </a:spcBef>
+              <a:spcAft>
+                <a:spcPct val="0"/>
+              </a:spcAft>
+              <a:buClrTx/>
+              <a:buSzTx/>
+              <a:buFontTx/>
+              <a:buNone/>
+            </a:pPr>
+            <a:r>
+              <a:rPr kumimoji="1" lang="en-US" sz="1800" b="1" i="0" u="none" strike="noStrike" cap="none" normalizeH="0" baseline="0" dirty="0">
+                <a:ln>
+                  <a:noFill/>
+                </a:ln>
+                <a:solidFill>
+                  <a:schemeClr val="tx1"/>
+                </a:solidFill>
+                <a:effectLst/>
+                <a:latin typeface="Arial" panose="020B0604020202090204" pitchFamily="34" charset="0"/>
+                <a:ea typeface="新細明體" panose="02020500000000000000" pitchFamily="18" charset="-120"/>
+              </a:rPr>
+              <a:t>save</a:t>
+            </a:r>
+          </a:p>
+        </p:txBody>
+      </p:sp>
+    </p:spTree>
+    <p:extLst>
+      <p:ext uri="{BB962C8B-B14F-4D97-AF65-F5344CB8AC3E}">
+        <p14:creationId xmlns:p14="http://schemas.microsoft.com/office/powerpoint/2010/main" val="1968842813"/>
+      </p:ext>
+    </p:extLst>
+  </p:cSld>
+  <p:clrMapOvr>
+    <a:masterClrMapping/>
+  </p:clrMapOvr>
+</p:sld>
+</file>
+
+<file path=ppt/slides/slide14.xml><?xml version="1.0" encoding="utf-8"?>
+<p:sld xmlns:a="http://schemas.openxmlformats.org/drawingml/2006/main" xmlns:r="http://schemas.openxmlformats.org/officeDocument/2006/relationships" xmlns:p="http://schemas.openxmlformats.org/presentationml/2006/main">
+  <p:cSld>
+    <p:spTree>
+      <p:nvGrpSpPr>
+        <p:cNvPr id="1" name=""/>
+        <p:cNvGrpSpPr/>
+        <p:nvPr/>
+      </p:nvGrpSpPr>
+      <p:grpSpPr>
+        <a:xfrm>
+          <a:off x="0" y="0"/>
+          <a:ext cx="0" cy="0"/>
+          <a:chOff x="0" y="0"/>
+          <a:chExt cx="0" cy="0"/>
+        </a:xfrm>
+      </p:grpSpPr>
+      <p:sp>
+        <p:nvSpPr>
+          <p:cNvPr id="3075" name="Footer Placeholder 4">
+            <a:extLst>
+              <a:ext uri="{FF2B5EF4-FFF2-40B4-BE49-F238E27FC236}">
+                <a16:creationId xmlns:a16="http://schemas.microsoft.com/office/drawing/2014/main" id="{D12C66DE-6F35-4816-939F-B53C2F9EFAE8}"/>
+              </a:ext>
+            </a:extLst>
+          </p:cNvPr>
+          <p:cNvSpPr>
+            <a:spLocks noGrp="1"/>
+          </p:cNvSpPr>
+          <p:nvPr>
+            <p:ph type="ftr" sz="quarter" idx="4294967295"/>
+          </p:nvPr>
+        </p:nvSpPr>
+        <p:spPr bwMode="auto">
+          <a:xfrm>
+            <a:off x="1676400" y="6477000"/>
+            <a:ext cx="6172200" cy="304800"/>
+          </a:xfrm>
+          <a:prstGeom prst="rect">
+            <a:avLst/>
+          </a:prstGeom>
+          <a:noFill/>
+          <a:ln w="9525">
+            <a:noFill/>
+            <a:miter lim="800000"/>
+            <a:headEnd/>
+            <a:tailEnd/>
+          </a:ln>
+          <a:effectLst/>
+          <a:extLst>
+            <a:ext uri="{909E8E84-426E-40DD-AFC4-6F175D3DCCD1}">
+              <a14:hiddenFill xmlns:a14="http://schemas.microsoft.com/office/drawing/2010/main">
+                <a:solidFill>
+                  <a:srgbClr val="FFFFFF"/>
+                </a:solidFill>
+              </a14:hiddenFill>
+            </a:ext>
+            <a:ext uri="{91240B29-F687-4F45-9708-019B960494DF}">
+              <a14:hiddenLine xmlns:a14="http://schemas.microsoft.com/office/drawing/2010/main" w="9525">
+                <a:solidFill>
+                  <a:srgbClr val="000000"/>
+                </a:solidFill>
+                <a:miter lim="800000"/>
+                <a:headEnd/>
+                <a:tailEnd/>
+              </a14:hiddenLine>
+            </a:ext>
+          </a:extLst>
+        </p:spPr>
+        <p:txBody>
+          <a:bodyPr vert="horz" wrap="square" lIns="91440" tIns="45720" rIns="91440" bIns="45720" numCol="1" anchor="b" anchorCtr="0" compatLnSpc="1">
+            <a:prstTxWarp prst="textNoShape">
+              <a:avLst/>
+            </a:prstTxWarp>
+          </a:bodyPr>
+          <a:lstStyle>
+            <a:defPPr>
+              <a:defRPr lang="en-US"/>
+            </a:defPPr>
+            <a:lvl1pPr algn="ctr" rtl="0" eaLnBrk="1" fontAlgn="base" hangingPunct="1">
+              <a:spcBef>
+                <a:spcPct val="0"/>
+              </a:spcBef>
+              <a:spcAft>
+                <a:spcPct val="0"/>
+              </a:spcAft>
+              <a:defRPr sz="1400" kern="1200">
+                <a:solidFill>
+                  <a:schemeClr val="tx1"/>
+                </a:solidFill>
+                <a:effectLst>
+                  <a:outerShdw blurRad="38100" dist="38100" dir="2700000" algn="tl">
+                    <a:srgbClr val="000000"/>
+                  </a:outerShdw>
+                </a:effectLst>
+                <a:latin typeface="Arial" charset="0"/>
+                <a:ea typeface="新細明體" pitchFamily="18" charset="-120"/>
+                <a:cs typeface="+mn-cs"/>
+              </a:defRPr>
+            </a:lvl1pPr>
+            <a:lvl2pPr marL="457200" algn="l" rtl="0" eaLnBrk="0" fontAlgn="base" hangingPunct="0">
+              <a:spcBef>
+                <a:spcPct val="0"/>
+              </a:spcBef>
+              <a:spcAft>
+                <a:spcPct val="0"/>
+              </a:spcAft>
+              <a:defRPr kern="1200">
+                <a:solidFill>
+                  <a:schemeClr val="tx1"/>
+                </a:solidFill>
+                <a:latin typeface="Arial" panose="020B0604020202020204" pitchFamily="34" charset="0"/>
+                <a:ea typeface="+mn-ea"/>
+                <a:cs typeface="+mn-cs"/>
+              </a:defRPr>
+            </a:lvl2pPr>
+            <a:lvl3pPr marL="914400" algn="l" rtl="0" eaLnBrk="0" fontAlgn="base" hangingPunct="0">
+              <a:spcBef>
+                <a:spcPct val="0"/>
+              </a:spcBef>
+              <a:spcAft>
+                <a:spcPct val="0"/>
+              </a:spcAft>
+              <a:defRPr kern="1200">
+                <a:solidFill>
+                  <a:schemeClr val="tx1"/>
+                </a:solidFill>
+                <a:latin typeface="Arial" panose="020B0604020202020204" pitchFamily="34" charset="0"/>
+                <a:ea typeface="+mn-ea"/>
+                <a:cs typeface="+mn-cs"/>
+              </a:defRPr>
+            </a:lvl3pPr>
+            <a:lvl4pPr marL="1371600" algn="l" rtl="0" eaLnBrk="0" fontAlgn="base" hangingPunct="0">
+              <a:spcBef>
+                <a:spcPct val="0"/>
+              </a:spcBef>
+              <a:spcAft>
+                <a:spcPct val="0"/>
+              </a:spcAft>
+              <a:defRPr kern="1200">
+                <a:solidFill>
+                  <a:schemeClr val="tx1"/>
+                </a:solidFill>
+                <a:latin typeface="Arial" panose="020B0604020202020204" pitchFamily="34" charset="0"/>
+                <a:ea typeface="+mn-ea"/>
+                <a:cs typeface="+mn-cs"/>
+              </a:defRPr>
+            </a:lvl4pPr>
+            <a:lvl5pPr marL="1828800" algn="l" rtl="0" eaLnBrk="0" fontAlgn="base" hangingPunct="0">
+              <a:spcBef>
+                <a:spcPct val="0"/>
+              </a:spcBef>
+              <a:spcAft>
+                <a:spcPct val="0"/>
+              </a:spcAft>
+              <a:defRPr kern="1200">
+                <a:solidFill>
+                  <a:schemeClr val="tx1"/>
+                </a:solidFill>
+                <a:latin typeface="Arial" panose="020B0604020202020204" pitchFamily="34" charset="0"/>
+                <a:ea typeface="+mn-ea"/>
+                <a:cs typeface="+mn-cs"/>
+              </a:defRPr>
+            </a:lvl5pPr>
+            <a:lvl6pPr marL="2286000" algn="l" defTabSz="914400" rtl="0" eaLnBrk="1" latinLnBrk="0" hangingPunct="1">
+              <a:defRPr kern="1200">
+                <a:solidFill>
+                  <a:schemeClr val="tx1"/>
+                </a:solidFill>
+                <a:latin typeface="Arial" panose="020B0604020202020204" pitchFamily="34" charset="0"/>
+                <a:ea typeface="+mn-ea"/>
+                <a:cs typeface="+mn-cs"/>
+              </a:defRPr>
+            </a:lvl6pPr>
+            <a:lvl7pPr marL="2743200" algn="l" defTabSz="914400" rtl="0" eaLnBrk="1" latinLnBrk="0" hangingPunct="1">
+              <a:defRPr kern="1200">
+                <a:solidFill>
+                  <a:schemeClr val="tx1"/>
+                </a:solidFill>
+                <a:latin typeface="Arial" panose="020B0604020202020204" pitchFamily="34" charset="0"/>
+                <a:ea typeface="+mn-ea"/>
+                <a:cs typeface="+mn-cs"/>
+              </a:defRPr>
+            </a:lvl7pPr>
+            <a:lvl8pPr marL="3200400" algn="l" defTabSz="914400" rtl="0" eaLnBrk="1" latinLnBrk="0" hangingPunct="1">
+              <a:defRPr kern="1200">
+                <a:solidFill>
+                  <a:schemeClr val="tx1"/>
+                </a:solidFill>
+                <a:latin typeface="Arial" panose="020B0604020202020204" pitchFamily="34" charset="0"/>
+                <a:ea typeface="+mn-ea"/>
+                <a:cs typeface="+mn-cs"/>
+              </a:defRPr>
+            </a:lvl8pPr>
+            <a:lvl9pPr marL="3657600" algn="l" defTabSz="914400" rtl="0" eaLnBrk="1" latinLnBrk="0" hangingPunct="1">
+              <a:defRPr kern="1200">
+                <a:solidFill>
+                  <a:schemeClr val="tx1"/>
+                </a:solidFill>
+                <a:latin typeface="Arial" panose="020B0604020202020204" pitchFamily="34" charset="0"/>
+                <a:ea typeface="+mn-ea"/>
+                <a:cs typeface="+mn-cs"/>
+              </a:defRPr>
+            </a:lvl9pPr>
+          </a:lstStyle>
+          <a:p>
+            <a:pPr eaLnBrk="1" hangingPunct="1">
+              <a:defRPr/>
+            </a:pPr>
+            <a:r>
+              <a:rPr lang="en-US" altLang="zh-TW"/>
+              <a:t>Department of Computer Science and Engineering</a:t>
+            </a:r>
+            <a:endParaRPr lang="en-US" altLang="zh-TW">
+              <a:ea typeface="新細明體" charset="-120"/>
+            </a:endParaRPr>
+          </a:p>
+        </p:txBody>
+      </p:sp>
+      <p:sp>
+        <p:nvSpPr>
+          <p:cNvPr id="3076" name="Slide Number Placeholder 5">
+            <a:extLst>
+              <a:ext uri="{FF2B5EF4-FFF2-40B4-BE49-F238E27FC236}">
+                <a16:creationId xmlns:a16="http://schemas.microsoft.com/office/drawing/2014/main" id="{34AE673E-3D97-4A0A-8121-1E6D4C9DD50A}"/>
+              </a:ext>
+            </a:extLst>
+          </p:cNvPr>
+          <p:cNvSpPr>
+            <a:spLocks noGrp="1"/>
+          </p:cNvSpPr>
+          <p:nvPr>
+            <p:ph type="sldNum" sz="quarter" idx="4294967295"/>
+          </p:nvPr>
+        </p:nvSpPr>
+        <p:spPr>
+          <a:xfrm>
+            <a:off x="6057900" y="4683919"/>
+            <a:ext cx="1600200" cy="357188"/>
+          </a:xfrm>
+          <a:prstGeom prst="rect">
+            <a:avLst/>
+          </a:prstGeom>
+          <a:extLst>
+            <a:ext uri="{909E8E84-426E-40DD-AFC4-6F175D3DCCD1}">
+              <a14:hiddenFill xmlns:a14="http://schemas.microsoft.com/office/drawing/2010/main">
+                <a:solidFill>
+                  <a:srgbClr val="FFFFFF"/>
+                </a:solidFill>
+              </a14:hiddenFill>
+            </a:ext>
+            <a:ext uri="{91240B29-F687-4F45-9708-019B960494DF}">
+              <a14:hiddenLine xmlns:a14="http://schemas.microsoft.com/office/drawing/2010/main" w="9525">
+                <a:solidFill>
+                  <a:srgbClr val="000000"/>
+                </a:solidFill>
+                <a:miter lim="800000"/>
+                <a:headEnd/>
+                <a:tailEnd/>
+              </a14:hiddenLine>
+            </a:ext>
+          </a:extLst>
+        </p:spPr>
+        <p:txBody>
+          <a:bodyPr/>
+          <a:lstStyle>
+            <a:lvl1pPr>
+              <a:spcBef>
+                <a:spcPct val="20000"/>
+              </a:spcBef>
+              <a:buClr>
+                <a:schemeClr val="hlink"/>
+              </a:buClr>
+              <a:buSzPct val="90000"/>
+              <a:buFont typeface="Wingdings" panose="05000000000000000000" pitchFamily="2" charset="2"/>
+              <a:buBlip>
+                <a:blip r:embed="rId2"/>
+              </a:buBlip>
+              <a:defRPr sz="2400">
+                <a:solidFill>
+                  <a:schemeClr val="tx1"/>
+                </a:solidFill>
+                <a:latin typeface="Arial" panose="020B0604020202020204" pitchFamily="34" charset="0"/>
+              </a:defRPr>
+            </a:lvl1pPr>
+            <a:lvl2pPr marL="557213" indent="-214313">
+              <a:spcBef>
+                <a:spcPct val="20000"/>
+              </a:spcBef>
+              <a:buChar char="–"/>
+              <a:defRPr sz="2100">
+                <a:solidFill>
+                  <a:schemeClr val="tx1"/>
+                </a:solidFill>
+                <a:latin typeface="Arial" panose="020B0604020202020204" pitchFamily="34" charset="0"/>
+              </a:defRPr>
+            </a:lvl2pPr>
+            <a:lvl3pPr marL="857250" indent="-171450">
+              <a:spcBef>
+                <a:spcPct val="20000"/>
+              </a:spcBef>
+              <a:buClr>
+                <a:schemeClr val="accent2"/>
+              </a:buClr>
+              <a:buSzPct val="90000"/>
+              <a:buFont typeface="Wingdings" panose="05000000000000000000" pitchFamily="2" charset="2"/>
+              <a:buBlip>
+                <a:blip r:embed="rId3"/>
+              </a:buBlip>
+              <a:defRPr sz="1800">
+                <a:solidFill>
+                  <a:schemeClr val="tx1"/>
+                </a:solidFill>
+                <a:latin typeface="Arial" panose="020B0604020202020204" pitchFamily="34" charset="0"/>
+              </a:defRPr>
+            </a:lvl3pPr>
+            <a:lvl4pPr marL="1200150" indent="-171450">
+              <a:spcBef>
+                <a:spcPct val="20000"/>
+              </a:spcBef>
+              <a:buChar char="–"/>
+              <a:defRPr sz="1500">
+                <a:solidFill>
+                  <a:schemeClr val="tx1"/>
+                </a:solidFill>
+                <a:latin typeface="Arial" panose="020B0604020202020204" pitchFamily="34" charset="0"/>
+              </a:defRPr>
+            </a:lvl4pPr>
+            <a:lvl5pPr marL="1543050" indent="-171450">
+              <a:spcBef>
+                <a:spcPct val="20000"/>
+              </a:spcBef>
+              <a:buClr>
+                <a:schemeClr val="folHlink"/>
+              </a:buClr>
+              <a:buSzPct val="90000"/>
+              <a:buFont typeface="Wingdings" panose="05000000000000000000" pitchFamily="2" charset="2"/>
+              <a:buBlip>
+                <a:blip r:embed="rId4"/>
+              </a:buBlip>
+              <a:defRPr sz="1500">
+                <a:solidFill>
+                  <a:schemeClr val="tx1"/>
+                </a:solidFill>
+                <a:latin typeface="Arial" panose="020B0604020202020204" pitchFamily="34" charset="0"/>
+              </a:defRPr>
+            </a:lvl5pPr>
+            <a:lvl6pPr marL="1885950" indent="-171450" eaLnBrk="0" fontAlgn="base" hangingPunct="0">
+              <a:spcBef>
+                <a:spcPct val="20000"/>
+              </a:spcBef>
+              <a:spcAft>
+                <a:spcPct val="0"/>
+              </a:spcAft>
+              <a:buClr>
+                <a:schemeClr val="folHlink"/>
+              </a:buClr>
+              <a:buSzPct val="90000"/>
+              <a:buFont typeface="Wingdings" panose="05000000000000000000" pitchFamily="2" charset="2"/>
+              <a:buBlip>
+                <a:blip r:embed="rId4"/>
+              </a:buBlip>
+              <a:defRPr sz="1500">
+                <a:solidFill>
+                  <a:schemeClr val="tx1"/>
+                </a:solidFill>
+                <a:latin typeface="Arial" panose="020B0604020202020204" pitchFamily="34" charset="0"/>
+              </a:defRPr>
+            </a:lvl6pPr>
+            <a:lvl7pPr marL="2228850" indent="-171450" eaLnBrk="0" fontAlgn="base" hangingPunct="0">
+              <a:spcBef>
+                <a:spcPct val="20000"/>
+              </a:spcBef>
+              <a:spcAft>
+                <a:spcPct val="0"/>
+              </a:spcAft>
+              <a:buClr>
+                <a:schemeClr val="folHlink"/>
+              </a:buClr>
+              <a:buSzPct val="90000"/>
+              <a:buFont typeface="Wingdings" panose="05000000000000000000" pitchFamily="2" charset="2"/>
+              <a:buBlip>
+                <a:blip r:embed="rId4"/>
+              </a:buBlip>
+              <a:defRPr sz="1500">
+                <a:solidFill>
+                  <a:schemeClr val="tx1"/>
+                </a:solidFill>
+                <a:latin typeface="Arial" panose="020B0604020202020204" pitchFamily="34" charset="0"/>
+              </a:defRPr>
+            </a:lvl7pPr>
+            <a:lvl8pPr marL="2571750" indent="-171450" eaLnBrk="0" fontAlgn="base" hangingPunct="0">
+              <a:spcBef>
+                <a:spcPct val="20000"/>
+              </a:spcBef>
+              <a:spcAft>
+                <a:spcPct val="0"/>
+              </a:spcAft>
+              <a:buClr>
+                <a:schemeClr val="folHlink"/>
+              </a:buClr>
+              <a:buSzPct val="90000"/>
+              <a:buFont typeface="Wingdings" panose="05000000000000000000" pitchFamily="2" charset="2"/>
+              <a:buBlip>
+                <a:blip r:embed="rId4"/>
+              </a:buBlip>
+              <a:defRPr sz="1500">
+                <a:solidFill>
+                  <a:schemeClr val="tx1"/>
+                </a:solidFill>
+                <a:latin typeface="Arial" panose="020B0604020202020204" pitchFamily="34" charset="0"/>
+              </a:defRPr>
+            </a:lvl8pPr>
+            <a:lvl9pPr marL="2914650" indent="-171450" eaLnBrk="0" fontAlgn="base" hangingPunct="0">
+              <a:spcBef>
+                <a:spcPct val="20000"/>
+              </a:spcBef>
+              <a:spcAft>
+                <a:spcPct val="0"/>
+              </a:spcAft>
+              <a:buClr>
+                <a:schemeClr val="folHlink"/>
+              </a:buClr>
+              <a:buSzPct val="90000"/>
+              <a:buFont typeface="Wingdings" panose="05000000000000000000" pitchFamily="2" charset="2"/>
+              <a:buBlip>
+                <a:blip r:embed="rId4"/>
+              </a:buBlip>
+              <a:defRPr sz="1500">
+                <a:solidFill>
+                  <a:schemeClr val="tx1"/>
+                </a:solidFill>
+                <a:latin typeface="Arial" panose="020B0604020202020204" pitchFamily="34" charset="0"/>
+              </a:defRPr>
+            </a:lvl9pPr>
+          </a:lstStyle>
+          <a:p>
+            <a:pPr>
+              <a:spcBef>
+                <a:spcPct val="0"/>
+              </a:spcBef>
+              <a:buClrTx/>
+              <a:buSzTx/>
+              <a:buFontTx/>
+              <a:buNone/>
+            </a:pPr>
+            <a:fld id="{8D033347-7621-4281-A9AF-3DA591D36C6E}" type="slidenum">
+              <a:rPr lang="zh-TW" altLang="en-US" sz="900"/>
+              <a:pPr>
+                <a:spcBef>
+                  <a:spcPct val="0"/>
+                </a:spcBef>
+                <a:buClrTx/>
+                <a:buSzTx/>
+                <a:buFontTx/>
+                <a:buNone/>
+              </a:pPr>
+              <a:t>14</a:t>
+            </a:fld>
+            <a:endParaRPr lang="en-US" altLang="zh-TW" sz="900"/>
+          </a:p>
+        </p:txBody>
+      </p:sp>
+      <p:sp>
+        <p:nvSpPr>
+          <p:cNvPr id="5" name="Rectangle 2">
+            <a:extLst>
+              <a:ext uri="{FF2B5EF4-FFF2-40B4-BE49-F238E27FC236}">
+                <a16:creationId xmlns:a16="http://schemas.microsoft.com/office/drawing/2014/main" id="{28218223-0F65-47BD-9D1A-4016E9CC2AC7}"/>
+              </a:ext>
+            </a:extLst>
+          </p:cNvPr>
+          <p:cNvSpPr txBox="1">
+            <a:spLocks noChangeArrowheads="1"/>
+          </p:cNvSpPr>
+          <p:nvPr/>
+        </p:nvSpPr>
+        <p:spPr bwMode="auto">
+          <a:xfrm>
+            <a:off x="965200" y="0"/>
+            <a:ext cx="6400800" cy="685800"/>
+          </a:xfrm>
+          <a:prstGeom prst="rect">
+            <a:avLst/>
+          </a:prstGeom>
+          <a:noFill/>
+          <a:ln w="9525">
+            <a:noFill/>
+            <a:miter lim="800000"/>
+            <a:headEnd/>
+            <a:tailEnd/>
+          </a:ln>
+          <a:effectLst/>
+        </p:spPr>
+        <p:txBody>
+          <a:bodyPr anchor="ctr"/>
+          <a:lstStyle>
+            <a:lvl1pPr algn="ctr" rtl="0" eaLnBrk="0" fontAlgn="base" hangingPunct="0">
+              <a:spcBef>
+                <a:spcPct val="0"/>
+              </a:spcBef>
+              <a:spcAft>
+                <a:spcPct val="0"/>
+              </a:spcAft>
+              <a:defRPr sz="4400">
+                <a:solidFill>
+                  <a:schemeClr val="tx2"/>
+                </a:solidFill>
+                <a:effectLst>
+                  <a:outerShdw blurRad="38100" dist="38100" dir="2700000" algn="tl">
+                    <a:srgbClr val="000000"/>
+                  </a:outerShdw>
+                </a:effectLst>
+                <a:latin typeface="+mj-lt"/>
+                <a:ea typeface="+mj-ea"/>
+                <a:cs typeface="+mj-cs"/>
+              </a:defRPr>
+            </a:lvl1pPr>
+            <a:lvl2pPr algn="ctr" rtl="0" eaLnBrk="0" fontAlgn="base" hangingPunct="0">
+              <a:spcBef>
+                <a:spcPct val="0"/>
+              </a:spcBef>
+              <a:spcAft>
+                <a:spcPct val="0"/>
+              </a:spcAft>
+              <a:defRPr sz="4400">
+                <a:solidFill>
+                  <a:schemeClr val="tx2"/>
+                </a:solidFill>
+                <a:effectLst>
+                  <a:outerShdw blurRad="38100" dist="38100" dir="2700000" algn="tl">
+                    <a:srgbClr val="000000"/>
+                  </a:outerShdw>
+                </a:effectLst>
+                <a:latin typeface="Arial" charset="0"/>
+              </a:defRPr>
+            </a:lvl2pPr>
+            <a:lvl3pPr algn="ctr" rtl="0" eaLnBrk="0" fontAlgn="base" hangingPunct="0">
+              <a:spcBef>
+                <a:spcPct val="0"/>
+              </a:spcBef>
+              <a:spcAft>
+                <a:spcPct val="0"/>
+              </a:spcAft>
+              <a:defRPr sz="4400">
+                <a:solidFill>
+                  <a:schemeClr val="tx2"/>
+                </a:solidFill>
+                <a:effectLst>
+                  <a:outerShdw blurRad="38100" dist="38100" dir="2700000" algn="tl">
+                    <a:srgbClr val="000000"/>
+                  </a:outerShdw>
+                </a:effectLst>
+                <a:latin typeface="Arial" charset="0"/>
+              </a:defRPr>
+            </a:lvl3pPr>
+            <a:lvl4pPr algn="ctr" rtl="0" eaLnBrk="0" fontAlgn="base" hangingPunct="0">
+              <a:spcBef>
+                <a:spcPct val="0"/>
+              </a:spcBef>
+              <a:spcAft>
+                <a:spcPct val="0"/>
+              </a:spcAft>
+              <a:defRPr sz="4400">
+                <a:solidFill>
+                  <a:schemeClr val="tx2"/>
+                </a:solidFill>
+                <a:effectLst>
+                  <a:outerShdw blurRad="38100" dist="38100" dir="2700000" algn="tl">
+                    <a:srgbClr val="000000"/>
+                  </a:outerShdw>
+                </a:effectLst>
+                <a:latin typeface="Arial" charset="0"/>
+              </a:defRPr>
+            </a:lvl4pPr>
+            <a:lvl5pPr algn="ctr" rtl="0" eaLnBrk="0" fontAlgn="base" hangingPunct="0">
+              <a:spcBef>
+                <a:spcPct val="0"/>
+              </a:spcBef>
+              <a:spcAft>
+                <a:spcPct val="0"/>
+              </a:spcAft>
+              <a:defRPr sz="4400">
+                <a:solidFill>
+                  <a:schemeClr val="tx2"/>
+                </a:solidFill>
+                <a:effectLst>
+                  <a:outerShdw blurRad="38100" dist="38100" dir="2700000" algn="tl">
+                    <a:srgbClr val="000000"/>
+                  </a:outerShdw>
+                </a:effectLst>
+                <a:latin typeface="Arial" charset="0"/>
+              </a:defRPr>
+            </a:lvl5pPr>
+            <a:lvl6pPr marL="457200" algn="ctr" rtl="0" fontAlgn="base">
+              <a:spcBef>
+                <a:spcPct val="0"/>
+              </a:spcBef>
+              <a:spcAft>
+                <a:spcPct val="0"/>
+              </a:spcAft>
+              <a:defRPr sz="4400">
+                <a:solidFill>
+                  <a:schemeClr val="tx2"/>
+                </a:solidFill>
+                <a:effectLst>
+                  <a:outerShdw blurRad="38100" dist="38100" dir="2700000" algn="tl">
+                    <a:srgbClr val="000000"/>
+                  </a:outerShdw>
+                </a:effectLst>
+                <a:latin typeface="Arial" charset="0"/>
+              </a:defRPr>
+            </a:lvl6pPr>
+            <a:lvl7pPr marL="914400" algn="ctr" rtl="0" fontAlgn="base">
+              <a:spcBef>
+                <a:spcPct val="0"/>
+              </a:spcBef>
+              <a:spcAft>
+                <a:spcPct val="0"/>
+              </a:spcAft>
+              <a:defRPr sz="4400">
+                <a:solidFill>
+                  <a:schemeClr val="tx2"/>
+                </a:solidFill>
+                <a:effectLst>
+                  <a:outerShdw blurRad="38100" dist="38100" dir="2700000" algn="tl">
+                    <a:srgbClr val="000000"/>
+                  </a:outerShdw>
+                </a:effectLst>
+                <a:latin typeface="Arial" charset="0"/>
+              </a:defRPr>
+            </a:lvl7pPr>
+            <a:lvl8pPr marL="1371600" algn="ctr" rtl="0" fontAlgn="base">
+              <a:spcBef>
+                <a:spcPct val="0"/>
+              </a:spcBef>
+              <a:spcAft>
+                <a:spcPct val="0"/>
+              </a:spcAft>
+              <a:defRPr sz="4400">
+                <a:solidFill>
+                  <a:schemeClr val="tx2"/>
+                </a:solidFill>
+                <a:effectLst>
+                  <a:outerShdw blurRad="38100" dist="38100" dir="2700000" algn="tl">
+                    <a:srgbClr val="000000"/>
+                  </a:outerShdw>
+                </a:effectLst>
+                <a:latin typeface="Arial" charset="0"/>
+              </a:defRPr>
+            </a:lvl8pPr>
+            <a:lvl9pPr marL="1828800" algn="ctr" rtl="0" fontAlgn="base">
+              <a:spcBef>
+                <a:spcPct val="0"/>
+              </a:spcBef>
+              <a:spcAft>
+                <a:spcPct val="0"/>
+              </a:spcAft>
+              <a:defRPr sz="4400">
+                <a:solidFill>
+                  <a:schemeClr val="tx2"/>
+                </a:solidFill>
+                <a:effectLst>
+                  <a:outerShdw blurRad="38100" dist="38100" dir="2700000" algn="tl">
+                    <a:srgbClr val="000000"/>
+                  </a:outerShdw>
+                </a:effectLst>
+                <a:latin typeface="Arial" charset="0"/>
+              </a:defRPr>
+            </a:lvl9pPr>
+          </a:lstStyle>
+          <a:p>
+            <a:pPr eaLnBrk="1" hangingPunct="1">
+              <a:defRPr/>
+            </a:pPr>
+            <a:r>
+              <a:rPr lang="en-US" altLang="zh-TW" sz="3300" dirty="0">
+                <a:effectLst/>
+                <a:ea typeface="新細明體" pitchFamily="18" charset="-120"/>
+              </a:rPr>
               <a:t>Real World</a:t>
             </a:r>
           </a:p>
@@ -8992,7 +10263,7 @@
 </p:sld>
 </file>
 
-<file path=ppt/slides/slide14.xml><?xml version="1.0" encoding="utf-8"?>
+<file path=ppt/slides/slide15.xml><?xml version="1.0" encoding="utf-8"?>
 <p:sld xmlns:a="http://schemas.openxmlformats.org/drawingml/2006/main" xmlns:r="http://schemas.openxmlformats.org/officeDocument/2006/relationships" xmlns:p="http://schemas.openxmlformats.org/presentationml/2006/main">
   <p:cSld>
     <p:spTree>
@@ -9449,7 +10720,7 @@
                 <a:buFontTx/>
                 <a:buNone/>
               </a:pPr>
-              <a:t>14</a:t>
+              <a:t>15</a:t>
             </a:fld>
             <a:endParaRPr lang="en-US" altLang="zh-TW" sz="900"/>
           </a:p>
@@ -10609,7 +11880,7 @@
 </p:sld>
 </file>
 
-<file path=ppt/slides/slide15.xml><?xml version="1.0" encoding="utf-8"?>
+<file path=ppt/slides/slide16.xml><?xml version="1.0" encoding="utf-8"?>
 <p:sld xmlns:a="http://schemas.openxmlformats.org/drawingml/2006/main" xmlns:r="http://schemas.openxmlformats.org/officeDocument/2006/relationships" xmlns:p="http://schemas.openxmlformats.org/presentationml/2006/main">
   <p:cSld>
     <p:spTree>
@@ -11066,7 +12337,7 @@
                 <a:buFontTx/>
                 <a:buNone/>
               </a:pPr>
-              <a:t>15</a:t>
+              <a:t>16</a:t>
             </a:fld>
             <a:endParaRPr lang="en-US" altLang="zh-TW" sz="900"/>
           </a:p>
@@ -11879,7 +13150,7 @@
 </p:sld>
 </file>
 
-<file path=ppt/slides/slide16.xml><?xml version="1.0" encoding="utf-8"?>
+<file path=ppt/slides/slide17.xml><?xml version="1.0" encoding="utf-8"?>
 <p:sld xmlns:a="http://schemas.openxmlformats.org/drawingml/2006/main" xmlns:r="http://schemas.openxmlformats.org/officeDocument/2006/relationships" xmlns:p="http://schemas.openxmlformats.org/presentationml/2006/main">
   <p:cSld>
     <p:spTree>
@@ -12336,7 +13607,7 @@
                 <a:buFontTx/>
                 <a:buNone/>
               </a:pPr>
-              <a:t>16</a:t>
+              <a:t>17</a:t>
             </a:fld>
             <a:endParaRPr lang="en-US" altLang="zh-TW" sz="900"/>
           </a:p>
@@ -13174,7 +14445,7 @@
 </p:sld>
 </file>
 
-<file path=ppt/slides/slide17.xml><?xml version="1.0" encoding="utf-8"?>
+<file path=ppt/slides/slide18.xml><?xml version="1.0" encoding="utf-8"?>
 <p:sld xmlns:a="http://schemas.openxmlformats.org/drawingml/2006/main" xmlns:r="http://schemas.openxmlformats.org/officeDocument/2006/relationships" xmlns:p="http://schemas.openxmlformats.org/presentationml/2006/main">
   <p:cSld>
     <p:spTree>
@@ -13631,7 +14902,7 @@
                 <a:buFontTx/>
                 <a:buNone/>
               </a:pPr>
-              <a:t>17</a:t>
+              <a:t>18</a:t>
             </a:fld>
             <a:endParaRPr lang="en-US" altLang="zh-TW" sz="900"/>
           </a:p>
@@ -14451,7 +15722,7 @@
 </p:sld>
 </file>
 
-<file path=ppt/slides/slide18.xml><?xml version="1.0" encoding="utf-8"?>
+<file path=ppt/slides/slide19.xml><?xml version="1.0" encoding="utf-8"?>
 <p:sld xmlns:a="http://schemas.openxmlformats.org/drawingml/2006/main" xmlns:r="http://schemas.openxmlformats.org/officeDocument/2006/relationships" xmlns:p="http://schemas.openxmlformats.org/presentationml/2006/main">
   <p:cSld>
     <p:spTree>
@@ -14908,7 +16179,7 @@
                 <a:buFontTx/>
                 <a:buNone/>
               </a:pPr>
-              <a:t>18</a:t>
+              <a:t>19</a:t>
             </a:fld>
             <a:endParaRPr lang="en-US" altLang="zh-TW" sz="900"/>
           </a:p>
@@ -17378,7 +18649,729 @@
 </p:sld>
 </file>
 
-<file path=ppt/slides/slide19.xml><?xml version="1.0" encoding="utf-8"?>
+<file path=ppt/slides/slide2.xml><?xml version="1.0" encoding="utf-8"?>
+<p:sld xmlns:a="http://schemas.openxmlformats.org/drawingml/2006/main" xmlns:r="http://schemas.openxmlformats.org/officeDocument/2006/relationships" xmlns:p="http://schemas.openxmlformats.org/presentationml/2006/main">
+  <p:cSld>
+    <p:spTree>
+      <p:nvGrpSpPr>
+        <p:cNvPr id="1" name=""/>
+        <p:cNvGrpSpPr/>
+        <p:nvPr/>
+      </p:nvGrpSpPr>
+      <p:grpSpPr>
+        <a:xfrm>
+          <a:off x="0" y="0"/>
+          <a:ext cx="0" cy="0"/>
+          <a:chOff x="0" y="0"/>
+          <a:chExt cx="0" cy="0"/>
+        </a:xfrm>
+      </p:grpSpPr>
+      <p:sp>
+        <p:nvSpPr>
+          <p:cNvPr id="3075" name="Footer Placeholder 4">
+            <a:extLst>
+              <a:ext uri="{FF2B5EF4-FFF2-40B4-BE49-F238E27FC236}">
+                <a16:creationId xmlns:a16="http://schemas.microsoft.com/office/drawing/2014/main" id="{BFE23FD5-DC69-48D8-B031-A351352C1764}"/>
+              </a:ext>
+            </a:extLst>
+          </p:cNvPr>
+          <p:cNvSpPr>
+            <a:spLocks noGrp="1"/>
+          </p:cNvSpPr>
+          <p:nvPr>
+            <p:ph type="ftr" sz="quarter" idx="4294967295"/>
+          </p:nvPr>
+        </p:nvSpPr>
+        <p:spPr bwMode="auto">
+          <a:xfrm>
+            <a:off x="1676400" y="6477000"/>
+            <a:ext cx="6172200" cy="304800"/>
+          </a:xfrm>
+          <a:prstGeom prst="rect">
+            <a:avLst/>
+          </a:prstGeom>
+          <a:noFill/>
+          <a:ln w="9525">
+            <a:noFill/>
+            <a:miter lim="800000"/>
+            <a:headEnd/>
+            <a:tailEnd/>
+          </a:ln>
+          <a:effectLst/>
+          <a:extLst>
+            <a:ext uri="{909E8E84-426E-40DD-AFC4-6F175D3DCCD1}">
+              <a14:hiddenFill xmlns:a14="http://schemas.microsoft.com/office/drawing/2010/main">
+                <a:solidFill>
+                  <a:srgbClr val="FFFFFF"/>
+                </a:solidFill>
+              </a14:hiddenFill>
+            </a:ext>
+            <a:ext uri="{91240B29-F687-4F45-9708-019B960494DF}">
+              <a14:hiddenLine xmlns:a14="http://schemas.microsoft.com/office/drawing/2010/main" w="9525">
+                <a:solidFill>
+                  <a:srgbClr val="000000"/>
+                </a:solidFill>
+                <a:miter lim="800000"/>
+                <a:headEnd/>
+                <a:tailEnd/>
+              </a14:hiddenLine>
+            </a:ext>
+          </a:extLst>
+        </p:spPr>
+        <p:txBody>
+          <a:bodyPr vert="horz" wrap="square" lIns="91440" tIns="45720" rIns="91440" bIns="45720" numCol="1" anchor="b" anchorCtr="0" compatLnSpc="1">
+            <a:prstTxWarp prst="textNoShape">
+              <a:avLst/>
+            </a:prstTxWarp>
+          </a:bodyPr>
+          <a:lstStyle>
+            <a:defPPr>
+              <a:defRPr lang="en-US"/>
+            </a:defPPr>
+            <a:lvl1pPr algn="ctr" rtl="0" eaLnBrk="1" fontAlgn="base" hangingPunct="1">
+              <a:spcBef>
+                <a:spcPct val="0"/>
+              </a:spcBef>
+              <a:spcAft>
+                <a:spcPct val="0"/>
+              </a:spcAft>
+              <a:defRPr sz="1400" kern="1200">
+                <a:solidFill>
+                  <a:schemeClr val="tx1"/>
+                </a:solidFill>
+                <a:effectLst>
+                  <a:outerShdw blurRad="38100" dist="38100" dir="2700000" algn="tl">
+                    <a:srgbClr val="000000"/>
+                  </a:outerShdw>
+                </a:effectLst>
+                <a:latin typeface="Arial" charset="0"/>
+                <a:ea typeface="新細明體" pitchFamily="18" charset="-120"/>
+                <a:cs typeface="+mn-cs"/>
+              </a:defRPr>
+            </a:lvl1pPr>
+            <a:lvl2pPr marL="457200" algn="l" rtl="0" eaLnBrk="0" fontAlgn="base" hangingPunct="0">
+              <a:spcBef>
+                <a:spcPct val="0"/>
+              </a:spcBef>
+              <a:spcAft>
+                <a:spcPct val="0"/>
+              </a:spcAft>
+              <a:defRPr kern="1200">
+                <a:solidFill>
+                  <a:schemeClr val="tx1"/>
+                </a:solidFill>
+                <a:latin typeface="Arial" panose="020B0604020202020204" pitchFamily="34" charset="0"/>
+                <a:ea typeface="+mn-ea"/>
+                <a:cs typeface="+mn-cs"/>
+              </a:defRPr>
+            </a:lvl2pPr>
+            <a:lvl3pPr marL="914400" algn="l" rtl="0" eaLnBrk="0" fontAlgn="base" hangingPunct="0">
+              <a:spcBef>
+                <a:spcPct val="0"/>
+              </a:spcBef>
+              <a:spcAft>
+                <a:spcPct val="0"/>
+              </a:spcAft>
+              <a:defRPr kern="1200">
+                <a:solidFill>
+                  <a:schemeClr val="tx1"/>
+                </a:solidFill>
+                <a:latin typeface="Arial" panose="020B0604020202020204" pitchFamily="34" charset="0"/>
+                <a:ea typeface="+mn-ea"/>
+                <a:cs typeface="+mn-cs"/>
+              </a:defRPr>
+            </a:lvl3pPr>
+            <a:lvl4pPr marL="1371600" algn="l" rtl="0" eaLnBrk="0" fontAlgn="base" hangingPunct="0">
+              <a:spcBef>
+                <a:spcPct val="0"/>
+              </a:spcBef>
+              <a:spcAft>
+                <a:spcPct val="0"/>
+              </a:spcAft>
+              <a:defRPr kern="1200">
+                <a:solidFill>
+                  <a:schemeClr val="tx1"/>
+                </a:solidFill>
+                <a:latin typeface="Arial" panose="020B0604020202020204" pitchFamily="34" charset="0"/>
+                <a:ea typeface="+mn-ea"/>
+                <a:cs typeface="+mn-cs"/>
+              </a:defRPr>
+            </a:lvl4pPr>
+            <a:lvl5pPr marL="1828800" algn="l" rtl="0" eaLnBrk="0" fontAlgn="base" hangingPunct="0">
+              <a:spcBef>
+                <a:spcPct val="0"/>
+              </a:spcBef>
+              <a:spcAft>
+                <a:spcPct val="0"/>
+              </a:spcAft>
+              <a:defRPr kern="1200">
+                <a:solidFill>
+                  <a:schemeClr val="tx1"/>
+                </a:solidFill>
+                <a:latin typeface="Arial" panose="020B0604020202020204" pitchFamily="34" charset="0"/>
+                <a:ea typeface="+mn-ea"/>
+                <a:cs typeface="+mn-cs"/>
+              </a:defRPr>
+            </a:lvl5pPr>
+            <a:lvl6pPr marL="2286000" algn="l" defTabSz="914400" rtl="0" eaLnBrk="1" latinLnBrk="0" hangingPunct="1">
+              <a:defRPr kern="1200">
+                <a:solidFill>
+                  <a:schemeClr val="tx1"/>
+                </a:solidFill>
+                <a:latin typeface="Arial" panose="020B0604020202020204" pitchFamily="34" charset="0"/>
+                <a:ea typeface="+mn-ea"/>
+                <a:cs typeface="+mn-cs"/>
+              </a:defRPr>
+            </a:lvl6pPr>
+            <a:lvl7pPr marL="2743200" algn="l" defTabSz="914400" rtl="0" eaLnBrk="1" latinLnBrk="0" hangingPunct="1">
+              <a:defRPr kern="1200">
+                <a:solidFill>
+                  <a:schemeClr val="tx1"/>
+                </a:solidFill>
+                <a:latin typeface="Arial" panose="020B0604020202020204" pitchFamily="34" charset="0"/>
+                <a:ea typeface="+mn-ea"/>
+                <a:cs typeface="+mn-cs"/>
+              </a:defRPr>
+            </a:lvl7pPr>
+            <a:lvl8pPr marL="3200400" algn="l" defTabSz="914400" rtl="0" eaLnBrk="1" latinLnBrk="0" hangingPunct="1">
+              <a:defRPr kern="1200">
+                <a:solidFill>
+                  <a:schemeClr val="tx1"/>
+                </a:solidFill>
+                <a:latin typeface="Arial" panose="020B0604020202020204" pitchFamily="34" charset="0"/>
+                <a:ea typeface="+mn-ea"/>
+                <a:cs typeface="+mn-cs"/>
+              </a:defRPr>
+            </a:lvl8pPr>
+            <a:lvl9pPr marL="3657600" algn="l" defTabSz="914400" rtl="0" eaLnBrk="1" latinLnBrk="0" hangingPunct="1">
+              <a:defRPr kern="1200">
+                <a:solidFill>
+                  <a:schemeClr val="tx1"/>
+                </a:solidFill>
+                <a:latin typeface="Arial" panose="020B0604020202020204" pitchFamily="34" charset="0"/>
+                <a:ea typeface="+mn-ea"/>
+                <a:cs typeface="+mn-cs"/>
+              </a:defRPr>
+            </a:lvl9pPr>
+          </a:lstStyle>
+          <a:p>
+            <a:pPr eaLnBrk="1" hangingPunct="1">
+              <a:defRPr/>
+            </a:pPr>
+            <a:r>
+              <a:rPr lang="en-US" altLang="zh-TW"/>
+              <a:t>Department of Computer Science and Engineering</a:t>
+            </a:r>
+            <a:endParaRPr lang="en-US" altLang="zh-TW">
+              <a:ea typeface="新細明體" charset="-120"/>
+            </a:endParaRPr>
+          </a:p>
+        </p:txBody>
+      </p:sp>
+      <p:sp>
+        <p:nvSpPr>
+          <p:cNvPr id="3076" name="Slide Number Placeholder 5">
+            <a:extLst>
+              <a:ext uri="{FF2B5EF4-FFF2-40B4-BE49-F238E27FC236}">
+                <a16:creationId xmlns:a16="http://schemas.microsoft.com/office/drawing/2014/main" id="{452ED0F7-8C0C-4170-9202-4E7BA6DED58D}"/>
+              </a:ext>
+            </a:extLst>
+          </p:cNvPr>
+          <p:cNvSpPr>
+            <a:spLocks noGrp="1"/>
+          </p:cNvSpPr>
+          <p:nvPr>
+            <p:ph type="sldNum" sz="quarter" idx="4294967295"/>
+          </p:nvPr>
+        </p:nvSpPr>
+        <p:spPr>
+          <a:xfrm>
+            <a:off x="6057900" y="4683919"/>
+            <a:ext cx="1600200" cy="357188"/>
+          </a:xfrm>
+          <a:prstGeom prst="rect">
+            <a:avLst/>
+          </a:prstGeom>
+          <a:extLst>
+            <a:ext uri="{909E8E84-426E-40DD-AFC4-6F175D3DCCD1}">
+              <a14:hiddenFill xmlns:a14="http://schemas.microsoft.com/office/drawing/2010/main">
+                <a:solidFill>
+                  <a:srgbClr val="FFFFFF"/>
+                </a:solidFill>
+              </a14:hiddenFill>
+            </a:ext>
+            <a:ext uri="{91240B29-F687-4F45-9708-019B960494DF}">
+              <a14:hiddenLine xmlns:a14="http://schemas.microsoft.com/office/drawing/2010/main" w="9525">
+                <a:solidFill>
+                  <a:srgbClr val="000000"/>
+                </a:solidFill>
+                <a:miter lim="800000"/>
+                <a:headEnd/>
+                <a:tailEnd/>
+              </a14:hiddenLine>
+            </a:ext>
+          </a:extLst>
+        </p:spPr>
+        <p:txBody>
+          <a:bodyPr/>
+          <a:lstStyle>
+            <a:lvl1pPr>
+              <a:spcBef>
+                <a:spcPct val="20000"/>
+              </a:spcBef>
+              <a:buClr>
+                <a:schemeClr val="hlink"/>
+              </a:buClr>
+              <a:buSzPct val="90000"/>
+              <a:buFont typeface="Wingdings" panose="05000000000000000000" pitchFamily="2" charset="2"/>
+              <a:buBlip>
+                <a:blip r:embed="rId2"/>
+              </a:buBlip>
+              <a:defRPr sz="2400">
+                <a:solidFill>
+                  <a:schemeClr val="tx1"/>
+                </a:solidFill>
+                <a:latin typeface="Arial" panose="020B0604020202020204" pitchFamily="34" charset="0"/>
+              </a:defRPr>
+            </a:lvl1pPr>
+            <a:lvl2pPr marL="557213" indent="-214313">
+              <a:spcBef>
+                <a:spcPct val="20000"/>
+              </a:spcBef>
+              <a:buChar char="–"/>
+              <a:defRPr sz="2100">
+                <a:solidFill>
+                  <a:schemeClr val="tx1"/>
+                </a:solidFill>
+                <a:latin typeface="Arial" panose="020B0604020202020204" pitchFamily="34" charset="0"/>
+              </a:defRPr>
+            </a:lvl2pPr>
+            <a:lvl3pPr marL="857250" indent="-171450">
+              <a:spcBef>
+                <a:spcPct val="20000"/>
+              </a:spcBef>
+              <a:buClr>
+                <a:schemeClr val="accent2"/>
+              </a:buClr>
+              <a:buSzPct val="90000"/>
+              <a:buFont typeface="Wingdings" panose="05000000000000000000" pitchFamily="2" charset="2"/>
+              <a:buBlip>
+                <a:blip r:embed="rId3"/>
+              </a:buBlip>
+              <a:defRPr sz="1800">
+                <a:solidFill>
+                  <a:schemeClr val="tx1"/>
+                </a:solidFill>
+                <a:latin typeface="Arial" panose="020B0604020202020204" pitchFamily="34" charset="0"/>
+              </a:defRPr>
+            </a:lvl3pPr>
+            <a:lvl4pPr marL="1200150" indent="-171450">
+              <a:spcBef>
+                <a:spcPct val="20000"/>
+              </a:spcBef>
+              <a:buChar char="–"/>
+              <a:defRPr sz="1500">
+                <a:solidFill>
+                  <a:schemeClr val="tx1"/>
+                </a:solidFill>
+                <a:latin typeface="Arial" panose="020B0604020202020204" pitchFamily="34" charset="0"/>
+              </a:defRPr>
+            </a:lvl4pPr>
+            <a:lvl5pPr marL="1543050" indent="-171450">
+              <a:spcBef>
+                <a:spcPct val="20000"/>
+              </a:spcBef>
+              <a:buClr>
+                <a:schemeClr val="folHlink"/>
+              </a:buClr>
+              <a:buSzPct val="90000"/>
+              <a:buFont typeface="Wingdings" panose="05000000000000000000" pitchFamily="2" charset="2"/>
+              <a:buBlip>
+                <a:blip r:embed="rId4"/>
+              </a:buBlip>
+              <a:defRPr sz="1500">
+                <a:solidFill>
+                  <a:schemeClr val="tx1"/>
+                </a:solidFill>
+                <a:latin typeface="Arial" panose="020B0604020202020204" pitchFamily="34" charset="0"/>
+              </a:defRPr>
+            </a:lvl5pPr>
+            <a:lvl6pPr marL="1885950" indent="-171450" eaLnBrk="0" fontAlgn="base" hangingPunct="0">
+              <a:spcBef>
+                <a:spcPct val="20000"/>
+              </a:spcBef>
+              <a:spcAft>
+                <a:spcPct val="0"/>
+              </a:spcAft>
+              <a:buClr>
+                <a:schemeClr val="folHlink"/>
+              </a:buClr>
+              <a:buSzPct val="90000"/>
+              <a:buFont typeface="Wingdings" panose="05000000000000000000" pitchFamily="2" charset="2"/>
+              <a:buBlip>
+                <a:blip r:embed="rId4"/>
+              </a:buBlip>
+              <a:defRPr sz="1500">
+                <a:solidFill>
+                  <a:schemeClr val="tx1"/>
+                </a:solidFill>
+                <a:latin typeface="Arial" panose="020B0604020202020204" pitchFamily="34" charset="0"/>
+              </a:defRPr>
+            </a:lvl6pPr>
+            <a:lvl7pPr marL="2228850" indent="-171450" eaLnBrk="0" fontAlgn="base" hangingPunct="0">
+              <a:spcBef>
+                <a:spcPct val="20000"/>
+              </a:spcBef>
+              <a:spcAft>
+                <a:spcPct val="0"/>
+              </a:spcAft>
+              <a:buClr>
+                <a:schemeClr val="folHlink"/>
+              </a:buClr>
+              <a:buSzPct val="90000"/>
+              <a:buFont typeface="Wingdings" panose="05000000000000000000" pitchFamily="2" charset="2"/>
+              <a:buBlip>
+                <a:blip r:embed="rId4"/>
+              </a:buBlip>
+              <a:defRPr sz="1500">
+                <a:solidFill>
+                  <a:schemeClr val="tx1"/>
+                </a:solidFill>
+                <a:latin typeface="Arial" panose="020B0604020202020204" pitchFamily="34" charset="0"/>
+              </a:defRPr>
+            </a:lvl7pPr>
+            <a:lvl8pPr marL="2571750" indent="-171450" eaLnBrk="0" fontAlgn="base" hangingPunct="0">
+              <a:spcBef>
+                <a:spcPct val="20000"/>
+              </a:spcBef>
+              <a:spcAft>
+                <a:spcPct val="0"/>
+              </a:spcAft>
+              <a:buClr>
+                <a:schemeClr val="folHlink"/>
+              </a:buClr>
+              <a:buSzPct val="90000"/>
+              <a:buFont typeface="Wingdings" panose="05000000000000000000" pitchFamily="2" charset="2"/>
+              <a:buBlip>
+                <a:blip r:embed="rId4"/>
+              </a:buBlip>
+              <a:defRPr sz="1500">
+                <a:solidFill>
+                  <a:schemeClr val="tx1"/>
+                </a:solidFill>
+                <a:latin typeface="Arial" panose="020B0604020202020204" pitchFamily="34" charset="0"/>
+              </a:defRPr>
+            </a:lvl8pPr>
+            <a:lvl9pPr marL="2914650" indent="-171450" eaLnBrk="0" fontAlgn="base" hangingPunct="0">
+              <a:spcBef>
+                <a:spcPct val="20000"/>
+              </a:spcBef>
+              <a:spcAft>
+                <a:spcPct val="0"/>
+              </a:spcAft>
+              <a:buClr>
+                <a:schemeClr val="folHlink"/>
+              </a:buClr>
+              <a:buSzPct val="90000"/>
+              <a:buFont typeface="Wingdings" panose="05000000000000000000" pitchFamily="2" charset="2"/>
+              <a:buBlip>
+                <a:blip r:embed="rId4"/>
+              </a:buBlip>
+              <a:defRPr sz="1500">
+                <a:solidFill>
+                  <a:schemeClr val="tx1"/>
+                </a:solidFill>
+                <a:latin typeface="Arial" panose="020B0604020202020204" pitchFamily="34" charset="0"/>
+              </a:defRPr>
+            </a:lvl9pPr>
+          </a:lstStyle>
+          <a:p>
+            <a:pPr>
+              <a:spcBef>
+                <a:spcPct val="0"/>
+              </a:spcBef>
+              <a:buClrTx/>
+              <a:buSzTx/>
+              <a:buFontTx/>
+              <a:buNone/>
+            </a:pPr>
+            <a:fld id="{B2AD37BA-DF3D-4AB0-8E54-1AC9919634A4}" type="slidenum">
+              <a:rPr lang="zh-TW" altLang="en-US" sz="900"/>
+              <a:pPr>
+                <a:spcBef>
+                  <a:spcPct val="0"/>
+                </a:spcBef>
+                <a:buClrTx/>
+                <a:buSzTx/>
+                <a:buFontTx/>
+                <a:buNone/>
+              </a:pPr>
+              <a:t>2</a:t>
+            </a:fld>
+            <a:endParaRPr lang="en-US" altLang="zh-TW" sz="900"/>
+          </a:p>
+        </p:txBody>
+      </p:sp>
+      <p:sp>
+        <p:nvSpPr>
+          <p:cNvPr id="6" name="Rectangle 2">
+            <a:extLst>
+              <a:ext uri="{FF2B5EF4-FFF2-40B4-BE49-F238E27FC236}">
+                <a16:creationId xmlns:a16="http://schemas.microsoft.com/office/drawing/2014/main" id="{4FC5CF1D-7894-45F0-BF03-427F3AC23102}"/>
+              </a:ext>
+            </a:extLst>
+          </p:cNvPr>
+          <p:cNvSpPr txBox="1">
+            <a:spLocks noChangeArrowheads="1"/>
+          </p:cNvSpPr>
+          <p:nvPr/>
+        </p:nvSpPr>
+        <p:spPr bwMode="auto">
+          <a:xfrm>
+            <a:off x="1543050" y="514350"/>
+            <a:ext cx="5829300" cy="3028950"/>
+          </a:xfrm>
+          <a:prstGeom prst="rect">
+            <a:avLst/>
+          </a:prstGeom>
+          <a:noFill/>
+          <a:ln w="9525">
+            <a:noFill/>
+            <a:miter lim="800000"/>
+            <a:headEnd/>
+            <a:tailEnd/>
+          </a:ln>
+          <a:effectLst/>
+        </p:spPr>
+        <p:txBody>
+          <a:bodyPr anchor="ctr"/>
+          <a:lstStyle>
+            <a:lvl1pPr algn="ctr" rtl="0" eaLnBrk="0" fontAlgn="base" hangingPunct="0">
+              <a:spcBef>
+                <a:spcPct val="0"/>
+              </a:spcBef>
+              <a:spcAft>
+                <a:spcPct val="0"/>
+              </a:spcAft>
+              <a:defRPr sz="4400">
+                <a:solidFill>
+                  <a:schemeClr val="tx2"/>
+                </a:solidFill>
+                <a:effectLst>
+                  <a:outerShdw blurRad="38100" dist="38100" dir="2700000" algn="tl">
+                    <a:srgbClr val="000000"/>
+                  </a:outerShdw>
+                </a:effectLst>
+                <a:latin typeface="+mj-lt"/>
+                <a:ea typeface="+mj-ea"/>
+                <a:cs typeface="+mj-cs"/>
+              </a:defRPr>
+            </a:lvl1pPr>
+            <a:lvl2pPr algn="ctr" rtl="0" eaLnBrk="0" fontAlgn="base" hangingPunct="0">
+              <a:spcBef>
+                <a:spcPct val="0"/>
+              </a:spcBef>
+              <a:spcAft>
+                <a:spcPct val="0"/>
+              </a:spcAft>
+              <a:defRPr sz="4400">
+                <a:solidFill>
+                  <a:schemeClr val="tx2"/>
+                </a:solidFill>
+                <a:effectLst>
+                  <a:outerShdw blurRad="38100" dist="38100" dir="2700000" algn="tl">
+                    <a:srgbClr val="000000"/>
+                  </a:outerShdw>
+                </a:effectLst>
+                <a:latin typeface="Arial" charset="0"/>
+              </a:defRPr>
+            </a:lvl2pPr>
+            <a:lvl3pPr algn="ctr" rtl="0" eaLnBrk="0" fontAlgn="base" hangingPunct="0">
+              <a:spcBef>
+                <a:spcPct val="0"/>
+              </a:spcBef>
+              <a:spcAft>
+                <a:spcPct val="0"/>
+              </a:spcAft>
+              <a:defRPr sz="4400">
+                <a:solidFill>
+                  <a:schemeClr val="tx2"/>
+                </a:solidFill>
+                <a:effectLst>
+                  <a:outerShdw blurRad="38100" dist="38100" dir="2700000" algn="tl">
+                    <a:srgbClr val="000000"/>
+                  </a:outerShdw>
+                </a:effectLst>
+                <a:latin typeface="Arial" charset="0"/>
+              </a:defRPr>
+            </a:lvl3pPr>
+            <a:lvl4pPr algn="ctr" rtl="0" eaLnBrk="0" fontAlgn="base" hangingPunct="0">
+              <a:spcBef>
+                <a:spcPct val="0"/>
+              </a:spcBef>
+              <a:spcAft>
+                <a:spcPct val="0"/>
+              </a:spcAft>
+              <a:defRPr sz="4400">
+                <a:solidFill>
+                  <a:schemeClr val="tx2"/>
+                </a:solidFill>
+                <a:effectLst>
+                  <a:outerShdw blurRad="38100" dist="38100" dir="2700000" algn="tl">
+                    <a:srgbClr val="000000"/>
+                  </a:outerShdw>
+                </a:effectLst>
+                <a:latin typeface="Arial" charset="0"/>
+              </a:defRPr>
+            </a:lvl4pPr>
+            <a:lvl5pPr algn="ctr" rtl="0" eaLnBrk="0" fontAlgn="base" hangingPunct="0">
+              <a:spcBef>
+                <a:spcPct val="0"/>
+              </a:spcBef>
+              <a:spcAft>
+                <a:spcPct val="0"/>
+              </a:spcAft>
+              <a:defRPr sz="4400">
+                <a:solidFill>
+                  <a:schemeClr val="tx2"/>
+                </a:solidFill>
+                <a:effectLst>
+                  <a:outerShdw blurRad="38100" dist="38100" dir="2700000" algn="tl">
+                    <a:srgbClr val="000000"/>
+                  </a:outerShdw>
+                </a:effectLst>
+                <a:latin typeface="Arial" charset="0"/>
+              </a:defRPr>
+            </a:lvl5pPr>
+            <a:lvl6pPr marL="457200" algn="ctr" rtl="0" fontAlgn="base">
+              <a:spcBef>
+                <a:spcPct val="0"/>
+              </a:spcBef>
+              <a:spcAft>
+                <a:spcPct val="0"/>
+              </a:spcAft>
+              <a:defRPr sz="4400">
+                <a:solidFill>
+                  <a:schemeClr val="tx2"/>
+                </a:solidFill>
+                <a:effectLst>
+                  <a:outerShdw blurRad="38100" dist="38100" dir="2700000" algn="tl">
+                    <a:srgbClr val="000000"/>
+                  </a:outerShdw>
+                </a:effectLst>
+                <a:latin typeface="Arial" charset="0"/>
+              </a:defRPr>
+            </a:lvl6pPr>
+            <a:lvl7pPr marL="914400" algn="ctr" rtl="0" fontAlgn="base">
+              <a:spcBef>
+                <a:spcPct val="0"/>
+              </a:spcBef>
+              <a:spcAft>
+                <a:spcPct val="0"/>
+              </a:spcAft>
+              <a:defRPr sz="4400">
+                <a:solidFill>
+                  <a:schemeClr val="tx2"/>
+                </a:solidFill>
+                <a:effectLst>
+                  <a:outerShdw blurRad="38100" dist="38100" dir="2700000" algn="tl">
+                    <a:srgbClr val="000000"/>
+                  </a:outerShdw>
+                </a:effectLst>
+                <a:latin typeface="Arial" charset="0"/>
+              </a:defRPr>
+            </a:lvl7pPr>
+            <a:lvl8pPr marL="1371600" algn="ctr" rtl="0" fontAlgn="base">
+              <a:spcBef>
+                <a:spcPct val="0"/>
+              </a:spcBef>
+              <a:spcAft>
+                <a:spcPct val="0"/>
+              </a:spcAft>
+              <a:defRPr sz="4400">
+                <a:solidFill>
+                  <a:schemeClr val="tx2"/>
+                </a:solidFill>
+                <a:effectLst>
+                  <a:outerShdw blurRad="38100" dist="38100" dir="2700000" algn="tl">
+                    <a:srgbClr val="000000"/>
+                  </a:outerShdw>
+                </a:effectLst>
+                <a:latin typeface="Arial" charset="0"/>
+              </a:defRPr>
+            </a:lvl8pPr>
+            <a:lvl9pPr marL="1828800" algn="ctr" rtl="0" fontAlgn="base">
+              <a:spcBef>
+                <a:spcPct val="0"/>
+              </a:spcBef>
+              <a:spcAft>
+                <a:spcPct val="0"/>
+              </a:spcAft>
+              <a:defRPr sz="4400">
+                <a:solidFill>
+                  <a:schemeClr val="tx2"/>
+                </a:solidFill>
+                <a:effectLst>
+                  <a:outerShdw blurRad="38100" dist="38100" dir="2700000" algn="tl">
+                    <a:srgbClr val="000000"/>
+                  </a:outerShdw>
+                </a:effectLst>
+                <a:latin typeface="Arial" charset="0"/>
+              </a:defRPr>
+            </a:lvl9pPr>
+          </a:lstStyle>
+          <a:p>
+            <a:pPr eaLnBrk="1" hangingPunct="1">
+              <a:defRPr/>
+            </a:pPr>
+            <a:br>
+              <a:rPr lang="en-US" altLang="zh-TW" sz="3300" dirty="0">
+                <a:ea typeface="新細明體" pitchFamily="18" charset="-120"/>
+              </a:rPr>
+            </a:br>
+            <a:r>
+              <a:rPr lang="en-US" altLang="zh-TW" sz="3300" dirty="0">
+                <a:effectLst/>
+                <a:ea typeface="新細明體" pitchFamily="18" charset="-120"/>
+              </a:rPr>
+              <a:t>Calling Convention </a:t>
+            </a:r>
+          </a:p>
+          <a:p>
+            <a:pPr eaLnBrk="1" hangingPunct="1">
+              <a:defRPr/>
+            </a:pPr>
+            <a:r>
+              <a:rPr lang="en-US" altLang="zh-TW" sz="3300" dirty="0">
+                <a:effectLst/>
+                <a:ea typeface="新細明體" pitchFamily="18" charset="-120"/>
+              </a:rPr>
+              <a:t>and</a:t>
+            </a:r>
+          </a:p>
+          <a:p>
+            <a:pPr eaLnBrk="1" hangingPunct="1">
+              <a:defRPr/>
+            </a:pPr>
+            <a:r>
+              <a:rPr lang="en-US" altLang="zh-TW" sz="3300" dirty="0">
+                <a:effectLst/>
+                <a:ea typeface="新細明體" pitchFamily="18" charset="-120"/>
+              </a:rPr>
+              <a:t>Caller/Callee Save Registers</a:t>
+            </a:r>
+          </a:p>
+        </p:txBody>
+      </p:sp>
+    </p:spTree>
+  </p:cSld>
+  <p:clrMapOvr>
+    <a:masterClrMapping/>
+  </p:clrMapOvr>
+</p:sld>
+</file>
+
+<file path=ppt/slides/slide20.xml><?xml version="1.0" encoding="utf-8"?>
 <p:sld xmlns:a="http://schemas.openxmlformats.org/drawingml/2006/main" xmlns:r="http://schemas.openxmlformats.org/officeDocument/2006/relationships" xmlns:p="http://schemas.openxmlformats.org/presentationml/2006/main">
   <p:cSld>
     <p:spTree>
@@ -17835,7 +19828,7 @@
                 <a:buFontTx/>
                 <a:buNone/>
               </a:pPr>
-              <a:t>19</a:t>
+              <a:t>20</a:t>
             </a:fld>
             <a:endParaRPr lang="en-US" altLang="zh-TW" sz="900"/>
           </a:p>
@@ -19451,729 +21444,7 @@
 </p:sld>
 </file>
 
-<file path=ppt/slides/slide2.xml><?xml version="1.0" encoding="utf-8"?>
-<p:sld xmlns:a="http://schemas.openxmlformats.org/drawingml/2006/main" xmlns:r="http://schemas.openxmlformats.org/officeDocument/2006/relationships" xmlns:p="http://schemas.openxmlformats.org/presentationml/2006/main">
-  <p:cSld>
-    <p:spTree>
-      <p:nvGrpSpPr>
-        <p:cNvPr id="1" name=""/>
-        <p:cNvGrpSpPr/>
-        <p:nvPr/>
-      </p:nvGrpSpPr>
-      <p:grpSpPr>
-        <a:xfrm>
-          <a:off x="0" y="0"/>
-          <a:ext cx="0" cy="0"/>
-          <a:chOff x="0" y="0"/>
-          <a:chExt cx="0" cy="0"/>
-        </a:xfrm>
-      </p:grpSpPr>
-      <p:sp>
-        <p:nvSpPr>
-          <p:cNvPr id="3075" name="Footer Placeholder 4">
-            <a:extLst>
-              <a:ext uri="{FF2B5EF4-FFF2-40B4-BE49-F238E27FC236}">
-                <a16:creationId xmlns:a16="http://schemas.microsoft.com/office/drawing/2014/main" id="{BFE23FD5-DC69-48D8-B031-A351352C1764}"/>
-              </a:ext>
-            </a:extLst>
-          </p:cNvPr>
-          <p:cNvSpPr>
-            <a:spLocks noGrp="1"/>
-          </p:cNvSpPr>
-          <p:nvPr>
-            <p:ph type="ftr" sz="quarter" idx="4294967295"/>
-          </p:nvPr>
-        </p:nvSpPr>
-        <p:spPr bwMode="auto">
-          <a:xfrm>
-            <a:off x="1676400" y="6477000"/>
-            <a:ext cx="6172200" cy="304800"/>
-          </a:xfrm>
-          <a:prstGeom prst="rect">
-            <a:avLst/>
-          </a:prstGeom>
-          <a:noFill/>
-          <a:ln w="9525">
-            <a:noFill/>
-            <a:miter lim="800000"/>
-            <a:headEnd/>
-            <a:tailEnd/>
-          </a:ln>
-          <a:effectLst/>
-          <a:extLst>
-            <a:ext uri="{909E8E84-426E-40DD-AFC4-6F175D3DCCD1}">
-              <a14:hiddenFill xmlns:a14="http://schemas.microsoft.com/office/drawing/2010/main">
-                <a:solidFill>
-                  <a:srgbClr val="FFFFFF"/>
-                </a:solidFill>
-              </a14:hiddenFill>
-            </a:ext>
-            <a:ext uri="{91240B29-F687-4F45-9708-019B960494DF}">
-              <a14:hiddenLine xmlns:a14="http://schemas.microsoft.com/office/drawing/2010/main" w="9525">
-                <a:solidFill>
-                  <a:srgbClr val="000000"/>
-                </a:solidFill>
-                <a:miter lim="800000"/>
-                <a:headEnd/>
-                <a:tailEnd/>
-              </a14:hiddenLine>
-            </a:ext>
-          </a:extLst>
-        </p:spPr>
-        <p:txBody>
-          <a:bodyPr vert="horz" wrap="square" lIns="91440" tIns="45720" rIns="91440" bIns="45720" numCol="1" anchor="b" anchorCtr="0" compatLnSpc="1">
-            <a:prstTxWarp prst="textNoShape">
-              <a:avLst/>
-            </a:prstTxWarp>
-          </a:bodyPr>
-          <a:lstStyle>
-            <a:defPPr>
-              <a:defRPr lang="en-US"/>
-            </a:defPPr>
-            <a:lvl1pPr algn="ctr" rtl="0" eaLnBrk="1" fontAlgn="base" hangingPunct="1">
-              <a:spcBef>
-                <a:spcPct val="0"/>
-              </a:spcBef>
-              <a:spcAft>
-                <a:spcPct val="0"/>
-              </a:spcAft>
-              <a:defRPr sz="1400" kern="1200">
-                <a:solidFill>
-                  <a:schemeClr val="tx1"/>
-                </a:solidFill>
-                <a:effectLst>
-                  <a:outerShdw blurRad="38100" dist="38100" dir="2700000" algn="tl">
-                    <a:srgbClr val="000000"/>
-                  </a:outerShdw>
-                </a:effectLst>
-                <a:latin typeface="Arial" charset="0"/>
-                <a:ea typeface="新細明體" pitchFamily="18" charset="-120"/>
-                <a:cs typeface="+mn-cs"/>
-              </a:defRPr>
-            </a:lvl1pPr>
-            <a:lvl2pPr marL="457200" algn="l" rtl="0" eaLnBrk="0" fontAlgn="base" hangingPunct="0">
-              <a:spcBef>
-                <a:spcPct val="0"/>
-              </a:spcBef>
-              <a:spcAft>
-                <a:spcPct val="0"/>
-              </a:spcAft>
-              <a:defRPr kern="1200">
-                <a:solidFill>
-                  <a:schemeClr val="tx1"/>
-                </a:solidFill>
-                <a:latin typeface="Arial" panose="020B0604020202020204" pitchFamily="34" charset="0"/>
-                <a:ea typeface="+mn-ea"/>
-                <a:cs typeface="+mn-cs"/>
-              </a:defRPr>
-            </a:lvl2pPr>
-            <a:lvl3pPr marL="914400" algn="l" rtl="0" eaLnBrk="0" fontAlgn="base" hangingPunct="0">
-              <a:spcBef>
-                <a:spcPct val="0"/>
-              </a:spcBef>
-              <a:spcAft>
-                <a:spcPct val="0"/>
-              </a:spcAft>
-              <a:defRPr kern="1200">
-                <a:solidFill>
-                  <a:schemeClr val="tx1"/>
-                </a:solidFill>
-                <a:latin typeface="Arial" panose="020B0604020202020204" pitchFamily="34" charset="0"/>
-                <a:ea typeface="+mn-ea"/>
-                <a:cs typeface="+mn-cs"/>
-              </a:defRPr>
-            </a:lvl3pPr>
-            <a:lvl4pPr marL="1371600" algn="l" rtl="0" eaLnBrk="0" fontAlgn="base" hangingPunct="0">
-              <a:spcBef>
-                <a:spcPct val="0"/>
-              </a:spcBef>
-              <a:spcAft>
-                <a:spcPct val="0"/>
-              </a:spcAft>
-              <a:defRPr kern="1200">
-                <a:solidFill>
-                  <a:schemeClr val="tx1"/>
-                </a:solidFill>
-                <a:latin typeface="Arial" panose="020B0604020202020204" pitchFamily="34" charset="0"/>
-                <a:ea typeface="+mn-ea"/>
-                <a:cs typeface="+mn-cs"/>
-              </a:defRPr>
-            </a:lvl4pPr>
-            <a:lvl5pPr marL="1828800" algn="l" rtl="0" eaLnBrk="0" fontAlgn="base" hangingPunct="0">
-              <a:spcBef>
-                <a:spcPct val="0"/>
-              </a:spcBef>
-              <a:spcAft>
-                <a:spcPct val="0"/>
-              </a:spcAft>
-              <a:defRPr kern="1200">
-                <a:solidFill>
-                  <a:schemeClr val="tx1"/>
-                </a:solidFill>
-                <a:latin typeface="Arial" panose="020B0604020202020204" pitchFamily="34" charset="0"/>
-                <a:ea typeface="+mn-ea"/>
-                <a:cs typeface="+mn-cs"/>
-              </a:defRPr>
-            </a:lvl5pPr>
-            <a:lvl6pPr marL="2286000" algn="l" defTabSz="914400" rtl="0" eaLnBrk="1" latinLnBrk="0" hangingPunct="1">
-              <a:defRPr kern="1200">
-                <a:solidFill>
-                  <a:schemeClr val="tx1"/>
-                </a:solidFill>
-                <a:latin typeface="Arial" panose="020B0604020202020204" pitchFamily="34" charset="0"/>
-                <a:ea typeface="+mn-ea"/>
-                <a:cs typeface="+mn-cs"/>
-              </a:defRPr>
-            </a:lvl6pPr>
-            <a:lvl7pPr marL="2743200" algn="l" defTabSz="914400" rtl="0" eaLnBrk="1" latinLnBrk="0" hangingPunct="1">
-              <a:defRPr kern="1200">
-                <a:solidFill>
-                  <a:schemeClr val="tx1"/>
-                </a:solidFill>
-                <a:latin typeface="Arial" panose="020B0604020202020204" pitchFamily="34" charset="0"/>
-                <a:ea typeface="+mn-ea"/>
-                <a:cs typeface="+mn-cs"/>
-              </a:defRPr>
-            </a:lvl7pPr>
-            <a:lvl8pPr marL="3200400" algn="l" defTabSz="914400" rtl="0" eaLnBrk="1" latinLnBrk="0" hangingPunct="1">
-              <a:defRPr kern="1200">
-                <a:solidFill>
-                  <a:schemeClr val="tx1"/>
-                </a:solidFill>
-                <a:latin typeface="Arial" panose="020B0604020202020204" pitchFamily="34" charset="0"/>
-                <a:ea typeface="+mn-ea"/>
-                <a:cs typeface="+mn-cs"/>
-              </a:defRPr>
-            </a:lvl8pPr>
-            <a:lvl9pPr marL="3657600" algn="l" defTabSz="914400" rtl="0" eaLnBrk="1" latinLnBrk="0" hangingPunct="1">
-              <a:defRPr kern="1200">
-                <a:solidFill>
-                  <a:schemeClr val="tx1"/>
-                </a:solidFill>
-                <a:latin typeface="Arial" panose="020B0604020202020204" pitchFamily="34" charset="0"/>
-                <a:ea typeface="+mn-ea"/>
-                <a:cs typeface="+mn-cs"/>
-              </a:defRPr>
-            </a:lvl9pPr>
-          </a:lstStyle>
-          <a:p>
-            <a:pPr eaLnBrk="1" hangingPunct="1">
-              <a:defRPr/>
-            </a:pPr>
-            <a:r>
-              <a:rPr lang="en-US" altLang="zh-TW"/>
-              <a:t>Department of Computer Science and Engineering</a:t>
-            </a:r>
-            <a:endParaRPr lang="en-US" altLang="zh-TW">
-              <a:ea typeface="新細明體" charset="-120"/>
-            </a:endParaRPr>
-          </a:p>
-        </p:txBody>
-      </p:sp>
-      <p:sp>
-        <p:nvSpPr>
-          <p:cNvPr id="3076" name="Slide Number Placeholder 5">
-            <a:extLst>
-              <a:ext uri="{FF2B5EF4-FFF2-40B4-BE49-F238E27FC236}">
-                <a16:creationId xmlns:a16="http://schemas.microsoft.com/office/drawing/2014/main" id="{452ED0F7-8C0C-4170-9202-4E7BA6DED58D}"/>
-              </a:ext>
-            </a:extLst>
-          </p:cNvPr>
-          <p:cNvSpPr>
-            <a:spLocks noGrp="1"/>
-          </p:cNvSpPr>
-          <p:nvPr>
-            <p:ph type="sldNum" sz="quarter" idx="4294967295"/>
-          </p:nvPr>
-        </p:nvSpPr>
-        <p:spPr>
-          <a:xfrm>
-            <a:off x="6057900" y="4683919"/>
-            <a:ext cx="1600200" cy="357188"/>
-          </a:xfrm>
-          <a:prstGeom prst="rect">
-            <a:avLst/>
-          </a:prstGeom>
-          <a:extLst>
-            <a:ext uri="{909E8E84-426E-40DD-AFC4-6F175D3DCCD1}">
-              <a14:hiddenFill xmlns:a14="http://schemas.microsoft.com/office/drawing/2010/main">
-                <a:solidFill>
-                  <a:srgbClr val="FFFFFF"/>
-                </a:solidFill>
-              </a14:hiddenFill>
-            </a:ext>
-            <a:ext uri="{91240B29-F687-4F45-9708-019B960494DF}">
-              <a14:hiddenLine xmlns:a14="http://schemas.microsoft.com/office/drawing/2010/main" w="9525">
-                <a:solidFill>
-                  <a:srgbClr val="000000"/>
-                </a:solidFill>
-                <a:miter lim="800000"/>
-                <a:headEnd/>
-                <a:tailEnd/>
-              </a14:hiddenLine>
-            </a:ext>
-          </a:extLst>
-        </p:spPr>
-        <p:txBody>
-          <a:bodyPr/>
-          <a:lstStyle>
-            <a:lvl1pPr>
-              <a:spcBef>
-                <a:spcPct val="20000"/>
-              </a:spcBef>
-              <a:buClr>
-                <a:schemeClr val="hlink"/>
-              </a:buClr>
-              <a:buSzPct val="90000"/>
-              <a:buFont typeface="Wingdings" panose="05000000000000000000" pitchFamily="2" charset="2"/>
-              <a:buBlip>
-                <a:blip r:embed="rId2"/>
-              </a:buBlip>
-              <a:defRPr sz="2400">
-                <a:solidFill>
-                  <a:schemeClr val="tx1"/>
-                </a:solidFill>
-                <a:latin typeface="Arial" panose="020B0604020202020204" pitchFamily="34" charset="0"/>
-              </a:defRPr>
-            </a:lvl1pPr>
-            <a:lvl2pPr marL="557213" indent="-214313">
-              <a:spcBef>
-                <a:spcPct val="20000"/>
-              </a:spcBef>
-              <a:buChar char="–"/>
-              <a:defRPr sz="2100">
-                <a:solidFill>
-                  <a:schemeClr val="tx1"/>
-                </a:solidFill>
-                <a:latin typeface="Arial" panose="020B0604020202020204" pitchFamily="34" charset="0"/>
-              </a:defRPr>
-            </a:lvl2pPr>
-            <a:lvl3pPr marL="857250" indent="-171450">
-              <a:spcBef>
-                <a:spcPct val="20000"/>
-              </a:spcBef>
-              <a:buClr>
-                <a:schemeClr val="accent2"/>
-              </a:buClr>
-              <a:buSzPct val="90000"/>
-              <a:buFont typeface="Wingdings" panose="05000000000000000000" pitchFamily="2" charset="2"/>
-              <a:buBlip>
-                <a:blip r:embed="rId3"/>
-              </a:buBlip>
-              <a:defRPr sz="1800">
-                <a:solidFill>
-                  <a:schemeClr val="tx1"/>
-                </a:solidFill>
-                <a:latin typeface="Arial" panose="020B0604020202020204" pitchFamily="34" charset="0"/>
-              </a:defRPr>
-            </a:lvl3pPr>
-            <a:lvl4pPr marL="1200150" indent="-171450">
-              <a:spcBef>
-                <a:spcPct val="20000"/>
-              </a:spcBef>
-              <a:buChar char="–"/>
-              <a:defRPr sz="1500">
-                <a:solidFill>
-                  <a:schemeClr val="tx1"/>
-                </a:solidFill>
-                <a:latin typeface="Arial" panose="020B0604020202020204" pitchFamily="34" charset="0"/>
-              </a:defRPr>
-            </a:lvl4pPr>
-            <a:lvl5pPr marL="1543050" indent="-171450">
-              <a:spcBef>
-                <a:spcPct val="20000"/>
-              </a:spcBef>
-              <a:buClr>
-                <a:schemeClr val="folHlink"/>
-              </a:buClr>
-              <a:buSzPct val="90000"/>
-              <a:buFont typeface="Wingdings" panose="05000000000000000000" pitchFamily="2" charset="2"/>
-              <a:buBlip>
-                <a:blip r:embed="rId4"/>
-              </a:buBlip>
-              <a:defRPr sz="1500">
-                <a:solidFill>
-                  <a:schemeClr val="tx1"/>
-                </a:solidFill>
-                <a:latin typeface="Arial" panose="020B0604020202020204" pitchFamily="34" charset="0"/>
-              </a:defRPr>
-            </a:lvl5pPr>
-            <a:lvl6pPr marL="1885950" indent="-171450" eaLnBrk="0" fontAlgn="base" hangingPunct="0">
-              <a:spcBef>
-                <a:spcPct val="20000"/>
-              </a:spcBef>
-              <a:spcAft>
-                <a:spcPct val="0"/>
-              </a:spcAft>
-              <a:buClr>
-                <a:schemeClr val="folHlink"/>
-              </a:buClr>
-              <a:buSzPct val="90000"/>
-              <a:buFont typeface="Wingdings" panose="05000000000000000000" pitchFamily="2" charset="2"/>
-              <a:buBlip>
-                <a:blip r:embed="rId4"/>
-              </a:buBlip>
-              <a:defRPr sz="1500">
-                <a:solidFill>
-                  <a:schemeClr val="tx1"/>
-                </a:solidFill>
-                <a:latin typeface="Arial" panose="020B0604020202020204" pitchFamily="34" charset="0"/>
-              </a:defRPr>
-            </a:lvl6pPr>
-            <a:lvl7pPr marL="2228850" indent="-171450" eaLnBrk="0" fontAlgn="base" hangingPunct="0">
-              <a:spcBef>
-                <a:spcPct val="20000"/>
-              </a:spcBef>
-              <a:spcAft>
-                <a:spcPct val="0"/>
-              </a:spcAft>
-              <a:buClr>
-                <a:schemeClr val="folHlink"/>
-              </a:buClr>
-              <a:buSzPct val="90000"/>
-              <a:buFont typeface="Wingdings" panose="05000000000000000000" pitchFamily="2" charset="2"/>
-              <a:buBlip>
-                <a:blip r:embed="rId4"/>
-              </a:buBlip>
-              <a:defRPr sz="1500">
-                <a:solidFill>
-                  <a:schemeClr val="tx1"/>
-                </a:solidFill>
-                <a:latin typeface="Arial" panose="020B0604020202020204" pitchFamily="34" charset="0"/>
-              </a:defRPr>
-            </a:lvl7pPr>
-            <a:lvl8pPr marL="2571750" indent="-171450" eaLnBrk="0" fontAlgn="base" hangingPunct="0">
-              <a:spcBef>
-                <a:spcPct val="20000"/>
-              </a:spcBef>
-              <a:spcAft>
-                <a:spcPct val="0"/>
-              </a:spcAft>
-              <a:buClr>
-                <a:schemeClr val="folHlink"/>
-              </a:buClr>
-              <a:buSzPct val="90000"/>
-              <a:buFont typeface="Wingdings" panose="05000000000000000000" pitchFamily="2" charset="2"/>
-              <a:buBlip>
-                <a:blip r:embed="rId4"/>
-              </a:buBlip>
-              <a:defRPr sz="1500">
-                <a:solidFill>
-                  <a:schemeClr val="tx1"/>
-                </a:solidFill>
-                <a:latin typeface="Arial" panose="020B0604020202020204" pitchFamily="34" charset="0"/>
-              </a:defRPr>
-            </a:lvl8pPr>
-            <a:lvl9pPr marL="2914650" indent="-171450" eaLnBrk="0" fontAlgn="base" hangingPunct="0">
-              <a:spcBef>
-                <a:spcPct val="20000"/>
-              </a:spcBef>
-              <a:spcAft>
-                <a:spcPct val="0"/>
-              </a:spcAft>
-              <a:buClr>
-                <a:schemeClr val="folHlink"/>
-              </a:buClr>
-              <a:buSzPct val="90000"/>
-              <a:buFont typeface="Wingdings" panose="05000000000000000000" pitchFamily="2" charset="2"/>
-              <a:buBlip>
-                <a:blip r:embed="rId4"/>
-              </a:buBlip>
-              <a:defRPr sz="1500">
-                <a:solidFill>
-                  <a:schemeClr val="tx1"/>
-                </a:solidFill>
-                <a:latin typeface="Arial" panose="020B0604020202020204" pitchFamily="34" charset="0"/>
-              </a:defRPr>
-            </a:lvl9pPr>
-          </a:lstStyle>
-          <a:p>
-            <a:pPr>
-              <a:spcBef>
-                <a:spcPct val="0"/>
-              </a:spcBef>
-              <a:buClrTx/>
-              <a:buSzTx/>
-              <a:buFontTx/>
-              <a:buNone/>
-            </a:pPr>
-            <a:fld id="{B2AD37BA-DF3D-4AB0-8E54-1AC9919634A4}" type="slidenum">
-              <a:rPr lang="zh-TW" altLang="en-US" sz="900"/>
-              <a:pPr>
-                <a:spcBef>
-                  <a:spcPct val="0"/>
-                </a:spcBef>
-                <a:buClrTx/>
-                <a:buSzTx/>
-                <a:buFontTx/>
-                <a:buNone/>
-              </a:pPr>
-              <a:t>2</a:t>
-            </a:fld>
-            <a:endParaRPr lang="en-US" altLang="zh-TW" sz="900"/>
-          </a:p>
-        </p:txBody>
-      </p:sp>
-      <p:sp>
-        <p:nvSpPr>
-          <p:cNvPr id="6" name="Rectangle 2">
-            <a:extLst>
-              <a:ext uri="{FF2B5EF4-FFF2-40B4-BE49-F238E27FC236}">
-                <a16:creationId xmlns:a16="http://schemas.microsoft.com/office/drawing/2014/main" id="{4FC5CF1D-7894-45F0-BF03-427F3AC23102}"/>
-              </a:ext>
-            </a:extLst>
-          </p:cNvPr>
-          <p:cNvSpPr txBox="1">
-            <a:spLocks noChangeArrowheads="1"/>
-          </p:cNvSpPr>
-          <p:nvPr/>
-        </p:nvSpPr>
-        <p:spPr bwMode="auto">
-          <a:xfrm>
-            <a:off x="1543050" y="514350"/>
-            <a:ext cx="5829300" cy="3028950"/>
-          </a:xfrm>
-          <a:prstGeom prst="rect">
-            <a:avLst/>
-          </a:prstGeom>
-          <a:noFill/>
-          <a:ln w="9525">
-            <a:noFill/>
-            <a:miter lim="800000"/>
-            <a:headEnd/>
-            <a:tailEnd/>
-          </a:ln>
-          <a:effectLst/>
-        </p:spPr>
-        <p:txBody>
-          <a:bodyPr anchor="ctr"/>
-          <a:lstStyle>
-            <a:lvl1pPr algn="ctr" rtl="0" eaLnBrk="0" fontAlgn="base" hangingPunct="0">
-              <a:spcBef>
-                <a:spcPct val="0"/>
-              </a:spcBef>
-              <a:spcAft>
-                <a:spcPct val="0"/>
-              </a:spcAft>
-              <a:defRPr sz="4400">
-                <a:solidFill>
-                  <a:schemeClr val="tx2"/>
-                </a:solidFill>
-                <a:effectLst>
-                  <a:outerShdw blurRad="38100" dist="38100" dir="2700000" algn="tl">
-                    <a:srgbClr val="000000"/>
-                  </a:outerShdw>
-                </a:effectLst>
-                <a:latin typeface="+mj-lt"/>
-                <a:ea typeface="+mj-ea"/>
-                <a:cs typeface="+mj-cs"/>
-              </a:defRPr>
-            </a:lvl1pPr>
-            <a:lvl2pPr algn="ctr" rtl="0" eaLnBrk="0" fontAlgn="base" hangingPunct="0">
-              <a:spcBef>
-                <a:spcPct val="0"/>
-              </a:spcBef>
-              <a:spcAft>
-                <a:spcPct val="0"/>
-              </a:spcAft>
-              <a:defRPr sz="4400">
-                <a:solidFill>
-                  <a:schemeClr val="tx2"/>
-                </a:solidFill>
-                <a:effectLst>
-                  <a:outerShdw blurRad="38100" dist="38100" dir="2700000" algn="tl">
-                    <a:srgbClr val="000000"/>
-                  </a:outerShdw>
-                </a:effectLst>
-                <a:latin typeface="Arial" charset="0"/>
-              </a:defRPr>
-            </a:lvl2pPr>
-            <a:lvl3pPr algn="ctr" rtl="0" eaLnBrk="0" fontAlgn="base" hangingPunct="0">
-              <a:spcBef>
-                <a:spcPct val="0"/>
-              </a:spcBef>
-              <a:spcAft>
-                <a:spcPct val="0"/>
-              </a:spcAft>
-              <a:defRPr sz="4400">
-                <a:solidFill>
-                  <a:schemeClr val="tx2"/>
-                </a:solidFill>
-                <a:effectLst>
-                  <a:outerShdw blurRad="38100" dist="38100" dir="2700000" algn="tl">
-                    <a:srgbClr val="000000"/>
-                  </a:outerShdw>
-                </a:effectLst>
-                <a:latin typeface="Arial" charset="0"/>
-              </a:defRPr>
-            </a:lvl3pPr>
-            <a:lvl4pPr algn="ctr" rtl="0" eaLnBrk="0" fontAlgn="base" hangingPunct="0">
-              <a:spcBef>
-                <a:spcPct val="0"/>
-              </a:spcBef>
-              <a:spcAft>
-                <a:spcPct val="0"/>
-              </a:spcAft>
-              <a:defRPr sz="4400">
-                <a:solidFill>
-                  <a:schemeClr val="tx2"/>
-                </a:solidFill>
-                <a:effectLst>
-                  <a:outerShdw blurRad="38100" dist="38100" dir="2700000" algn="tl">
-                    <a:srgbClr val="000000"/>
-                  </a:outerShdw>
-                </a:effectLst>
-                <a:latin typeface="Arial" charset="0"/>
-              </a:defRPr>
-            </a:lvl4pPr>
-            <a:lvl5pPr algn="ctr" rtl="0" eaLnBrk="0" fontAlgn="base" hangingPunct="0">
-              <a:spcBef>
-                <a:spcPct val="0"/>
-              </a:spcBef>
-              <a:spcAft>
-                <a:spcPct val="0"/>
-              </a:spcAft>
-              <a:defRPr sz="4400">
-                <a:solidFill>
-                  <a:schemeClr val="tx2"/>
-                </a:solidFill>
-                <a:effectLst>
-                  <a:outerShdw blurRad="38100" dist="38100" dir="2700000" algn="tl">
-                    <a:srgbClr val="000000"/>
-                  </a:outerShdw>
-                </a:effectLst>
-                <a:latin typeface="Arial" charset="0"/>
-              </a:defRPr>
-            </a:lvl5pPr>
-            <a:lvl6pPr marL="457200" algn="ctr" rtl="0" fontAlgn="base">
-              <a:spcBef>
-                <a:spcPct val="0"/>
-              </a:spcBef>
-              <a:spcAft>
-                <a:spcPct val="0"/>
-              </a:spcAft>
-              <a:defRPr sz="4400">
-                <a:solidFill>
-                  <a:schemeClr val="tx2"/>
-                </a:solidFill>
-                <a:effectLst>
-                  <a:outerShdw blurRad="38100" dist="38100" dir="2700000" algn="tl">
-                    <a:srgbClr val="000000"/>
-                  </a:outerShdw>
-                </a:effectLst>
-                <a:latin typeface="Arial" charset="0"/>
-              </a:defRPr>
-            </a:lvl6pPr>
-            <a:lvl7pPr marL="914400" algn="ctr" rtl="0" fontAlgn="base">
-              <a:spcBef>
-                <a:spcPct val="0"/>
-              </a:spcBef>
-              <a:spcAft>
-                <a:spcPct val="0"/>
-              </a:spcAft>
-              <a:defRPr sz="4400">
-                <a:solidFill>
-                  <a:schemeClr val="tx2"/>
-                </a:solidFill>
-                <a:effectLst>
-                  <a:outerShdw blurRad="38100" dist="38100" dir="2700000" algn="tl">
-                    <a:srgbClr val="000000"/>
-                  </a:outerShdw>
-                </a:effectLst>
-                <a:latin typeface="Arial" charset="0"/>
-              </a:defRPr>
-            </a:lvl7pPr>
-            <a:lvl8pPr marL="1371600" algn="ctr" rtl="0" fontAlgn="base">
-              <a:spcBef>
-                <a:spcPct val="0"/>
-              </a:spcBef>
-              <a:spcAft>
-                <a:spcPct val="0"/>
-              </a:spcAft>
-              <a:defRPr sz="4400">
-                <a:solidFill>
-                  <a:schemeClr val="tx2"/>
-                </a:solidFill>
-                <a:effectLst>
-                  <a:outerShdw blurRad="38100" dist="38100" dir="2700000" algn="tl">
-                    <a:srgbClr val="000000"/>
-                  </a:outerShdw>
-                </a:effectLst>
-                <a:latin typeface="Arial" charset="0"/>
-              </a:defRPr>
-            </a:lvl8pPr>
-            <a:lvl9pPr marL="1828800" algn="ctr" rtl="0" fontAlgn="base">
-              <a:spcBef>
-                <a:spcPct val="0"/>
-              </a:spcBef>
-              <a:spcAft>
-                <a:spcPct val="0"/>
-              </a:spcAft>
-              <a:defRPr sz="4400">
-                <a:solidFill>
-                  <a:schemeClr val="tx2"/>
-                </a:solidFill>
-                <a:effectLst>
-                  <a:outerShdw blurRad="38100" dist="38100" dir="2700000" algn="tl">
-                    <a:srgbClr val="000000"/>
-                  </a:outerShdw>
-                </a:effectLst>
-                <a:latin typeface="Arial" charset="0"/>
-              </a:defRPr>
-            </a:lvl9pPr>
-          </a:lstStyle>
-          <a:p>
-            <a:pPr eaLnBrk="1" hangingPunct="1">
-              <a:defRPr/>
-            </a:pPr>
-            <a:br>
-              <a:rPr lang="en-US" altLang="zh-TW" sz="3300" dirty="0">
-                <a:ea typeface="新細明體" pitchFamily="18" charset="-120"/>
-              </a:rPr>
-            </a:br>
-            <a:r>
-              <a:rPr lang="en-US" altLang="zh-TW" sz="3300" dirty="0">
-                <a:effectLst/>
-                <a:ea typeface="新細明體" pitchFamily="18" charset="-120"/>
-              </a:rPr>
-              <a:t>Calling Convention </a:t>
-            </a:r>
-          </a:p>
-          <a:p>
-            <a:pPr eaLnBrk="1" hangingPunct="1">
-              <a:defRPr/>
-            </a:pPr>
-            <a:r>
-              <a:rPr lang="en-US" altLang="zh-TW" sz="3300" dirty="0">
-                <a:effectLst/>
-                <a:ea typeface="新細明體" pitchFamily="18" charset="-120"/>
-              </a:rPr>
-              <a:t>and</a:t>
-            </a:r>
-          </a:p>
-          <a:p>
-            <a:pPr eaLnBrk="1" hangingPunct="1">
-              <a:defRPr/>
-            </a:pPr>
-            <a:r>
-              <a:rPr lang="en-US" altLang="zh-TW" sz="3300" dirty="0">
-                <a:effectLst/>
-                <a:ea typeface="新細明體" pitchFamily="18" charset="-120"/>
-              </a:rPr>
-              <a:t>Caller/Callee Save Registers</a:t>
-            </a:r>
-          </a:p>
-        </p:txBody>
-      </p:sp>
-    </p:spTree>
-  </p:cSld>
-  <p:clrMapOvr>
-    <a:masterClrMapping/>
-  </p:clrMapOvr>
-</p:sld>
-</file>
-
-<file path=ppt/slides/slide20.xml><?xml version="1.0" encoding="utf-8"?>
+<file path=ppt/slides/slide21.xml><?xml version="1.0" encoding="utf-8"?>
 <p:sld xmlns:a="http://schemas.openxmlformats.org/drawingml/2006/main" xmlns:r="http://schemas.openxmlformats.org/officeDocument/2006/relationships" xmlns:p="http://schemas.openxmlformats.org/presentationml/2006/main">
   <p:cSld>
     <p:spTree>
@@ -20630,7 +21901,7 @@
                 <a:buFontTx/>
                 <a:buNone/>
               </a:pPr>
-              <a:t>20</a:t>
+              <a:t>21</a:t>
             </a:fld>
             <a:endParaRPr lang="en-US" altLang="zh-TW" sz="900"/>
           </a:p>
@@ -21163,7 +22434,7 @@
 </p:sld>
 </file>
 
-<file path=ppt/slides/slide21.xml><?xml version="1.0" encoding="utf-8"?>
+<file path=ppt/slides/slide22.xml><?xml version="1.0" encoding="utf-8"?>
 <p:sld xmlns:a="http://schemas.openxmlformats.org/drawingml/2006/main" xmlns:r="http://schemas.openxmlformats.org/officeDocument/2006/relationships" xmlns:p="http://schemas.openxmlformats.org/presentationml/2006/main">
   <p:cSld>
     <p:spTree>
@@ -21620,7 +22891,7 @@
                 <a:buFontTx/>
                 <a:buNone/>
               </a:pPr>
-              <a:t>21</a:t>
+              <a:t>22</a:t>
             </a:fld>
             <a:endParaRPr lang="en-US" altLang="zh-TW" sz="900"/>
           </a:p>
@@ -22198,7 +23469,7 @@
 </p:sld>
 </file>
 
-<file path=ppt/slides/slide22.xml><?xml version="1.0" encoding="utf-8"?>
+<file path=ppt/slides/slide23.xml><?xml version="1.0" encoding="utf-8"?>
 <p:sld xmlns:a="http://schemas.openxmlformats.org/drawingml/2006/main" xmlns:r="http://schemas.openxmlformats.org/officeDocument/2006/relationships" xmlns:p="http://schemas.openxmlformats.org/presentationml/2006/main">
   <p:cSld>
     <p:spTree>
@@ -22655,7 +23926,7 @@
                 <a:buFontTx/>
                 <a:buNone/>
               </a:pPr>
-              <a:t>22</a:t>
+              <a:t>23</a:t>
             </a:fld>
             <a:endParaRPr lang="en-US" altLang="zh-TW" sz="900"/>
           </a:p>
@@ -23102,194 +24373,13 @@
               <a:buNone/>
             </a:pPr>
             <a:r>
-              <a:rPr lang="en-US" altLang="zh-TW" sz="2100" b="1" dirty="0">
+              <a:rPr lang="en-US" altLang="zh-TW" sz="2100" b="1">
                 <a:solidFill>
                   <a:srgbClr val="2929FF"/>
                 </a:solidFill>
                 <a:ea typeface="新細明體" panose="02020500000000000000" pitchFamily="18" charset="-120"/>
               </a:rPr>
               <a:t>Function A ()</a:t>
-            </a:r>
-          </a:p>
-          <a:p>
-            <a:pPr>
-              <a:spcBef>
-                <a:spcPct val="0"/>
-              </a:spcBef>
-              <a:buClrTx/>
-              <a:buSzTx/>
-              <a:buFontTx/>
-              <a:buNone/>
-            </a:pPr>
-            <a:r>
-              <a:rPr lang="en-US" altLang="zh-TW" sz="2100" b="1" dirty="0">
-                <a:solidFill>
-                  <a:srgbClr val="2929FF"/>
-                </a:solidFill>
-                <a:ea typeface="新細明體" panose="02020500000000000000" pitchFamily="18" charset="-120"/>
-              </a:rPr>
-              <a:t>…</a:t>
-            </a:r>
-          </a:p>
-          <a:p>
-            <a:pPr>
-              <a:spcBef>
-                <a:spcPct val="0"/>
-              </a:spcBef>
-              <a:buClrTx/>
-              <a:buSzTx/>
-              <a:buFontTx/>
-              <a:buNone/>
-            </a:pPr>
-            <a:r>
-              <a:rPr lang="en-US" altLang="zh-TW" sz="2100" b="1" dirty="0" err="1">
-                <a:solidFill>
-                  <a:srgbClr val="2929FF"/>
-                </a:solidFill>
-                <a:ea typeface="新細明體" panose="02020500000000000000" pitchFamily="18" charset="-120"/>
-              </a:rPr>
-              <a:t>lw</a:t>
-            </a:r>
-            <a:r>
-              <a:rPr lang="en-US" altLang="zh-TW" sz="2100" b="1" dirty="0">
-                <a:solidFill>
-                  <a:srgbClr val="2929FF"/>
-                </a:solidFill>
-                <a:ea typeface="新細明體" panose="02020500000000000000" pitchFamily="18" charset="-120"/>
-              </a:rPr>
-              <a:t> $8 -4($</a:t>
-            </a:r>
-            <a:r>
-              <a:rPr lang="en-US" altLang="zh-TW" sz="2100" b="1" dirty="0" err="1">
-                <a:solidFill>
-                  <a:srgbClr val="2929FF"/>
-                </a:solidFill>
-                <a:ea typeface="新細明體" panose="02020500000000000000" pitchFamily="18" charset="-120"/>
-              </a:rPr>
-              <a:t>fp</a:t>
-            </a:r>
-            <a:r>
-              <a:rPr lang="en-US" altLang="zh-TW" sz="2100" b="1" dirty="0">
-                <a:solidFill>
-                  <a:srgbClr val="2929FF"/>
-                </a:solidFill>
-                <a:ea typeface="新細明體" panose="02020500000000000000" pitchFamily="18" charset="-120"/>
-              </a:rPr>
-              <a:t>)</a:t>
-            </a:r>
-          </a:p>
-          <a:p>
-            <a:pPr>
-              <a:spcBef>
-                <a:spcPct val="0"/>
-              </a:spcBef>
-              <a:buClrTx/>
-              <a:buSzTx/>
-              <a:buFontTx/>
-              <a:buNone/>
-            </a:pPr>
-            <a:r>
-              <a:rPr lang="en-US" altLang="zh-TW" sz="2100" b="1" dirty="0" err="1">
-                <a:solidFill>
-                  <a:srgbClr val="2929FF"/>
-                </a:solidFill>
-                <a:ea typeface="新細明體" panose="02020500000000000000" pitchFamily="18" charset="-120"/>
-              </a:rPr>
-              <a:t>lw</a:t>
-            </a:r>
-            <a:r>
-              <a:rPr lang="en-US" altLang="zh-TW" sz="2100" b="1" dirty="0">
-                <a:solidFill>
-                  <a:srgbClr val="2929FF"/>
-                </a:solidFill>
-                <a:ea typeface="新細明體" panose="02020500000000000000" pitchFamily="18" charset="-120"/>
-              </a:rPr>
-              <a:t> $9 -8($</a:t>
-            </a:r>
-            <a:r>
-              <a:rPr lang="en-US" altLang="zh-TW" sz="2100" b="1" dirty="0" err="1">
-                <a:solidFill>
-                  <a:srgbClr val="2929FF"/>
-                </a:solidFill>
-                <a:ea typeface="新細明體" panose="02020500000000000000" pitchFamily="18" charset="-120"/>
-              </a:rPr>
-              <a:t>fp</a:t>
-            </a:r>
-            <a:r>
-              <a:rPr lang="en-US" altLang="zh-TW" sz="2100" b="1" dirty="0">
-                <a:solidFill>
-                  <a:srgbClr val="2929FF"/>
-                </a:solidFill>
-                <a:ea typeface="新細明體" panose="02020500000000000000" pitchFamily="18" charset="-120"/>
-              </a:rPr>
-              <a:t>)</a:t>
-            </a:r>
-          </a:p>
-          <a:p>
-            <a:pPr>
-              <a:spcBef>
-                <a:spcPct val="0"/>
-              </a:spcBef>
-              <a:buClrTx/>
-              <a:buSzTx/>
-              <a:buFontTx/>
-              <a:buNone/>
-            </a:pPr>
-            <a:r>
-              <a:rPr lang="en-US" altLang="zh-TW" sz="2100" b="1" dirty="0">
-                <a:solidFill>
-                  <a:srgbClr val="2929FF"/>
-                </a:solidFill>
-                <a:ea typeface="新細明體" panose="02020500000000000000" pitchFamily="18" charset="-120"/>
-              </a:rPr>
-              <a:t>add $10, $8,$9</a:t>
-            </a:r>
-          </a:p>
-          <a:p>
-            <a:pPr>
-              <a:spcBef>
-                <a:spcPct val="0"/>
-              </a:spcBef>
-              <a:buClrTx/>
-              <a:buSzTx/>
-              <a:buFontTx/>
-              <a:buNone/>
-            </a:pPr>
-            <a:r>
-              <a:rPr lang="en-US" altLang="zh-TW" sz="2100" b="1" dirty="0" err="1">
-                <a:solidFill>
-                  <a:srgbClr val="2929FF"/>
-                </a:solidFill>
-                <a:ea typeface="新細明體" panose="02020500000000000000" pitchFamily="18" charset="-120"/>
-              </a:rPr>
-              <a:t>sw</a:t>
-            </a:r>
-            <a:r>
-              <a:rPr lang="en-US" altLang="zh-TW" sz="2100" b="1" dirty="0">
-                <a:solidFill>
-                  <a:srgbClr val="2929FF"/>
-                </a:solidFill>
-                <a:ea typeface="新細明體" panose="02020500000000000000" pitchFamily="18" charset="-120"/>
-              </a:rPr>
-              <a:t> $10, -12($</a:t>
-            </a:r>
-            <a:r>
-              <a:rPr lang="en-US" altLang="zh-TW" sz="2100" b="1" dirty="0" err="1">
-                <a:solidFill>
-                  <a:srgbClr val="2929FF"/>
-                </a:solidFill>
-                <a:ea typeface="新細明體" panose="02020500000000000000" pitchFamily="18" charset="-120"/>
-              </a:rPr>
-              <a:t>fp</a:t>
-            </a:r>
-            <a:r>
-              <a:rPr lang="en-US" altLang="zh-TW" sz="2100" b="1" dirty="0">
-                <a:solidFill>
-                  <a:srgbClr val="2929FF"/>
-                </a:solidFill>
-                <a:ea typeface="新細明體" panose="02020500000000000000" pitchFamily="18" charset="-120"/>
-              </a:rPr>
-              <a:t>)</a:t>
             </a:r>
           </a:p>
           <a:p>
@@ -23309,7 +24399,7 @@
                 </a:solidFill>
                 <a:ea typeface="新細明體" panose="02020500000000000000" pitchFamily="18" charset="-120"/>
               </a:rPr>
-              <a:t>$v0 =  B(1,2,3); /* function call */</a:t>
+              <a:t>…</a:t>
             </a:r>
           </a:p>
           <a:p>
@@ -23323,13 +24413,13 @@
               <a:buNone/>
             </a:pPr>
             <a:r>
-              <a:rPr lang="en-US" altLang="zh-TW" sz="2100" b="1" dirty="0">
+              <a:rPr lang="en-US" altLang="zh-TW" sz="2100" b="1">
                 <a:solidFill>
                   <a:srgbClr val="2929FF"/>
                 </a:solidFill>
                 <a:ea typeface="新細明體" panose="02020500000000000000" pitchFamily="18" charset="-120"/>
               </a:rPr>
-              <a:t>add $v0, $v0, $v0</a:t>
+              <a:t>lw $8 -4($fp)</a:t>
             </a:r>
           </a:p>
           <a:p>
@@ -23343,7 +24433,107 @@
               <a:buNone/>
             </a:pPr>
             <a:r>
-              <a:rPr lang="en-US" altLang="zh-TW" sz="2100" b="1" dirty="0">
+              <a:rPr lang="en-US" altLang="zh-TW" sz="2100" b="1">
+                <a:solidFill>
+                  <a:srgbClr val="2929FF"/>
+                </a:solidFill>
+                <a:ea typeface="新細明體" panose="02020500000000000000" pitchFamily="18" charset="-120"/>
+              </a:rPr>
+              <a:t>lw $9 -8($fp)</a:t>
+            </a:r>
+          </a:p>
+          <a:p>
+            <a:pPr>
+              <a:spcBef>
+                <a:spcPct val="0"/>
+              </a:spcBef>
+              <a:buClrTx/>
+              <a:buSzTx/>
+              <a:buFontTx/>
+              <a:buNone/>
+            </a:pPr>
+            <a:r>
+              <a:rPr lang="en-US" altLang="zh-TW" sz="2100" b="1">
+                <a:solidFill>
+                  <a:srgbClr val="2929FF"/>
+                </a:solidFill>
+                <a:ea typeface="新細明體" panose="02020500000000000000" pitchFamily="18" charset="-120"/>
+              </a:rPr>
+              <a:t>add $10, $8,$9</a:t>
+            </a:r>
+          </a:p>
+          <a:p>
+            <a:pPr>
+              <a:spcBef>
+                <a:spcPct val="0"/>
+              </a:spcBef>
+              <a:buClrTx/>
+              <a:buSzTx/>
+              <a:buFontTx/>
+              <a:buNone/>
+            </a:pPr>
+            <a:r>
+              <a:rPr lang="en-US" altLang="zh-TW" sz="2100" b="1">
+                <a:solidFill>
+                  <a:srgbClr val="2929FF"/>
+                </a:solidFill>
+                <a:ea typeface="新細明體" panose="02020500000000000000" pitchFamily="18" charset="-120"/>
+              </a:rPr>
+              <a:t>sw $10, -12($fp)</a:t>
+            </a:r>
+          </a:p>
+          <a:p>
+            <a:pPr>
+              <a:spcBef>
+                <a:spcPct val="0"/>
+              </a:spcBef>
+              <a:buClrTx/>
+              <a:buSzTx/>
+              <a:buFontTx/>
+              <a:buNone/>
+            </a:pPr>
+            <a:r>
+              <a:rPr lang="en-US" altLang="zh-TW" sz="2100" b="1">
+                <a:solidFill>
+                  <a:srgbClr val="2929FF"/>
+                </a:solidFill>
+                <a:ea typeface="新細明體" panose="02020500000000000000" pitchFamily="18" charset="-120"/>
+              </a:rPr>
+              <a:t>$v0 =  B(1,2,3); /* function call */</a:t>
+            </a:r>
+          </a:p>
+          <a:p>
+            <a:pPr>
+              <a:spcBef>
+                <a:spcPct val="0"/>
+              </a:spcBef>
+              <a:buClrTx/>
+              <a:buSzTx/>
+              <a:buFontTx/>
+              <a:buNone/>
+            </a:pPr>
+            <a:r>
+              <a:rPr lang="en-US" altLang="zh-TW" sz="2100" b="1">
+                <a:solidFill>
+                  <a:srgbClr val="2929FF"/>
+                </a:solidFill>
+                <a:ea typeface="新細明體" panose="02020500000000000000" pitchFamily="18" charset="-120"/>
+              </a:rPr>
+              <a:t>add $v0, $v0, $v0</a:t>
+            </a:r>
+          </a:p>
+          <a:p>
+            <a:pPr>
+              <a:spcBef>
+                <a:spcPct val="0"/>
+              </a:spcBef>
+              <a:buClrTx/>
+              <a:buSzTx/>
+              <a:buFontTx/>
+              <a:buNone/>
+            </a:pPr>
+            <a:r>
+              <a:rPr lang="en-US" altLang="zh-TW" sz="2100" b="1">
                 <a:solidFill>
                   <a:srgbClr val="2929FF"/>
                 </a:solidFill>
@@ -23351,7 +24541,7 @@
               </a:rPr>
               <a:t>return</a:t>
             </a:r>
-            <a:endParaRPr lang="zh-TW" altLang="en-US" sz="2100" b="1" dirty="0">
+            <a:endParaRPr lang="zh-TW" altLang="en-US" sz="2100" b="1">
               <a:solidFill>
                 <a:srgbClr val="2929FF"/>
               </a:solidFill>
@@ -23938,7 +25128,7 @@
 </p:sld>
 </file>
 
-<file path=ppt/slides/slide23.xml><?xml version="1.0" encoding="utf-8"?>
+<file path=ppt/slides/slide24.xml><?xml version="1.0" encoding="utf-8"?>
 <p:sld xmlns:a="http://schemas.openxmlformats.org/drawingml/2006/main" xmlns:r="http://schemas.openxmlformats.org/officeDocument/2006/relationships" xmlns:p="http://schemas.openxmlformats.org/presentationml/2006/main">
   <p:cSld>
     <p:spTree>
@@ -24395,7 +25585,7 @@
                 <a:buFontTx/>
                 <a:buNone/>
               </a:pPr>
-              <a:t>23</a:t>
+              <a:t>24</a:t>
             </a:fld>
             <a:endParaRPr lang="en-US" altLang="zh-TW" sz="900"/>
           </a:p>
@@ -25385,7 +26575,7 @@
 </p:sld>
 </file>
 
-<file path=ppt/slides/slide24.xml><?xml version="1.0" encoding="utf-8"?>
+<file path=ppt/slides/slide25.xml><?xml version="1.0" encoding="utf-8"?>
 <p:sld xmlns:a="http://schemas.openxmlformats.org/drawingml/2006/main" xmlns:r="http://schemas.openxmlformats.org/officeDocument/2006/relationships" xmlns:p="http://schemas.openxmlformats.org/presentationml/2006/main">
   <p:cSld>
     <p:spTree>
@@ -25842,7 +27032,7 @@
                 <a:buFontTx/>
                 <a:buNone/>
               </a:pPr>
-              <a:t>24</a:t>
+              <a:t>25</a:t>
             </a:fld>
             <a:endParaRPr lang="en-US" altLang="zh-TW" sz="900"/>
           </a:p>
@@ -26870,7 +28060,7 @@
 </p:sld>
 </file>
 
-<file path=ppt/slides/slide25.xml><?xml version="1.0" encoding="utf-8"?>
+<file path=ppt/slides/slide26.xml><?xml version="1.0" encoding="utf-8"?>
 <p:sld xmlns:a="http://schemas.openxmlformats.org/drawingml/2006/main" xmlns:r="http://schemas.openxmlformats.org/officeDocument/2006/relationships" xmlns:p="http://schemas.openxmlformats.org/presentationml/2006/main">
   <p:cSld>
     <p:spTree>
@@ -27327,7 +28517,7 @@
                 <a:buFontTx/>
                 <a:buNone/>
               </a:pPr>
-              <a:t>25</a:t>
+              <a:t>26</a:t>
             </a:fld>
             <a:endParaRPr lang="en-US" altLang="zh-TW" sz="900"/>
           </a:p>
@@ -31191,7 +32381,7 @@
         </p:nvCxnSpPr>
         <p:spPr bwMode="auto">
           <a:xfrm>
-            <a:off x="3842561" y="1729694"/>
+            <a:off x="3831030" y="1902787"/>
             <a:ext cx="377371" cy="0"/>
           </a:xfrm>
           <a:prstGeom prst="straightConnector1">
@@ -31491,7 +32681,7 @@
         </p:nvSpPr>
         <p:spPr>
           <a:xfrm>
-            <a:off x="4270287" y="1245023"/>
+            <a:off x="4284766" y="1166179"/>
             <a:ext cx="1223412" cy="338554"/>
           </a:xfrm>
           <a:prstGeom prst="rect">
@@ -31529,7 +32719,7 @@
         </p:nvSpPr>
         <p:spPr>
           <a:xfrm>
-            <a:off x="4278155" y="1061520"/>
+            <a:off x="4273235" y="965189"/>
             <a:ext cx="1223412" cy="338554"/>
           </a:xfrm>
           <a:prstGeom prst="rect">
@@ -31567,7 +32757,7 @@
         </p:nvSpPr>
         <p:spPr>
           <a:xfrm>
-            <a:off x="4287552" y="1430157"/>
+            <a:off x="4280890" y="1381224"/>
             <a:ext cx="1212191" cy="338554"/>
           </a:xfrm>
           <a:prstGeom prst="rect">
@@ -31643,7 +32833,7 @@
         </p:nvSpPr>
         <p:spPr>
           <a:xfrm>
-            <a:off x="4381261" y="1666953"/>
+            <a:off x="4434582" y="1638496"/>
             <a:ext cx="686406" cy="338554"/>
           </a:xfrm>
           <a:prstGeom prst="rect">
@@ -40151,6 +41341,208 @@
           <a:chExt cx="0" cy="0"/>
         </a:xfrm>
       </p:grpSpPr>
+      <p:sp>
+        <p:nvSpPr>
+          <p:cNvPr id="3075" name="Footer Placeholder 4">
+            <a:extLst>
+              <a:ext uri="{FF2B5EF4-FFF2-40B4-BE49-F238E27FC236}">
+                <a16:creationId xmlns:a16="http://schemas.microsoft.com/office/drawing/2014/main" id="{373909FB-C636-447F-9272-5642CFE0E444}"/>
+              </a:ext>
+            </a:extLst>
+          </p:cNvPr>
+          <p:cNvSpPr>
+            <a:spLocks noGrp="1"/>
+          </p:cNvSpPr>
+          <p:nvPr>
+            <p:ph type="ftr" sz="quarter" idx="4294967295"/>
+          </p:nvPr>
+        </p:nvSpPr>
+        <p:spPr bwMode="auto">
+          <a:xfrm>
+            <a:off x="1676400" y="6477000"/>
+            <a:ext cx="6172200" cy="304800"/>
+          </a:xfrm>
+          <a:prstGeom prst="rect">
+            <a:avLst/>
+          </a:prstGeom>
+          <a:noFill/>
+          <a:ln w="9525">
+            <a:noFill/>
+            <a:miter lim="800000"/>
+            <a:headEnd/>
+            <a:tailEnd/>
+          </a:ln>
+          <a:effectLst/>
+          <a:extLst>
+            <a:ext uri="{909E8E84-426E-40DD-AFC4-6F175D3DCCD1}">
+              <a14:hiddenFill xmlns:a14="http://schemas.microsoft.com/office/drawing/2010/main">
+                <a:solidFill>
+                  <a:srgbClr val="FFFFFF"/>
+                </a:solidFill>
+              </a14:hiddenFill>
+            </a:ext>
+            <a:ext uri="{91240B29-F687-4F45-9708-019B960494DF}">
+              <a14:hiddenLine xmlns:a14="http://schemas.microsoft.com/office/drawing/2010/main" w="9525">
+                <a:solidFill>
+                  <a:srgbClr val="000000"/>
+                </a:solidFill>
+                <a:miter lim="800000"/>
+                <a:headEnd/>
+                <a:tailEnd/>
+              </a14:hiddenLine>
+            </a:ext>
+          </a:extLst>
+        </p:spPr>
+        <p:txBody>
+          <a:bodyPr vert="horz" wrap="square" lIns="91440" tIns="45720" rIns="91440" bIns="45720" numCol="1" anchor="b" anchorCtr="0" compatLnSpc="1">
+            <a:prstTxWarp prst="textNoShape">
+              <a:avLst/>
+            </a:prstTxWarp>
+          </a:bodyPr>
+          <a:lstStyle>
+            <a:defPPr>
+              <a:defRPr lang="en-US"/>
+            </a:defPPr>
+            <a:lvl1pPr algn="ctr" rtl="0" eaLnBrk="1" fontAlgn="base" hangingPunct="1">
+              <a:spcBef>
+                <a:spcPct val="0"/>
+              </a:spcBef>
+              <a:spcAft>
+                <a:spcPct val="0"/>
+              </a:spcAft>
+              <a:defRPr sz="1400" kern="1200">
+                <a:solidFill>
+                  <a:schemeClr val="tx1"/>
+                </a:solidFill>
+                <a:effectLst>
+                  <a:outerShdw blurRad="38100" dist="38100" dir="2700000" algn="tl">
+                    <a:srgbClr val="000000"/>
+                  </a:outerShdw>
+                </a:effectLst>
+                <a:latin typeface="Arial" charset="0"/>
+                <a:ea typeface="新細明體" pitchFamily="18" charset="-120"/>
+                <a:cs typeface="+mn-cs"/>
+              </a:defRPr>
+            </a:lvl1pPr>
+            <a:lvl2pPr marL="457200" algn="l" rtl="0" eaLnBrk="0" fontAlgn="base" hangingPunct="0">
+              <a:spcBef>
+                <a:spcPct val="0"/>
+              </a:spcBef>
+              <a:spcAft>
+                <a:spcPct val="0"/>
+              </a:spcAft>
+              <a:defRPr kern="1200">
+                <a:solidFill>
+                  <a:schemeClr val="tx1"/>
+                </a:solidFill>
+                <a:latin typeface="Arial" panose="020B0604020202020204" pitchFamily="34" charset="0"/>
+                <a:ea typeface="+mn-ea"/>
+                <a:cs typeface="+mn-cs"/>
+              </a:defRPr>
+            </a:lvl2pPr>
+            <a:lvl3pPr marL="914400" algn="l" rtl="0" eaLnBrk="0" fontAlgn="base" hangingPunct="0">
+              <a:spcBef>
+                <a:spcPct val="0"/>
+              </a:spcBef>
+              <a:spcAft>
+                <a:spcPct val="0"/>
+              </a:spcAft>
+              <a:defRPr kern="1200">
+                <a:solidFill>
+                  <a:schemeClr val="tx1"/>
+                </a:solidFill>
+                <a:latin typeface="Arial" panose="020B0604020202020204" pitchFamily="34" charset="0"/>
+                <a:ea typeface="+mn-ea"/>
+                <a:cs typeface="+mn-cs"/>
+              </a:defRPr>
+            </a:lvl3pPr>
+            <a:lvl4pPr marL="1371600" algn="l" rtl="0" eaLnBrk="0" fontAlgn="base" hangingPunct="0">
+              <a:spcBef>
+                <a:spcPct val="0"/>
+              </a:spcBef>
+              <a:spcAft>
+                <a:spcPct val="0"/>
+              </a:spcAft>
+              <a:defRPr kern="1200">
+                <a:solidFill>
+                  <a:schemeClr val="tx1"/>
+                </a:solidFill>
+                <a:latin typeface="Arial" panose="020B0604020202020204" pitchFamily="34" charset="0"/>
+                <a:ea typeface="+mn-ea"/>
+                <a:cs typeface="+mn-cs"/>
+              </a:defRPr>
+            </a:lvl4pPr>
+            <a:lvl5pPr marL="1828800" algn="l" rtl="0" eaLnBrk="0" fontAlgn="base" hangingPunct="0">
+              <a:spcBef>
+                <a:spcPct val="0"/>
+              </a:spcBef>
+              <a:spcAft>
+                <a:spcPct val="0"/>
+              </a:spcAft>
+              <a:defRPr kern="1200">
+                <a:solidFill>
+                  <a:schemeClr val="tx1"/>
+                </a:solidFill>
+                <a:latin typeface="Arial" panose="020B0604020202020204" pitchFamily="34" charset="0"/>
+                <a:ea typeface="+mn-ea"/>
+                <a:cs typeface="+mn-cs"/>
+              </a:defRPr>
+            </a:lvl5pPr>
+            <a:lvl6pPr marL="2286000" algn="l" defTabSz="914400" rtl="0" eaLnBrk="1" latinLnBrk="0" hangingPunct="1">
+              <a:defRPr kern="1200">
+                <a:solidFill>
+                  <a:schemeClr val="tx1"/>
+                </a:solidFill>
+                <a:latin typeface="Arial" panose="020B0604020202020204" pitchFamily="34" charset="0"/>
+                <a:ea typeface="+mn-ea"/>
+                <a:cs typeface="+mn-cs"/>
+              </a:defRPr>
+            </a:lvl6pPr>
+            <a:lvl7pPr marL="2743200" algn="l" defTabSz="914400" rtl="0" eaLnBrk="1" latinLnBrk="0" hangingPunct="1">
+              <a:defRPr kern="1200">
+                <a:solidFill>
+                  <a:schemeClr val="tx1"/>
+                </a:solidFill>
+                <a:latin typeface="Arial" panose="020B0604020202020204" pitchFamily="34" charset="0"/>
+                <a:ea typeface="+mn-ea"/>
+                <a:cs typeface="+mn-cs"/>
+              </a:defRPr>
+            </a:lvl7pPr>
+            <a:lvl8pPr marL="3200400" algn="l" defTabSz="914400" rtl="0" eaLnBrk="1" latinLnBrk="0" hangingPunct="1">
+              <a:defRPr kern="1200">
+                <a:solidFill>
+                  <a:schemeClr val="tx1"/>
+                </a:solidFill>
+                <a:latin typeface="Arial" panose="020B0604020202020204" pitchFamily="34" charset="0"/>
+                <a:ea typeface="+mn-ea"/>
+                <a:cs typeface="+mn-cs"/>
+              </a:defRPr>
+            </a:lvl8pPr>
+            <a:lvl9pPr marL="3657600" algn="l" defTabSz="914400" rtl="0" eaLnBrk="1" latinLnBrk="0" hangingPunct="1">
+              <a:defRPr kern="1200">
+                <a:solidFill>
+                  <a:schemeClr val="tx1"/>
+                </a:solidFill>
+                <a:latin typeface="Arial" panose="020B0604020202020204" pitchFamily="34" charset="0"/>
+                <a:ea typeface="+mn-ea"/>
+                <a:cs typeface="+mn-cs"/>
+              </a:defRPr>
+            </a:lvl9pPr>
+          </a:lstStyle>
+          <a:p>
+            <a:pPr eaLnBrk="1" hangingPunct="1">
+              <a:defRPr/>
+            </a:pPr>
+            <a:r>
+              <a:rPr lang="en-US" altLang="zh-TW"/>
+              <a:t>Department of Computer Science and Engineering</a:t>
+            </a:r>
+            <a:endParaRPr lang="en-US" altLang="zh-TW">
+              <a:ea typeface="新細明體" charset="-120"/>
+            </a:endParaRPr>
+          </a:p>
+        </p:txBody>
+      </p:sp>
       <p:sp>
         <p:nvSpPr>
           <p:cNvPr id="3076" name="Slide Number Placeholder 5">

--- a/slide/CA3060-3-CallingConvention.pptx
+++ b/slide/CA3060-3-CallingConvention.pptx
@@ -470,7 +470,7 @@
           <a:p>
             <a:fld id="{45BDCE37-E9BE-4280-8D68-34E43D66CEDB}" type="datetimeFigureOut">
               <a:rPr lang="zh-TW" altLang="en-US" smtClean="0"/>
-              <a:t>2026/2/28</a:t>
+              <a:t>2026/3/2</a:t>
             </a:fld>
             <a:endParaRPr lang="zh-TW" altLang="en-US"/>
           </a:p>
@@ -635,7 +635,7 @@
           <a:p>
             <a:fld id="{FBFBA883-381C-409E-9635-BB54B21745E4}" type="datetimeFigureOut">
               <a:rPr lang="zh-TW" altLang="en-US" smtClean="0"/>
-              <a:t>2026/2/28</a:t>
+              <a:t>2026/3/2</a:t>
             </a:fld>
             <a:endParaRPr lang="zh-TW" altLang="en-US"/>
           </a:p>
@@ -7168,7 +7168,7 @@
                 <a:effectLst/>
                 <a:ea typeface="新細明體" pitchFamily="18" charset="-120"/>
               </a:rPr>
-              <a:t> may be allocated to a register. If it is assigned to a register in the range of t0-t6, it must be saved and restored during a call to the function </a:t>
+              <a:t> may be allocated to a register. If it is assigned to a register in the range of t0-t6, it must be saved and restored across a call to the function </a:t>
             </a:r>
             <a:r>
               <a:rPr lang="en-US" altLang="zh-TW" sz="1800" dirty="0" err="1">
@@ -7196,7 +7196,21 @@
                 <a:effectLst/>
                 <a:ea typeface="新細明體" pitchFamily="18" charset="-120"/>
               </a:rPr>
-              <a:t>() because the function will take care of saving and restoring it.</a:t>
+              <a:t>() because the function </a:t>
+            </a:r>
+            <a:r>
+              <a:rPr lang="en-US" altLang="zh-TW" sz="1800" dirty="0" err="1">
+                <a:effectLst/>
+                <a:ea typeface="新細明體" pitchFamily="18" charset="-120"/>
+              </a:rPr>
+              <a:t>funct_C</a:t>
+            </a:r>
+            <a:r>
+              <a:rPr lang="en-US" altLang="zh-TW" sz="1800" dirty="0">
+                <a:effectLst/>
+                <a:ea typeface="新細明體" pitchFamily="18" charset="-120"/>
+              </a:rPr>
+              <a:t>() will take care of saving and restoring it.</a:t>
             </a:r>
             <a:r>
               <a:rPr lang="en-US" altLang="zh-TW" sz="2000" dirty="0">
@@ -43967,7 +43981,7 @@
         </p:nvCxnSpPr>
         <p:spPr bwMode="auto">
           <a:xfrm>
-            <a:off x="1574800" y="1255486"/>
+            <a:off x="1201964" y="1269774"/>
             <a:ext cx="1255486" cy="0"/>
           </a:xfrm>
           <a:prstGeom prst="straightConnector1">
@@ -43999,7 +44013,7 @@
         </p:nvCxnSpPr>
         <p:spPr bwMode="auto">
           <a:xfrm>
-            <a:off x="1509486" y="3468915"/>
+            <a:off x="1201964" y="3561783"/>
             <a:ext cx="1255486" cy="0"/>
           </a:xfrm>
           <a:prstGeom prst="straightConnector1">
